--- a/RTP Resources/RTP_L&L_2026.pptx
+++ b/RTP Resources/RTP_L&L_2026.pptx
@@ -5,7 +5,7 @@
     <p:sldMasterId id="2147483672" r:id="rId1"/>
   </p:sldMasterIdLst>
   <p:notesMasterIdLst>
-    <p:notesMasterId r:id="rId15"/>
+    <p:notesMasterId r:id="rId17"/>
   </p:notesMasterIdLst>
   <p:sldIdLst>
     <p:sldId id="258" r:id="rId2"/>
@@ -13,14 +13,16 @@
     <p:sldId id="272" r:id="rId4"/>
     <p:sldId id="276" r:id="rId5"/>
     <p:sldId id="277" r:id="rId6"/>
-    <p:sldId id="266" r:id="rId7"/>
-    <p:sldId id="265" r:id="rId8"/>
-    <p:sldId id="267" r:id="rId9"/>
-    <p:sldId id="268" r:id="rId10"/>
-    <p:sldId id="275" r:id="rId11"/>
-    <p:sldId id="269" r:id="rId12"/>
-    <p:sldId id="274" r:id="rId13"/>
-    <p:sldId id="270" r:id="rId14"/>
+    <p:sldId id="278" r:id="rId7"/>
+    <p:sldId id="279" r:id="rId8"/>
+    <p:sldId id="266" r:id="rId9"/>
+    <p:sldId id="265" r:id="rId10"/>
+    <p:sldId id="267" r:id="rId11"/>
+    <p:sldId id="268" r:id="rId12"/>
+    <p:sldId id="275" r:id="rId13"/>
+    <p:sldId id="269" r:id="rId14"/>
+    <p:sldId id="274" r:id="rId15"/>
+    <p:sldId id="270" r:id="rId16"/>
   </p:sldIdLst>
   <p:sldSz cx="12192000" cy="6858000"/>
   <p:notesSz cx="6858000" cy="9144000"/>
@@ -127,12 +129,20 @@
 </p:presentation>
 </file>
 
+<file path=ppt/revisionInfo.xml><?xml version="1.0" encoding="utf-8"?>
+<p1510:revInfo xmlns:a="http://schemas.openxmlformats.org/drawingml/2006/main" xmlns:r="http://schemas.openxmlformats.org/officeDocument/2006/relationships" xmlns:p1510="http://schemas.microsoft.com/office/powerpoint/2015/10/main">
+  <p1510:revLst>
+    <p1510:client id="{F82490E7-A7CD-694C-84E8-41E5CB8A531B}" v="12" dt="2026-05-09T19:01:38.991"/>
+  </p1510:revLst>
+</p1510:revInfo>
+</file>
+
 <file path=ppt/changesInfos/changesInfo1.xml><?xml version="1.0" encoding="utf-8"?>
 <pc:chgInfo xmlns:a="http://schemas.openxmlformats.org/drawingml/2006/main" xmlns:r="http://schemas.openxmlformats.org/officeDocument/2006/relationships" xmlns:ac="http://schemas.microsoft.com/office/drawing/2013/main/command" xmlns:pc="http://schemas.microsoft.com/office/powerpoint/2013/main/command">
   <pc:docChgLst>
     <pc:chgData name="Andrew Kates" userId="8fd5ec3e-c8da-46f6-bbad-ce7a7878ba0f" providerId="ADAL" clId="{F3C475C8-A694-5247-A1B1-BD486B98B493}"/>
     <pc:docChg chg="undo redo custSel addSld modSld sldOrd">
-      <pc:chgData name="Andrew Kates" userId="8fd5ec3e-c8da-46f6-bbad-ce7a7878ba0f" providerId="ADAL" clId="{F3C475C8-A694-5247-A1B1-BD486B98B493}" dt="2026-04-14T22:04:54.614" v="10314" actId="20577"/>
+      <pc:chgData name="Andrew Kates" userId="8fd5ec3e-c8da-46f6-bbad-ce7a7878ba0f" providerId="ADAL" clId="{F3C475C8-A694-5247-A1B1-BD486B98B493}" dt="2026-05-09T19:32:24.868" v="12884" actId="20577"/>
       <pc:docMkLst>
         <pc:docMk/>
       </pc:docMkLst>
@@ -179,6 +189,44 @@
             <pc:docMk/>
             <pc:sldMk cId="2486907702" sldId="277"/>
             <ac:spMk id="3" creationId="{DC2085FF-7136-2E20-D840-6A95FBEE8989}"/>
+          </ac:spMkLst>
+        </pc:spChg>
+      </pc:sldChg>
+      <pc:sldChg chg="modSp new mod ord">
+        <pc:chgData name="Andrew Kates" userId="8fd5ec3e-c8da-46f6-bbad-ce7a7878ba0f" providerId="ADAL" clId="{F3C475C8-A694-5247-A1B1-BD486B98B493}" dt="2026-05-09T18:52:25.398" v="10349" actId="20577"/>
+        <pc:sldMkLst>
+          <pc:docMk/>
+          <pc:sldMk cId="1960656376" sldId="278"/>
+        </pc:sldMkLst>
+        <pc:spChg chg="mod">
+          <ac:chgData name="Andrew Kates" userId="8fd5ec3e-c8da-46f6-bbad-ce7a7878ba0f" providerId="ADAL" clId="{F3C475C8-A694-5247-A1B1-BD486B98B493}" dt="2026-05-09T18:52:25.398" v="10349" actId="20577"/>
+          <ac:spMkLst>
+            <pc:docMk/>
+            <pc:sldMk cId="1960656376" sldId="278"/>
+            <ac:spMk id="2" creationId="{7AD3A37E-B017-9684-8292-92306C831849}"/>
+          </ac:spMkLst>
+        </pc:spChg>
+      </pc:sldChg>
+      <pc:sldChg chg="modSp new mod modAnim modNotesTx">
+        <pc:chgData name="Andrew Kates" userId="8fd5ec3e-c8da-46f6-bbad-ce7a7878ba0f" providerId="ADAL" clId="{F3C475C8-A694-5247-A1B1-BD486B98B493}" dt="2026-05-09T19:32:24.868" v="12884" actId="20577"/>
+        <pc:sldMkLst>
+          <pc:docMk/>
+          <pc:sldMk cId="3163074255" sldId="279"/>
+        </pc:sldMkLst>
+        <pc:spChg chg="mod">
+          <ac:chgData name="Andrew Kates" userId="8fd5ec3e-c8da-46f6-bbad-ce7a7878ba0f" providerId="ADAL" clId="{F3C475C8-A694-5247-A1B1-BD486B98B493}" dt="2026-05-09T18:55:29.125" v="10466" actId="20577"/>
+          <ac:spMkLst>
+            <pc:docMk/>
+            <pc:sldMk cId="3163074255" sldId="279"/>
+            <ac:spMk id="2" creationId="{204749BF-0610-5307-2D7D-4D63AAAAFB20}"/>
+          </ac:spMkLst>
+        </pc:spChg>
+        <pc:spChg chg="mod">
+          <ac:chgData name="Andrew Kates" userId="8fd5ec3e-c8da-46f6-bbad-ce7a7878ba0f" providerId="ADAL" clId="{F3C475C8-A694-5247-A1B1-BD486B98B493}" dt="2026-05-09T19:01:38.991" v="10956" actId="255"/>
+          <ac:spMkLst>
+            <pc:docMk/>
+            <pc:sldMk cId="3163074255" sldId="279"/>
+            <ac:spMk id="3" creationId="{AA8218A9-E9CC-32B5-D297-CABB62CD1204}"/>
           </ac:spMkLst>
         </pc:spChg>
       </pc:sldChg>
@@ -21112,7 +21160,7 @@
           <a:p>
             <a:fld id="{0D194C35-0AA9-41CB-84F6-AF1A2EF42389}" type="datetimeFigureOut">
               <a:rPr lang="en-CA" smtClean="0"/>
-              <a:t>2026-04-14</a:t>
+              <a:t>2026-05-09</a:t>
             </a:fld>
             <a:endParaRPr lang="en-CA"/>
           </a:p>
@@ -21475,6 +21523,766 @@
   <p:cSld>
     <p:spTree>
       <p:nvGrpSpPr>
+        <p:cNvPr id="1" name=""/>
+        <p:cNvGrpSpPr/>
+        <p:nvPr/>
+      </p:nvGrpSpPr>
+      <p:grpSpPr>
+        <a:xfrm>
+          <a:off x="0" y="0"/>
+          <a:ext cx="0" cy="0"/>
+          <a:chOff x="0" y="0"/>
+          <a:chExt cx="0" cy="0"/>
+        </a:xfrm>
+      </p:grpSpPr>
+      <p:sp>
+        <p:nvSpPr>
+          <p:cNvPr id="2" name="Slide Image Placeholder 1"/>
+          <p:cNvSpPr>
+            <a:spLocks noGrp="1" noRot="1" noChangeAspect="1"/>
+          </p:cNvSpPr>
+          <p:nvPr>
+            <p:ph type="sldImg"/>
+          </p:nvPr>
+        </p:nvSpPr>
+        <p:spPr/>
+      </p:sp>
+      <p:sp>
+        <p:nvSpPr>
+          <p:cNvPr id="3" name="Notes Placeholder 2"/>
+          <p:cNvSpPr>
+            <a:spLocks noGrp="1"/>
+          </p:cNvSpPr>
+          <p:nvPr>
+            <p:ph type="body" idx="1"/>
+          </p:nvPr>
+        </p:nvSpPr>
+        <p:spPr/>
+        <p:txBody>
+          <a:bodyPr/>
+          <a:lstStyle/>
+          <a:p>
+            <a:r>
+              <a:rPr lang="en-CA" sz="1200" b="0" dirty="0"/>
+              <a:t>My goal with this slide is to just share one idea that I have of how this product could be delivered </a:t>
+            </a:r>
+          </a:p>
+          <a:p>
+            <a:endParaRPr lang="en-CA" sz="1200" b="0" dirty="0"/>
+          </a:p>
+          <a:p>
+            <a:r>
+              <a:rPr lang="en-CA" sz="1200" b="0" dirty="0"/>
+              <a:t>A lot of the talk that I’ve heard is “how do we get the NSOs to fund it”..</a:t>
+            </a:r>
+          </a:p>
+          <a:p>
+            <a:r>
+              <a:rPr lang="en-CA" sz="1200" b="0" dirty="0"/>
+              <a:t>My proposal would be to start with a different business model which would be something more subscription based.</a:t>
+            </a:r>
+          </a:p>
+          <a:p>
+            <a:endParaRPr lang="en-CA" sz="1200" b="0" dirty="0"/>
+          </a:p>
+          <a:p>
+            <a:r>
+              <a:rPr lang="en-CA" sz="1200" b="0" dirty="0"/>
+              <a:t>So in this example there’s a monthly cost per athlete, and that can be scalable to our time commitment and the integration with our services.</a:t>
+            </a:r>
+          </a:p>
+          <a:p>
+            <a:endParaRPr lang="en-CA" sz="1200" b="0" dirty="0"/>
+          </a:p>
+          <a:p>
+            <a:r>
+              <a:rPr lang="en-CA" sz="1200" b="0" dirty="0"/>
+              <a:t>So let’s say a bronze package</a:t>
+            </a:r>
+          </a:p>
+          <a:p>
+            <a:r>
+              <a:rPr lang="en-CA" sz="1200" b="0" dirty="0"/>
+              <a:t>-relatively inexpensive to customer / relatively simple for us to deliver</a:t>
+            </a:r>
+          </a:p>
+          <a:p>
+            <a:r>
+              <a:rPr lang="en-CA" sz="1200" b="0" dirty="0"/>
+              <a:t>And then in contrast, a gold package, would essentially be an improved and standardized version of what we already do for our Olympic athletes</a:t>
+            </a:r>
+          </a:p>
+          <a:p>
+            <a:r>
+              <a:rPr lang="en-CA" sz="1200" b="0" dirty="0"/>
+              <a:t>-very time consuming / valued accordingly</a:t>
+            </a:r>
+          </a:p>
+          <a:p>
+            <a:endParaRPr lang="en-CA" sz="1200" b="0" dirty="0"/>
+          </a:p>
+          <a:p>
+            <a:r>
+              <a:rPr lang="en-CA" sz="1200" b="0" dirty="0"/>
+              <a:t>In addition to the subscription model, we could offer an upfront option, thinking specifically of our partner NSOs, </a:t>
+            </a:r>
+          </a:p>
+          <a:p>
+            <a:r>
+              <a:rPr lang="en-CA" sz="1200" b="0" dirty="0"/>
+              <a:t>This would be priced strategically to allow us to have some guaranteed revenue and to allow the sports to have cost certainty and the knowledge that their athletes will be well supported in the case of injury</a:t>
+            </a:r>
+          </a:p>
+          <a:p>
+            <a:endParaRPr lang="en-CA" sz="1200" b="0" dirty="0"/>
+          </a:p>
+          <a:p>
+            <a:r>
+              <a:rPr lang="en-CA" sz="1200" b="0" dirty="0"/>
+              <a:t>Upfront options could be scaled in much the same way</a:t>
+            </a:r>
+          </a:p>
+          <a:p>
+            <a:endParaRPr lang="en-CA" sz="1200" b="0" dirty="0"/>
+          </a:p>
+          <a:p>
+            <a:endParaRPr lang="en-CA" sz="1200" b="0" dirty="0"/>
+          </a:p>
+          <a:p>
+            <a:endParaRPr lang="en-CA" sz="1200" b="0" dirty="0"/>
+          </a:p>
+          <a:p>
+            <a:endParaRPr lang="en-CA" sz="1200" b="0" dirty="0"/>
+          </a:p>
+          <a:p>
+            <a:endParaRPr lang="en-CA" sz="1200" b="0" dirty="0"/>
+          </a:p>
+          <a:p>
+            <a:endParaRPr lang="en-CA" sz="1200" b="0" dirty="0"/>
+          </a:p>
+          <a:p>
+            <a:endParaRPr lang="en-CA" sz="1200" b="0" dirty="0"/>
+          </a:p>
+          <a:p>
+            <a:r>
+              <a:rPr lang="en-CA" sz="1200" b="0" dirty="0"/>
+              <a:t>Offer a product that can be effective without a massive time commitment by our staff, but is made more effective proportionately with more time commitment and deeper integration with our staff and services.</a:t>
+            </a:r>
+          </a:p>
+          <a:p>
+            <a:r>
+              <a:rPr lang="en-CA" sz="1200" b="0" dirty="0"/>
+              <a:t>Chart: Bronze, Silver, Gold..</a:t>
+            </a:r>
+          </a:p>
+          <a:p>
+            <a:r>
+              <a:rPr lang="en-CA" sz="1200" b="0" dirty="0"/>
+              <a:t>	protocol, sessions, testing..</a:t>
+            </a:r>
+          </a:p>
+          <a:p>
+            <a:endParaRPr lang="en-CA" sz="1200" b="0" dirty="0"/>
+          </a:p>
+          <a:p>
+            <a:endParaRPr lang="en-CA" sz="1200" b="0" dirty="0"/>
+          </a:p>
+          <a:p>
+            <a:r>
+              <a:rPr lang="en-CA" sz="1200" b="0" dirty="0"/>
+              <a:t>So Bronze..</a:t>
+            </a:r>
+          </a:p>
+          <a:p>
+            <a:r>
+              <a:rPr lang="en-CA" sz="1200" b="0" dirty="0"/>
+              <a:t>So we’re offering a specialized service, we’re bringing in monthly revenue, and we are not making a huge time-commitment.</a:t>
+            </a:r>
+          </a:p>
+          <a:p>
+            <a:endParaRPr lang="en-CA" sz="1200" b="0" dirty="0"/>
+          </a:p>
+          <a:p>
+            <a:r>
+              <a:rPr lang="en-CA" sz="1200" b="0" dirty="0"/>
+              <a:t>However, we design it in such a way, and make it clear, that the more contact the athlete has with our staff and our services, the more effective the rehab will be..</a:t>
+            </a:r>
+          </a:p>
+          <a:p>
+            <a:endParaRPr lang="en-CA" sz="1200" b="0" dirty="0"/>
+          </a:p>
+          <a:p>
+            <a:endParaRPr lang="en-CA" sz="1200" b="0" dirty="0"/>
+          </a:p>
+          <a:p>
+            <a:r>
+              <a:rPr lang="en-CA" sz="1200" b="0" dirty="0"/>
+              <a:t>Gold package, is likely very similar to what we do now for our NSOs, which is a massive time commitment, and impossible for us to recoup anything close to the real value on what we deliver</a:t>
+            </a:r>
+          </a:p>
+          <a:p>
+            <a:endParaRPr lang="en-CA" sz="1200" b="0" dirty="0"/>
+          </a:p>
+          <a:p>
+            <a:endParaRPr lang="en-CA" sz="1200" b="0" dirty="0"/>
+          </a:p>
+          <a:p>
+            <a:endParaRPr lang="en-CA" sz="1200" b="0" dirty="0"/>
+          </a:p>
+          <a:p>
+            <a:endParaRPr lang="en-CA" sz="1200" b="0" dirty="0"/>
+          </a:p>
+          <a:p>
+            <a:endParaRPr lang="en-CA" sz="1200" b="0" dirty="0"/>
+          </a:p>
+          <a:p>
+            <a:r>
+              <a:rPr lang="en-CA" sz="1200" b="0" dirty="0"/>
+              <a:t>. This is something that can be applied to athletes from any of the identified target markets.  Just for an example, we develop a bronze package that gives the athlete access to the ACL protocol and they get 1 workout in our facility and 1 testing session per month.</a:t>
+            </a:r>
+          </a:p>
+          <a:p>
+            <a:endParaRPr lang="en-CA" sz="1200" b="0" dirty="0"/>
+          </a:p>
+          <a:p>
+            <a:r>
+              <a:rPr lang="en-CA" sz="1200" b="0" dirty="0"/>
+              <a:t>The reason I chose to use this example specifically, I think that the way to get value in the rehab field is to </a:t>
+            </a:r>
+          </a:p>
+          <a:p>
+            <a:endParaRPr lang="en-CA" sz="1200" b="1" dirty="0"/>
+          </a:p>
+          <a:p>
+            <a:r>
+              <a:rPr lang="en-CA" sz="1200" b="1" dirty="0"/>
+              <a:t>Hybrid business model</a:t>
+            </a:r>
+          </a:p>
+          <a:p>
+            <a:r>
+              <a:rPr lang="en-CA" sz="1200" b="0" dirty="0"/>
+              <a:t>NSOs (and others) invest in the program upfront </a:t>
+            </a:r>
+          </a:p>
+          <a:p>
+            <a:endParaRPr lang="en-CA" sz="1200" b="1" dirty="0"/>
+          </a:p>
+          <a:p>
+            <a:r>
+              <a:rPr lang="en-CA" sz="1200" b="1" dirty="0"/>
+              <a:t>Subscription</a:t>
+            </a:r>
+          </a:p>
+          <a:p>
+            <a:r>
+              <a:rPr lang="en-CA" sz="1200" b="0" dirty="0"/>
+              <a:t>I think it might work better for most as a subscription model.</a:t>
+            </a:r>
+          </a:p>
+          <a:p>
+            <a:r>
+              <a:rPr lang="en-CA" sz="1200" b="0" dirty="0"/>
+              <a:t>Maybe not the sport, since they would require “Gold” level service which should be extremely expensive.</a:t>
+            </a:r>
+          </a:p>
+          <a:p>
+            <a:endParaRPr lang="en-CA" sz="1200" b="0" dirty="0"/>
+          </a:p>
+          <a:p>
+            <a:endParaRPr lang="en-CA" sz="1200" b="1" dirty="0"/>
+          </a:p>
+          <a:p>
+            <a:endParaRPr lang="en-CA" sz="1200" b="1" dirty="0"/>
+          </a:p>
+          <a:p>
+            <a:endParaRPr lang="en-CA" sz="1200" b="1" dirty="0"/>
+          </a:p>
+          <a:p>
+            <a:endParaRPr lang="en-CA" sz="1200" b="1" dirty="0"/>
+          </a:p>
+          <a:p>
+            <a:endParaRPr lang="en-CA" sz="1200" b="1" dirty="0"/>
+          </a:p>
+          <a:p>
+            <a:endParaRPr lang="en-CA" sz="1200" b="1" dirty="0"/>
+          </a:p>
+          <a:p>
+            <a:endParaRPr lang="en-CA" sz="1200" b="1" dirty="0"/>
+          </a:p>
+          <a:p>
+            <a:r>
+              <a:rPr lang="en-CA" sz="1200" b="1" dirty="0"/>
+              <a:t>Pull together a draft top-level forecast of potential revenues and expenses into a draft budget</a:t>
+            </a:r>
+          </a:p>
+          <a:p>
+            <a:r>
+              <a:rPr lang="en-CA" sz="1200" b="1" dirty="0"/>
+              <a:t>Within the context of sport, show that in a not-for-profit model, there would be enough interest to support the solutions:</a:t>
+            </a:r>
+          </a:p>
+          <a:p>
+            <a:r>
+              <a:rPr lang="en-CA" sz="1200" b="0" dirty="0"/>
+              <a:t>-Interest is a funny word, it’s more like “need”.  Maybe some people are ”interested”</a:t>
+            </a:r>
+          </a:p>
+          <a:p>
+            <a:r>
+              <a:rPr lang="en-CA" sz="1200" b="0" dirty="0"/>
+              <a:t>-We will be doing rehabs either way</a:t>
+            </a:r>
+          </a:p>
+          <a:p>
+            <a:r>
+              <a:rPr lang="en-CA" sz="1200" b="0" dirty="0"/>
+              <a:t>	Even if we don’t care about doing it well for the sake of it…</a:t>
+            </a:r>
+          </a:p>
+          <a:p>
+            <a:r>
+              <a:rPr lang="en-CA" sz="1200" b="0" dirty="0"/>
+              <a:t>	We might as well do it in a highly organized manner</a:t>
+            </a:r>
+          </a:p>
+          <a:p>
+            <a:r>
+              <a:rPr lang="en-CA" sz="1200" b="0" dirty="0"/>
+              <a:t>-Build the thing, present it to them, convince NSOs to pay upfront</a:t>
+            </a:r>
+          </a:p>
+          <a:p>
+            <a:r>
+              <a:rPr lang="en-CA" sz="1200" b="0" dirty="0"/>
+              <a:t>	If someone gets hurt, the rehab is included in the agreement, and they know exactly what they 	are getting from the rehab.</a:t>
+            </a:r>
+          </a:p>
+          <a:p>
+            <a:r>
+              <a:rPr lang="en-CA" sz="1200" b="0" dirty="0"/>
+              <a:t>	Or they can pay the PN rate when someone gets injured..?</a:t>
+            </a:r>
+          </a:p>
+          <a:p>
+            <a:r>
+              <a:rPr lang="en-CA" sz="1200" b="0" dirty="0"/>
+              <a:t>	i.e. You pay $10k per year for full access OR you pay $20k for a 12 month rehab (this is a bargain for the full service including staff time commitment)</a:t>
+            </a:r>
+          </a:p>
+          <a:p>
+            <a:endParaRPr lang="en-US" b="1" dirty="0"/>
+          </a:p>
+          <a:p>
+            <a:endParaRPr lang="en-CA" sz="1200" dirty="0"/>
+          </a:p>
+          <a:p>
+            <a:endParaRPr lang="en-CA" sz="1200" dirty="0"/>
+          </a:p>
+          <a:p>
+            <a:r>
+              <a:rPr lang="en-CA" sz="1200" b="1" dirty="0"/>
+              <a:t>Is there enough revenues to cover costs in a sustainable manner?</a:t>
+            </a:r>
+          </a:p>
+          <a:p>
+            <a:r>
+              <a:rPr lang="en-CA" sz="1200" dirty="0"/>
+              <a:t>-I feel like it’s not PS job to collect revenue</a:t>
+            </a:r>
+          </a:p>
+          <a:p>
+            <a:r>
+              <a:rPr lang="en-CA" sz="1200" dirty="0"/>
+              <a:t>-Our job is to offer the best service possible, not to sell it or ensure collection of revenue</a:t>
+            </a:r>
+          </a:p>
+          <a:p>
+            <a:r>
+              <a:rPr lang="en-CA" sz="1200" dirty="0"/>
+              <a:t>-PS does the work to generate the revenue, the revenue just doesn’t always get collected</a:t>
+            </a:r>
+            <a:endParaRPr lang="en-US" dirty="0"/>
+          </a:p>
+          <a:p>
+            <a:endParaRPr lang="en-US" dirty="0"/>
+          </a:p>
+          <a:p>
+            <a:endParaRPr lang="en-US" dirty="0"/>
+          </a:p>
+          <a:p>
+            <a:endParaRPr lang="en-US" dirty="0"/>
+          </a:p>
+          <a:p>
+            <a:r>
+              <a:rPr lang="en-US" dirty="0"/>
+              <a:t>AK:</a:t>
+            </a:r>
+          </a:p>
+          <a:p>
+            <a:r>
+              <a:rPr lang="en-US" dirty="0"/>
+              <a:t>-Our core business is supposed to be supporting Canadian high performance athletes.  This is a crucial part of supporting them</a:t>
+            </a:r>
+          </a:p>
+          <a:p>
+            <a:endParaRPr lang="en-US" dirty="0"/>
+          </a:p>
+          <a:p>
+            <a:r>
+              <a:rPr lang="en-US" dirty="0"/>
+              <a:t>-This would be the first comprehensive and open-source system within Canada</a:t>
+            </a:r>
+          </a:p>
+          <a:p>
+            <a:r>
+              <a:rPr lang="en-US" dirty="0"/>
+              <a:t>  -i.e. Izzy: that was just service delivery, there was never really a structured, scalable protocol</a:t>
+            </a:r>
+          </a:p>
+          <a:p>
+            <a:r>
+              <a:rPr lang="en-US" dirty="0"/>
+              <a:t>-R&amp;D:</a:t>
+            </a:r>
+          </a:p>
+          <a:p>
+            <a:r>
+              <a:rPr lang="en-US" dirty="0"/>
+              <a:t>   There are a lot of opportunities just from improving our data management.  R&amp;D doesn’t have to involve a Biodex.  It’s just a way to potentially fund it via grants etc.</a:t>
+            </a:r>
+          </a:p>
+          <a:p>
+            <a:r>
+              <a:rPr lang="en-US" dirty="0"/>
+              <a:t>-my proposal involves basically no cost, but it has a guaranteed outcome.  The protocol will be delivered.  It will be useable for any of our staff.  From there we can probably market to NSOs, can </a:t>
+            </a:r>
+          </a:p>
+          <a:p>
+            <a:endParaRPr lang="en-US" dirty="0"/>
+          </a:p>
+          <a:p>
+            <a:r>
+              <a:rPr lang="en-US" dirty="0"/>
+              <a:t>-What is the cost to not doing this?  We keep having rehab cases to do, our practitioners work inefficiently to cover these on a case-by-case basis, we do not learn/grow/innovate, we do not have procedures in place to inform research and innovation, we have no way to properly value this service and the organization (and practitioners) do not get properly compensated.</a:t>
+            </a:r>
+          </a:p>
+          <a:p>
+            <a:endParaRPr lang="en-US" dirty="0"/>
+          </a:p>
+          <a:p>
+            <a:r>
+              <a:rPr lang="en-US" dirty="0"/>
+              <a:t>-we can sell you the protocol for $x or $x per month, that is IP that has value on it’s own, but the product really takes off when it leverages it’s connection to our athlete management system and especially when it is delivered by own of our expert practitioners</a:t>
+            </a:r>
+          </a:p>
+          <a:p>
+            <a:endParaRPr lang="en-US" dirty="0"/>
+          </a:p>
+          <a:p>
+            <a:r>
+              <a:rPr lang="en-US" dirty="0"/>
+              <a:t>Bronze/Silver Package</a:t>
+            </a:r>
+          </a:p>
+          <a:p>
+            <a:r>
+              <a:rPr lang="en-US" dirty="0"/>
+              <a:t>(enough to fully engage with the protocol, but you pretty much do all the work on your own)</a:t>
+            </a:r>
+          </a:p>
+          <a:p>
+            <a:r>
+              <a:rPr lang="en-US" dirty="0"/>
+              <a:t>-website, program</a:t>
+            </a:r>
+          </a:p>
+          <a:p>
+            <a:r>
+              <a:rPr lang="en-US" dirty="0"/>
+              <a:t>-1 testing session per month</a:t>
+            </a:r>
+          </a:p>
+          <a:p>
+            <a:r>
+              <a:rPr lang="en-US" dirty="0"/>
+              <a:t>-1 training session per month</a:t>
+            </a:r>
+          </a:p>
+          <a:p>
+            <a:endParaRPr lang="en-US" dirty="0"/>
+          </a:p>
+          <a:p>
+            <a:endParaRPr lang="en-US" dirty="0"/>
+          </a:p>
+          <a:p>
+            <a:r>
+              <a:rPr lang="en-US" dirty="0"/>
+              <a:t>CH:</a:t>
+            </a:r>
+          </a:p>
+          <a:p>
+            <a:r>
+              <a:rPr lang="en-US" dirty="0"/>
+              <a:t>-</a:t>
+            </a:r>
+            <a:r>
+              <a:rPr lang="en-CA" sz="1200" kern="1200" dirty="0">
+                <a:solidFill>
+                  <a:schemeClr val="tx1"/>
+                </a:solidFill>
+                <a:effectLst/>
+                <a:latin typeface="+mn-lt"/>
+                <a:ea typeface="+mn-ea"/>
+                <a:cs typeface="+mn-cs"/>
+              </a:rPr>
+              <a:t>Increased and stable NSO and PSO investment in performance services</a:t>
+            </a:r>
+          </a:p>
+          <a:p>
+            <a:r>
+              <a:rPr lang="en-CA" sz="1200" kern="1200" dirty="0">
+                <a:solidFill>
+                  <a:schemeClr val="tx1"/>
+                </a:solidFill>
+                <a:effectLst/>
+                <a:latin typeface="+mn-lt"/>
+                <a:ea typeface="+mn-ea"/>
+                <a:cs typeface="+mn-cs"/>
+              </a:rPr>
+              <a:t>-strengthening stakeholder engagement </a:t>
+            </a:r>
+            <a:r>
+              <a:rPr lang="en-CA" sz="1200" kern="1200" dirty="0" err="1">
+                <a:solidFill>
+                  <a:schemeClr val="tx1"/>
+                </a:solidFill>
+                <a:effectLst/>
+                <a:latin typeface="+mn-lt"/>
+                <a:ea typeface="+mn-ea"/>
+                <a:cs typeface="+mn-cs"/>
+              </a:rPr>
+              <a:t>byfostering</a:t>
+            </a:r>
+            <a:r>
+              <a:rPr lang="en-CA" sz="1200" kern="1200" dirty="0">
+                <a:solidFill>
+                  <a:schemeClr val="tx1"/>
+                </a:solidFill>
+                <a:effectLst/>
+                <a:latin typeface="+mn-lt"/>
+                <a:ea typeface="+mn-ea"/>
+                <a:cs typeface="+mn-cs"/>
+              </a:rPr>
+              <a:t> collaboration with NSO and PSO partners</a:t>
+            </a:r>
+          </a:p>
+          <a:p>
+            <a:pPr marL="0" marR="0" lvl="0" indent="0" algn="l" defTabSz="914400" rtl="0" eaLnBrk="1" fontAlgn="auto" latinLnBrk="0" hangingPunct="1">
+              <a:lnSpc>
+                <a:spcPct val="100000"/>
+              </a:lnSpc>
+              <a:spcBef>
+                <a:spcPts val="0"/>
+              </a:spcBef>
+              <a:spcAft>
+                <a:spcPts val="0"/>
+              </a:spcAft>
+              <a:buClrTx/>
+              <a:buSzTx/>
+              <a:buFontTx/>
+              <a:buNone/>
+              <a:tabLst/>
+              <a:defRPr/>
+            </a:pPr>
+            <a:r>
+              <a:rPr lang="en-US" dirty="0"/>
+              <a:t>-scaled </a:t>
+            </a:r>
+            <a:r>
+              <a:rPr lang="en-CA" sz="1200" kern="1200" dirty="0">
+                <a:solidFill>
+                  <a:schemeClr val="tx1"/>
+                </a:solidFill>
+                <a:effectLst/>
+                <a:latin typeface="+mn-lt"/>
+                <a:ea typeface="+mn-ea"/>
+                <a:cs typeface="+mn-cs"/>
+              </a:rPr>
+              <a:t>private pay RTP service for</a:t>
+            </a:r>
+            <a:r>
+              <a:rPr lang="en-US" sz="1200" kern="1200" dirty="0">
+                <a:solidFill>
+                  <a:schemeClr val="tx1"/>
+                </a:solidFill>
+                <a:effectLst/>
+                <a:latin typeface="+mn-lt"/>
+                <a:ea typeface="+mn-ea"/>
+                <a:cs typeface="+mn-cs"/>
+              </a:rPr>
+              <a:t> PN</a:t>
+            </a:r>
+          </a:p>
+          <a:p>
+            <a:r>
+              <a:rPr lang="en-US" sz="1200" kern="1200" dirty="0">
+                <a:solidFill>
+                  <a:schemeClr val="tx1"/>
+                </a:solidFill>
+                <a:effectLst/>
+                <a:latin typeface="+mn-lt"/>
+                <a:ea typeface="+mn-ea"/>
+                <a:cs typeface="+mn-cs"/>
+              </a:rPr>
+              <a:t>-</a:t>
+            </a:r>
+            <a:r>
+              <a:rPr lang="en-CA" sz="1200" kern="1200" dirty="0">
+                <a:solidFill>
+                  <a:schemeClr val="tx1"/>
+                </a:solidFill>
+                <a:effectLst/>
+                <a:latin typeface="+mn-lt"/>
+                <a:ea typeface="+mn-ea"/>
+                <a:cs typeface="+mn-cs"/>
+              </a:rPr>
+              <a:t>The population in Whistler is approaching 16,000 residents, with almost 30,000 in Squamish and 4,000 in Pemberton</a:t>
+            </a:r>
+          </a:p>
+          <a:p>
+            <a:pPr marL="0" marR="0" lvl="0" indent="0" algn="l" defTabSz="914400" rtl="0" eaLnBrk="1" fontAlgn="auto" latinLnBrk="0" hangingPunct="1">
+              <a:lnSpc>
+                <a:spcPct val="100000"/>
+              </a:lnSpc>
+              <a:spcBef>
+                <a:spcPts val="0"/>
+              </a:spcBef>
+              <a:spcAft>
+                <a:spcPts val="0"/>
+              </a:spcAft>
+              <a:buClrTx/>
+              <a:buSzTx/>
+              <a:buFontTx/>
+              <a:buNone/>
+              <a:tabLst/>
+              <a:defRPr/>
+            </a:pPr>
+            <a:endParaRPr lang="en-CA" sz="1200" kern="1200" dirty="0">
+              <a:solidFill>
+                <a:schemeClr val="tx1"/>
+              </a:solidFill>
+              <a:effectLst/>
+              <a:latin typeface="+mn-lt"/>
+              <a:ea typeface="+mn-ea"/>
+              <a:cs typeface="+mn-cs"/>
+            </a:endParaRPr>
+          </a:p>
+          <a:p>
+            <a:pPr marL="0" marR="0" lvl="0" indent="0" algn="l" defTabSz="914400" rtl="0" eaLnBrk="1" fontAlgn="auto" latinLnBrk="0" hangingPunct="1">
+              <a:lnSpc>
+                <a:spcPct val="100000"/>
+              </a:lnSpc>
+              <a:spcBef>
+                <a:spcPts val="0"/>
+              </a:spcBef>
+              <a:spcAft>
+                <a:spcPts val="0"/>
+              </a:spcAft>
+              <a:buClrTx/>
+              <a:buSzTx/>
+              <a:buFontTx/>
+              <a:buNone/>
+              <a:tabLst/>
+              <a:defRPr/>
+            </a:pPr>
+            <a:r>
+              <a:rPr lang="en-CA" sz="1200" kern="1200" dirty="0">
+                <a:solidFill>
+                  <a:schemeClr val="tx1"/>
+                </a:solidFill>
+                <a:effectLst/>
+                <a:latin typeface="+mn-lt"/>
+                <a:ea typeface="+mn-ea"/>
+                <a:cs typeface="+mn-cs"/>
+              </a:rPr>
+              <a:t>-I think we build the protocol without a Biodex and then we can decide if and how we go about getting one later</a:t>
+            </a:r>
+          </a:p>
+          <a:p>
+            <a:pPr marL="0" marR="0" lvl="0" indent="0" algn="l" defTabSz="914400" rtl="0" eaLnBrk="1" fontAlgn="auto" latinLnBrk="0" hangingPunct="1">
+              <a:lnSpc>
+                <a:spcPct val="100000"/>
+              </a:lnSpc>
+              <a:spcBef>
+                <a:spcPts val="0"/>
+              </a:spcBef>
+              <a:spcAft>
+                <a:spcPts val="0"/>
+              </a:spcAft>
+              <a:buClrTx/>
+              <a:buSzTx/>
+              <a:buFontTx/>
+              <a:buNone/>
+              <a:tabLst/>
+              <a:defRPr/>
+            </a:pPr>
+            <a:r>
+              <a:rPr lang="en-CA" sz="1200" kern="1200" dirty="0">
+                <a:solidFill>
+                  <a:schemeClr val="tx1"/>
+                </a:solidFill>
+                <a:effectLst/>
+                <a:latin typeface="+mn-lt"/>
+                <a:ea typeface="+mn-ea"/>
+                <a:cs typeface="+mn-cs"/>
+              </a:rPr>
+              <a:t>	-grants, R&amp;D partnerships</a:t>
+            </a:r>
+          </a:p>
+        </p:txBody>
+      </p:sp>
+      <p:sp>
+        <p:nvSpPr>
+          <p:cNvPr id="4" name="Slide Number Placeholder 3"/>
+          <p:cNvSpPr>
+            <a:spLocks noGrp="1"/>
+          </p:cNvSpPr>
+          <p:nvPr>
+            <p:ph type="sldNum" sz="quarter" idx="5"/>
+          </p:nvPr>
+        </p:nvSpPr>
+        <p:spPr/>
+        <p:txBody>
+          <a:bodyPr/>
+          <a:lstStyle/>
+          <a:p>
+            <a:fld id="{EAF9EB4E-D50A-4CF1-9B06-457599E410FB}" type="slidenum">
+              <a:rPr lang="en-CA" smtClean="0"/>
+              <a:t>11</a:t>
+            </a:fld>
+            <a:endParaRPr lang="en-CA"/>
+          </a:p>
+        </p:txBody>
+      </p:sp>
+    </p:spTree>
+    <p:extLst>
+      <p:ext uri="{BB962C8B-B14F-4D97-AF65-F5344CB8AC3E}">
+        <p14:creationId xmlns:p14="http://schemas.microsoft.com/office/powerpoint/2010/main" val="1163778239"/>
+      </p:ext>
+    </p:extLst>
+  </p:cSld>
+  <p:clrMapOvr>
+    <a:masterClrMapping/>
+  </p:clrMapOvr>
+</p:notes>
+</file>
+
+<file path=ppt/notesSlides/notesSlide11.xml><?xml version="1.0" encoding="utf-8"?>
+<p:notes xmlns:a="http://schemas.openxmlformats.org/drawingml/2006/main" xmlns:r="http://schemas.openxmlformats.org/officeDocument/2006/relationships" xmlns:p="http://schemas.openxmlformats.org/presentationml/2006/main">
+  <p:cSld>
+    <p:spTree>
+      <p:nvGrpSpPr>
         <p:cNvPr id="1" name="">
           <a:extLst>
             <a:ext uri="{FF2B5EF4-FFF2-40B4-BE49-F238E27FC236}">
@@ -22217,7 +23025,7 @@
           <a:p>
             <a:fld id="{EAF9EB4E-D50A-4CF1-9B06-457599E410FB}" type="slidenum">
               <a:rPr lang="en-CA" smtClean="0"/>
-              <a:t>10</a:t>
+              <a:t>12</a:t>
             </a:fld>
             <a:endParaRPr lang="en-CA"/>
           </a:p>
@@ -22227,950 +23035,6 @@
     <p:extLst>
       <p:ext uri="{BB962C8B-B14F-4D97-AF65-F5344CB8AC3E}">
         <p14:creationId xmlns:p14="http://schemas.microsoft.com/office/powerpoint/2010/main" val="3011887655"/>
-      </p:ext>
-    </p:extLst>
-  </p:cSld>
-  <p:clrMapOvr>
-    <a:masterClrMapping/>
-  </p:clrMapOvr>
-</p:notes>
-</file>
-
-<file path=ppt/notesSlides/notesSlide11.xml><?xml version="1.0" encoding="utf-8"?>
-<p:notes xmlns:a="http://schemas.openxmlformats.org/drawingml/2006/main" xmlns:r="http://schemas.openxmlformats.org/officeDocument/2006/relationships" xmlns:p="http://schemas.openxmlformats.org/presentationml/2006/main">
-  <p:cSld>
-    <p:spTree>
-      <p:nvGrpSpPr>
-        <p:cNvPr id="1" name=""/>
-        <p:cNvGrpSpPr/>
-        <p:nvPr/>
-      </p:nvGrpSpPr>
-      <p:grpSpPr>
-        <a:xfrm>
-          <a:off x="0" y="0"/>
-          <a:ext cx="0" cy="0"/>
-          <a:chOff x="0" y="0"/>
-          <a:chExt cx="0" cy="0"/>
-        </a:xfrm>
-      </p:grpSpPr>
-      <p:sp>
-        <p:nvSpPr>
-          <p:cNvPr id="2" name="Slide Image Placeholder 1"/>
-          <p:cNvSpPr>
-            <a:spLocks noGrp="1" noRot="1" noChangeAspect="1"/>
-          </p:cNvSpPr>
-          <p:nvPr>
-            <p:ph type="sldImg"/>
-          </p:nvPr>
-        </p:nvSpPr>
-        <p:spPr/>
-      </p:sp>
-      <p:sp>
-        <p:nvSpPr>
-          <p:cNvPr id="3" name="Notes Placeholder 2"/>
-          <p:cNvSpPr>
-            <a:spLocks noGrp="1"/>
-          </p:cNvSpPr>
-          <p:nvPr>
-            <p:ph type="body" idx="1"/>
-          </p:nvPr>
-        </p:nvSpPr>
-        <p:spPr/>
-        <p:txBody>
-          <a:bodyPr/>
-          <a:lstStyle/>
-          <a:p>
-            <a:r>
-              <a:rPr lang="en-US" dirty="0"/>
-              <a:t>Milestones, lastly the objective at the moment would be to have a working version of the protocol ready to go in April.</a:t>
-            </a:r>
-          </a:p>
-          <a:p>
-            <a:endParaRPr lang="en-US" dirty="0"/>
-          </a:p>
-          <a:p>
-            <a:r>
-              <a:rPr lang="en-US" dirty="0"/>
-              <a:t>From now </a:t>
-            </a:r>
-            <a:r>
-              <a:rPr lang="en-US" dirty="0" err="1"/>
-              <a:t>ntil</a:t>
-            </a:r>
-            <a:r>
-              <a:rPr lang="en-US" dirty="0"/>
-              <a:t> then , I would be the building this thing out, continuously working on it, while also  getting it </a:t>
-            </a:r>
-            <a:r>
-              <a:rPr lang="en-US"/>
-              <a:t>to different points </a:t>
-            </a:r>
-            <a:r>
-              <a:rPr lang="en-US" dirty="0"/>
-              <a:t>where collaboration with different skilled professionals can be most effective.</a:t>
-            </a:r>
-          </a:p>
-          <a:p>
-            <a:endParaRPr lang="en-US" dirty="0"/>
-          </a:p>
-          <a:p>
-            <a:r>
-              <a:rPr lang="en-US" dirty="0"/>
-              <a:t>And then once version 1 is built, then future work involves </a:t>
-            </a:r>
-          </a:p>
-          <a:p>
-            <a:endParaRPr lang="en-US" dirty="0"/>
-          </a:p>
-          <a:p>
-            <a:endParaRPr lang="en-US" dirty="0"/>
-          </a:p>
-          <a:p>
-            <a:r>
-              <a:rPr lang="en-US" dirty="0"/>
-              <a:t>So that’s the pitch, if anyone wants to pause now, I can answer any questions you have, otherwise I can show you some of what I’ve been working on so you can see my actual idea and vison for this project</a:t>
-            </a:r>
-          </a:p>
-          <a:p>
-            <a:endParaRPr lang="en-US" dirty="0"/>
-          </a:p>
-          <a:p>
-            <a:endParaRPr lang="en-US" dirty="0"/>
-          </a:p>
-          <a:p>
-            <a:endParaRPr lang="en-US" dirty="0"/>
-          </a:p>
-          <a:p>
-            <a:endParaRPr lang="en-US" dirty="0"/>
-          </a:p>
-          <a:p>
-            <a:endParaRPr lang="en-US" dirty="0"/>
-          </a:p>
-          <a:p>
-            <a:endParaRPr lang="en-US" dirty="0"/>
-          </a:p>
-          <a:p>
-            <a:endParaRPr lang="en-US" dirty="0"/>
-          </a:p>
-          <a:p>
-            <a:endParaRPr lang="en-US" dirty="0"/>
-          </a:p>
-          <a:p>
-            <a:r>
-              <a:rPr lang="en-US" dirty="0"/>
-              <a:t>In January the goal would be to have it at a point where collaboration can be most effective. So starting to get input and have discussions on the actual content of the protocol, and also the behind-the-scenes technical work to make sure that this is a professional, functional product that we can put out there with confidence.</a:t>
-            </a:r>
-          </a:p>
-          <a:p>
-            <a:endParaRPr lang="en-US" dirty="0"/>
-          </a:p>
-          <a:p>
-            <a:endParaRPr lang="en-US" dirty="0"/>
-          </a:p>
-          <a:p>
-            <a:endParaRPr lang="en-US" dirty="0"/>
-          </a:p>
-          <a:p>
-            <a:r>
-              <a:rPr lang="en-US" dirty="0"/>
-              <a:t>Deliver a working product in April</a:t>
-            </a:r>
-          </a:p>
-          <a:p>
-            <a:endParaRPr lang="en-US" dirty="0"/>
-          </a:p>
-          <a:p>
-            <a:endParaRPr lang="en-US" dirty="0"/>
-          </a:p>
-          <a:p>
-            <a:endParaRPr lang="en-US" dirty="0"/>
-          </a:p>
-          <a:p>
-            <a:r>
-              <a:rPr lang="en-US" b="1" dirty="0"/>
-              <a:t>AK</a:t>
-            </a:r>
-          </a:p>
-          <a:p>
-            <a:r>
-              <a:rPr lang="en-US" dirty="0"/>
-              <a:t>-my proposal is far more internal.. I don’t think it’s productive to include all the stakeholders at this stage</a:t>
-            </a:r>
-          </a:p>
-          <a:p>
-            <a:r>
-              <a:rPr lang="en-US" dirty="0"/>
-              <a:t>-build a prototype</a:t>
-            </a:r>
-          </a:p>
-          <a:p>
-            <a:r>
-              <a:rPr lang="en-US" dirty="0"/>
-              <a:t>-ensure it aligns with CSI policies and procedures and is feasible within those</a:t>
-            </a:r>
-          </a:p>
-          <a:p>
-            <a:endParaRPr lang="en-US" dirty="0"/>
-          </a:p>
-          <a:p>
-            <a:r>
-              <a:rPr lang="en-US" b="1" dirty="0"/>
-              <a:t>CH</a:t>
-            </a:r>
-          </a:p>
-          <a:p>
-            <a:r>
-              <a:rPr lang="en-US" u="sng" dirty="0"/>
-              <a:t>Discovery and Planning (0-3 months)</a:t>
-            </a:r>
-          </a:p>
-          <a:p>
-            <a:r>
-              <a:rPr lang="en-US" dirty="0"/>
-              <a:t>-</a:t>
-            </a:r>
-            <a:r>
-              <a:rPr lang="en-CA" sz="1200" kern="1200" dirty="0">
-                <a:solidFill>
-                  <a:schemeClr val="tx1"/>
-                </a:solidFill>
-                <a:effectLst/>
-                <a:latin typeface="+mn-lt"/>
-                <a:ea typeface="+mn-ea"/>
-                <a:cs typeface="+mn-cs"/>
-              </a:rPr>
-              <a:t>comprehensive stakeholder consultation and needs analysis</a:t>
-            </a:r>
-          </a:p>
-          <a:p>
-            <a:r>
-              <a:rPr lang="en-CA" sz="1200" i="1" kern="1200" dirty="0">
-                <a:solidFill>
-                  <a:schemeClr val="tx1"/>
-                </a:solidFill>
-                <a:effectLst/>
-                <a:latin typeface="+mn-lt"/>
-                <a:ea typeface="+mn-ea"/>
-                <a:cs typeface="+mn-cs"/>
-              </a:rPr>
-              <a:t>	-We discover that athletes sometimes get hurt and there is a lack of effective, structured protocols 	to support the rehab process and include all stakeholders</a:t>
-            </a:r>
-          </a:p>
-          <a:p>
-            <a:pPr marL="0" marR="0" lvl="0" indent="0" algn="l" defTabSz="914400" rtl="0" eaLnBrk="1" fontAlgn="auto" latinLnBrk="0" hangingPunct="1">
-              <a:lnSpc>
-                <a:spcPct val="100000"/>
-              </a:lnSpc>
-              <a:spcBef>
-                <a:spcPts val="0"/>
-              </a:spcBef>
-              <a:spcAft>
-                <a:spcPts val="0"/>
-              </a:spcAft>
-              <a:buClrTx/>
-              <a:buSzTx/>
-              <a:buFontTx/>
-              <a:buNone/>
-              <a:tabLst/>
-              <a:defRPr/>
-            </a:pPr>
-            <a:r>
-              <a:rPr lang="en-CA" sz="1200" b="0" u="sng" kern="1200" dirty="0">
-                <a:solidFill>
-                  <a:schemeClr val="tx1"/>
-                </a:solidFill>
-                <a:effectLst/>
-                <a:latin typeface="+mn-lt"/>
-                <a:ea typeface="+mn-ea"/>
-                <a:cs typeface="+mn-cs"/>
-              </a:rPr>
-              <a:t>Phase 2: Design and Development </a:t>
-            </a:r>
-            <a:r>
-              <a:rPr lang="en-CA" sz="1200" u="sng" kern="1200" dirty="0">
-                <a:solidFill>
-                  <a:schemeClr val="tx1"/>
-                </a:solidFill>
-                <a:effectLst/>
-                <a:latin typeface="+mn-lt"/>
-                <a:ea typeface="+mn-ea"/>
-                <a:cs typeface="+mn-cs"/>
-              </a:rPr>
-              <a:t>(months 3–6)</a:t>
-            </a:r>
-            <a:endParaRPr lang="en-CA" sz="1200" i="1" u="sng" kern="1200" dirty="0">
-              <a:solidFill>
-                <a:schemeClr val="tx1"/>
-              </a:solidFill>
-              <a:effectLst/>
-              <a:latin typeface="+mn-lt"/>
-              <a:ea typeface="+mn-ea"/>
-              <a:cs typeface="+mn-cs"/>
-            </a:endParaRPr>
-          </a:p>
-          <a:p>
-            <a:pPr marL="0" marR="0" lvl="0" indent="0" algn="l" defTabSz="914400" rtl="0" eaLnBrk="1" fontAlgn="auto" latinLnBrk="0" hangingPunct="1">
-              <a:lnSpc>
-                <a:spcPct val="100000"/>
-              </a:lnSpc>
-              <a:spcBef>
-                <a:spcPts val="0"/>
-              </a:spcBef>
-              <a:spcAft>
-                <a:spcPts val="0"/>
-              </a:spcAft>
-              <a:buClrTx/>
-              <a:buSzTx/>
-              <a:buFontTx/>
-              <a:buNone/>
-              <a:tabLst/>
-              <a:defRPr/>
-            </a:pPr>
-            <a:r>
-              <a:rPr lang="en-CA" sz="1200" i="1" kern="1200" dirty="0">
-                <a:solidFill>
-                  <a:schemeClr val="tx1"/>
-                </a:solidFill>
-                <a:effectLst/>
-                <a:latin typeface="+mn-lt"/>
-                <a:ea typeface="+mn-ea"/>
-                <a:cs typeface="+mn-cs"/>
-              </a:rPr>
-              <a:t>-</a:t>
-            </a:r>
-            <a:r>
-              <a:rPr lang="en-CA" sz="1200" kern="1200" dirty="0">
-                <a:solidFill>
-                  <a:schemeClr val="tx1"/>
-                </a:solidFill>
-                <a:effectLst/>
-                <a:latin typeface="+mn-lt"/>
-                <a:ea typeface="+mn-ea"/>
-                <a:cs typeface="+mn-cs"/>
-              </a:rPr>
-              <a:t>facility enhancements will be planned</a:t>
-            </a:r>
-          </a:p>
-          <a:p>
-            <a:pPr marL="0" marR="0" lvl="0" indent="0" algn="l" defTabSz="914400" rtl="0" eaLnBrk="1" fontAlgn="auto" latinLnBrk="0" hangingPunct="1">
-              <a:lnSpc>
-                <a:spcPct val="100000"/>
-              </a:lnSpc>
-              <a:spcBef>
-                <a:spcPts val="0"/>
-              </a:spcBef>
-              <a:spcAft>
-                <a:spcPts val="0"/>
-              </a:spcAft>
-              <a:buClrTx/>
-              <a:buSzTx/>
-              <a:buFontTx/>
-              <a:buNone/>
-              <a:tabLst/>
-              <a:defRPr/>
-            </a:pPr>
-            <a:r>
-              <a:rPr lang="en-CA" sz="1200" kern="1200" dirty="0">
-                <a:solidFill>
-                  <a:schemeClr val="tx1"/>
-                </a:solidFill>
-                <a:effectLst/>
-                <a:latin typeface="+mn-lt"/>
-                <a:ea typeface="+mn-ea"/>
-                <a:cs typeface="+mn-cs"/>
-              </a:rPr>
-              <a:t>-Biodex isokinetic dynamometer equipment will be procured</a:t>
-            </a:r>
-          </a:p>
-          <a:p>
-            <a:pPr marL="0" marR="0" lvl="0" indent="0" algn="l" defTabSz="914400" rtl="0" eaLnBrk="1" fontAlgn="auto" latinLnBrk="0" hangingPunct="1">
-              <a:lnSpc>
-                <a:spcPct val="100000"/>
-              </a:lnSpc>
-              <a:spcBef>
-                <a:spcPts val="0"/>
-              </a:spcBef>
-              <a:spcAft>
-                <a:spcPts val="0"/>
-              </a:spcAft>
-              <a:buClrTx/>
-              <a:buSzTx/>
-              <a:buFontTx/>
-              <a:buNone/>
-              <a:tabLst/>
-              <a:defRPr/>
-            </a:pPr>
-            <a:r>
-              <a:rPr lang="en-CA" sz="1200" kern="1200" dirty="0">
-                <a:solidFill>
-                  <a:schemeClr val="tx1"/>
-                </a:solidFill>
-                <a:effectLst/>
-                <a:latin typeface="+mn-lt"/>
-                <a:ea typeface="+mn-ea"/>
-                <a:cs typeface="+mn-cs"/>
-              </a:rPr>
-              <a:t>-Operational guidelines and best practice protocols will be developed</a:t>
-            </a:r>
-          </a:p>
-          <a:p>
-            <a:pPr marL="0" marR="0" lvl="0" indent="0" algn="l" defTabSz="914400" rtl="0" eaLnBrk="1" fontAlgn="auto" latinLnBrk="0" hangingPunct="1">
-              <a:lnSpc>
-                <a:spcPct val="100000"/>
-              </a:lnSpc>
-              <a:spcBef>
-                <a:spcPts val="0"/>
-              </a:spcBef>
-              <a:spcAft>
-                <a:spcPts val="0"/>
-              </a:spcAft>
-              <a:buClrTx/>
-              <a:buSzTx/>
-              <a:buFontTx/>
-              <a:buNone/>
-              <a:tabLst/>
-              <a:defRPr/>
-            </a:pPr>
-            <a:r>
-              <a:rPr lang="en-CA" sz="1200" kern="1200" dirty="0">
-                <a:solidFill>
-                  <a:schemeClr val="tx1"/>
-                </a:solidFill>
-                <a:effectLst/>
-                <a:latin typeface="+mn-lt"/>
-                <a:ea typeface="+mn-ea"/>
-                <a:cs typeface="+mn-cs"/>
-              </a:rPr>
-              <a:t>-staff training</a:t>
-            </a:r>
-          </a:p>
-          <a:p>
-            <a:r>
-              <a:rPr lang="en-CA" sz="1200" kern="1200" dirty="0">
-                <a:solidFill>
-                  <a:schemeClr val="tx1"/>
-                </a:solidFill>
-                <a:effectLst/>
-                <a:latin typeface="+mn-lt"/>
-                <a:ea typeface="+mn-ea"/>
-                <a:cs typeface="+mn-cs"/>
-              </a:rPr>
-              <a:t>-Establishing research partnerships with academic and clinical institutions</a:t>
-            </a:r>
-          </a:p>
-          <a:p>
-            <a:r>
-              <a:rPr lang="en-CA" sz="1200" kern="1200" dirty="0">
-                <a:solidFill>
-                  <a:schemeClr val="tx1"/>
-                </a:solidFill>
-                <a:effectLst/>
-                <a:latin typeface="+mn-lt"/>
-                <a:ea typeface="+mn-ea"/>
-                <a:cs typeface="+mn-cs"/>
-              </a:rPr>
-              <a:t>	</a:t>
-            </a:r>
-            <a:r>
-              <a:rPr lang="en-CA" sz="1200" i="1" kern="1200" dirty="0">
-                <a:solidFill>
-                  <a:schemeClr val="tx1"/>
-                </a:solidFill>
-                <a:effectLst/>
-                <a:latin typeface="+mn-lt"/>
-                <a:ea typeface="+mn-ea"/>
-                <a:cs typeface="+mn-cs"/>
-              </a:rPr>
-              <a:t>-Build the protocol document</a:t>
-            </a:r>
-          </a:p>
-          <a:p>
-            <a:r>
-              <a:rPr lang="en-CA" sz="1200" i="1" kern="1200" dirty="0">
-                <a:solidFill>
-                  <a:schemeClr val="tx1"/>
-                </a:solidFill>
-                <a:effectLst/>
-                <a:latin typeface="+mn-lt"/>
-                <a:ea typeface="+mn-ea"/>
-                <a:cs typeface="+mn-cs"/>
-              </a:rPr>
-              <a:t>	-Set up </a:t>
-            </a:r>
-            <a:r>
-              <a:rPr lang="en-CA" sz="1200" i="1" kern="1200" dirty="0" err="1">
-                <a:solidFill>
-                  <a:schemeClr val="tx1"/>
-                </a:solidFill>
-                <a:effectLst/>
-                <a:latin typeface="+mn-lt"/>
-                <a:ea typeface="+mn-ea"/>
-                <a:cs typeface="+mn-cs"/>
-              </a:rPr>
-              <a:t>Tindeq</a:t>
-            </a:r>
-            <a:endParaRPr lang="en-CA" sz="1200" i="1" kern="1200" dirty="0">
-              <a:solidFill>
-                <a:schemeClr val="tx1"/>
-              </a:solidFill>
-              <a:effectLst/>
-              <a:latin typeface="+mn-lt"/>
-              <a:ea typeface="+mn-ea"/>
-              <a:cs typeface="+mn-cs"/>
-            </a:endParaRPr>
-          </a:p>
-          <a:p>
-            <a:pPr marL="0" marR="0" lvl="0" indent="0" algn="l" defTabSz="914400" rtl="0" eaLnBrk="1" fontAlgn="auto" latinLnBrk="0" hangingPunct="1">
-              <a:lnSpc>
-                <a:spcPct val="100000"/>
-              </a:lnSpc>
-              <a:spcBef>
-                <a:spcPts val="0"/>
-              </a:spcBef>
-              <a:spcAft>
-                <a:spcPts val="0"/>
-              </a:spcAft>
-              <a:buClrTx/>
-              <a:buSzTx/>
-              <a:buFontTx/>
-              <a:buNone/>
-              <a:tabLst/>
-              <a:defRPr/>
-            </a:pPr>
-            <a:r>
-              <a:rPr lang="en-CA" sz="1200" b="0" u="sng" kern="1200" dirty="0">
-                <a:solidFill>
-                  <a:schemeClr val="tx1"/>
-                </a:solidFill>
-                <a:effectLst/>
-                <a:latin typeface="+mn-lt"/>
-                <a:ea typeface="+mn-ea"/>
-                <a:cs typeface="+mn-cs"/>
-              </a:rPr>
-              <a:t>Phase 3: Pilot Implementation and Testing (months 6–12)</a:t>
-            </a:r>
-          </a:p>
-          <a:p>
-            <a:r>
-              <a:rPr lang="en-CA" sz="1200" kern="1200" dirty="0">
-                <a:solidFill>
-                  <a:schemeClr val="tx1"/>
-                </a:solidFill>
-                <a:effectLst/>
-                <a:latin typeface="+mn-lt"/>
-                <a:ea typeface="+mn-ea"/>
-                <a:cs typeface="+mn-cs"/>
-              </a:rPr>
-              <a:t>-initial rollout of RTP services through a pilot program in collaboration with select winter sport NSOs</a:t>
-            </a:r>
-          </a:p>
-          <a:p>
-            <a:r>
-              <a:rPr lang="en-CA" sz="1200" kern="1200" dirty="0">
-                <a:solidFill>
-                  <a:schemeClr val="tx1"/>
-                </a:solidFill>
-                <a:effectLst/>
-                <a:latin typeface="+mn-lt"/>
-                <a:ea typeface="+mn-ea"/>
-                <a:cs typeface="+mn-cs"/>
-              </a:rPr>
-              <a:t>-development of RTP service packages accessible to the broader public via Performance Nation</a:t>
-            </a:r>
-          </a:p>
-          <a:p>
-            <a:endParaRPr lang="en-CA" sz="1200" kern="1200" dirty="0">
-              <a:solidFill>
-                <a:schemeClr val="tx1"/>
-              </a:solidFill>
-              <a:effectLst/>
-              <a:latin typeface="+mn-lt"/>
-              <a:ea typeface="+mn-ea"/>
-              <a:cs typeface="+mn-cs"/>
-            </a:endParaRPr>
-          </a:p>
-          <a:p>
-            <a:pPr marL="0" marR="0" lvl="0" indent="0" algn="l" defTabSz="914400" rtl="0" eaLnBrk="1" fontAlgn="auto" latinLnBrk="0" hangingPunct="1">
-              <a:lnSpc>
-                <a:spcPct val="100000"/>
-              </a:lnSpc>
-              <a:spcBef>
-                <a:spcPts val="0"/>
-              </a:spcBef>
-              <a:spcAft>
-                <a:spcPts val="0"/>
-              </a:spcAft>
-              <a:buClrTx/>
-              <a:buSzTx/>
-              <a:buFontTx/>
-              <a:buNone/>
-              <a:tabLst/>
-              <a:defRPr/>
-            </a:pPr>
-            <a:r>
-              <a:rPr lang="en-CA" sz="1200" b="0" u="sng" kern="1200" dirty="0">
-                <a:solidFill>
-                  <a:schemeClr val="tx1"/>
-                </a:solidFill>
-                <a:effectLst/>
-                <a:latin typeface="+mn-lt"/>
-                <a:ea typeface="+mn-ea"/>
-                <a:cs typeface="+mn-cs"/>
-              </a:rPr>
-              <a:t>Phase 4: Full-Scale Implementation and Launch (months 12–18)</a:t>
-            </a:r>
-          </a:p>
-          <a:p>
-            <a:r>
-              <a:rPr lang="en-CA" sz="1200" kern="1200" dirty="0">
-                <a:solidFill>
-                  <a:schemeClr val="tx1"/>
-                </a:solidFill>
-                <a:effectLst/>
-                <a:latin typeface="+mn-lt"/>
-                <a:ea typeface="+mn-ea"/>
-                <a:cs typeface="+mn-cs"/>
-              </a:rPr>
-              <a:t>-fully operational and accessible to all NSO and PSO partners as well as the public via Performance Nation</a:t>
-            </a:r>
-          </a:p>
-          <a:p>
-            <a:pPr marL="0" marR="0" lvl="0" indent="0" algn="l" defTabSz="914400" rtl="0" eaLnBrk="1" fontAlgn="auto" latinLnBrk="0" hangingPunct="1">
-              <a:lnSpc>
-                <a:spcPct val="100000"/>
-              </a:lnSpc>
-              <a:spcBef>
-                <a:spcPts val="0"/>
-              </a:spcBef>
-              <a:spcAft>
-                <a:spcPts val="0"/>
-              </a:spcAft>
-              <a:buClrTx/>
-              <a:buSzTx/>
-              <a:buFontTx/>
-              <a:buNone/>
-              <a:tabLst/>
-              <a:defRPr/>
-            </a:pPr>
-            <a:r>
-              <a:rPr lang="en-CA" sz="1200" kern="1200" dirty="0">
-                <a:solidFill>
-                  <a:schemeClr val="tx1"/>
-                </a:solidFill>
-                <a:effectLst/>
-                <a:latin typeface="+mn-lt"/>
-                <a:ea typeface="+mn-ea"/>
-                <a:cs typeface="+mn-cs"/>
-              </a:rPr>
-              <a:t>-comprehensive marketing and communication strategy</a:t>
-            </a:r>
-          </a:p>
-          <a:p>
-            <a:endParaRPr lang="en-CA" sz="1200" kern="1200" dirty="0">
-              <a:solidFill>
-                <a:schemeClr val="tx1"/>
-              </a:solidFill>
-              <a:effectLst/>
-              <a:latin typeface="+mn-lt"/>
-              <a:ea typeface="+mn-ea"/>
-              <a:cs typeface="+mn-cs"/>
-            </a:endParaRPr>
-          </a:p>
-          <a:p>
-            <a:pPr marL="0" marR="0" lvl="0" indent="0" algn="l" defTabSz="914400" rtl="0" eaLnBrk="1" fontAlgn="auto" latinLnBrk="0" hangingPunct="1">
-              <a:lnSpc>
-                <a:spcPct val="100000"/>
-              </a:lnSpc>
-              <a:spcBef>
-                <a:spcPts val="0"/>
-              </a:spcBef>
-              <a:spcAft>
-                <a:spcPts val="0"/>
-              </a:spcAft>
-              <a:buClrTx/>
-              <a:buSzTx/>
-              <a:buFontTx/>
-              <a:buNone/>
-              <a:tabLst/>
-              <a:defRPr/>
-            </a:pPr>
-            <a:r>
-              <a:rPr lang="en-CA" sz="1200" b="0" u="sng" kern="1200" dirty="0">
-                <a:solidFill>
-                  <a:schemeClr val="tx1"/>
-                </a:solidFill>
-                <a:effectLst/>
-                <a:latin typeface="+mn-lt"/>
-                <a:ea typeface="+mn-ea"/>
-                <a:cs typeface="+mn-cs"/>
-              </a:rPr>
-              <a:t>Phase 5: Evaluation and Continuous Improvement (ongoing)</a:t>
-            </a:r>
-          </a:p>
-          <a:p>
-            <a:r>
-              <a:rPr lang="en-CA" sz="1200" kern="1200" dirty="0">
-                <a:solidFill>
-                  <a:schemeClr val="tx1"/>
-                </a:solidFill>
-                <a:effectLst/>
-                <a:latin typeface="+mn-lt"/>
-                <a:ea typeface="+mn-ea"/>
-                <a:cs typeface="+mn-cs"/>
-              </a:rPr>
-              <a:t>-monitoring program outcomes against the established KPIs</a:t>
-            </a:r>
-          </a:p>
-          <a:p>
-            <a:r>
-              <a:rPr lang="en-CA" sz="1200" kern="1200" dirty="0">
-                <a:solidFill>
-                  <a:schemeClr val="tx1"/>
-                </a:solidFill>
-                <a:effectLst/>
-                <a:latin typeface="+mn-lt"/>
-                <a:ea typeface="+mn-ea"/>
-                <a:cs typeface="+mn-cs"/>
-              </a:rPr>
-              <a:t>-regular audits and impact assessments to evaluate effectiveness, refine protocols, and integrate emerging</a:t>
-            </a:r>
-          </a:p>
-          <a:p>
-            <a:r>
-              <a:rPr lang="en-CA" sz="1200" kern="1200" dirty="0">
-                <a:solidFill>
-                  <a:schemeClr val="tx1"/>
-                </a:solidFill>
-                <a:effectLst/>
-                <a:latin typeface="+mn-lt"/>
-                <a:ea typeface="+mn-ea"/>
-                <a:cs typeface="+mn-cs"/>
-              </a:rPr>
-              <a:t>technologies</a:t>
-            </a:r>
-          </a:p>
-          <a:p>
-            <a:pPr marL="0" marR="0" lvl="0" indent="0" algn="l" defTabSz="914400" rtl="0" eaLnBrk="1" fontAlgn="auto" latinLnBrk="0" hangingPunct="1">
-              <a:lnSpc>
-                <a:spcPct val="100000"/>
-              </a:lnSpc>
-              <a:spcBef>
-                <a:spcPts val="0"/>
-              </a:spcBef>
-              <a:spcAft>
-                <a:spcPts val="0"/>
-              </a:spcAft>
-              <a:buClrTx/>
-              <a:buSzTx/>
-              <a:buFontTx/>
-              <a:buNone/>
-              <a:tabLst/>
-              <a:defRPr/>
-            </a:pPr>
-            <a:endParaRPr lang="en-CA" sz="1200" kern="1200" dirty="0">
-              <a:solidFill>
-                <a:schemeClr val="tx1"/>
-              </a:solidFill>
-              <a:effectLst/>
-              <a:latin typeface="+mn-lt"/>
-              <a:ea typeface="+mn-ea"/>
-              <a:cs typeface="+mn-cs"/>
-            </a:endParaRPr>
-          </a:p>
-          <a:p>
-            <a:pPr marL="0" marR="0" lvl="0" indent="0" algn="l" defTabSz="914400" rtl="0" eaLnBrk="1" fontAlgn="auto" latinLnBrk="0" hangingPunct="1">
-              <a:lnSpc>
-                <a:spcPct val="100000"/>
-              </a:lnSpc>
-              <a:spcBef>
-                <a:spcPts val="0"/>
-              </a:spcBef>
-              <a:spcAft>
-                <a:spcPts val="0"/>
-              </a:spcAft>
-              <a:buClrTx/>
-              <a:buSzTx/>
-              <a:buFontTx/>
-              <a:buNone/>
-              <a:tabLst/>
-              <a:defRPr/>
-            </a:pPr>
-            <a:endParaRPr lang="en-CA" sz="1200" kern="1200" dirty="0">
-              <a:solidFill>
-                <a:schemeClr val="tx1"/>
-              </a:solidFill>
-              <a:effectLst/>
-              <a:latin typeface="+mn-lt"/>
-              <a:ea typeface="+mn-ea"/>
-              <a:cs typeface="+mn-cs"/>
-            </a:endParaRPr>
-          </a:p>
-          <a:p>
-            <a:pPr marL="0" marR="0" lvl="0" indent="0" algn="l" defTabSz="914400" rtl="0" eaLnBrk="1" fontAlgn="auto" latinLnBrk="0" hangingPunct="1">
-              <a:lnSpc>
-                <a:spcPct val="100000"/>
-              </a:lnSpc>
-              <a:spcBef>
-                <a:spcPts val="0"/>
-              </a:spcBef>
-              <a:spcAft>
-                <a:spcPts val="0"/>
-              </a:spcAft>
-              <a:buClrTx/>
-              <a:buSzTx/>
-              <a:buFontTx/>
-              <a:buNone/>
-              <a:tabLst/>
-              <a:defRPr/>
-            </a:pPr>
-            <a:endParaRPr lang="en-CA" sz="1200" kern="1200" dirty="0">
-              <a:solidFill>
-                <a:schemeClr val="tx1"/>
-              </a:solidFill>
-              <a:effectLst/>
-              <a:latin typeface="+mn-lt"/>
-              <a:ea typeface="+mn-ea"/>
-              <a:cs typeface="+mn-cs"/>
-            </a:endParaRPr>
-          </a:p>
-          <a:p>
-            <a:pPr marL="0" marR="0" lvl="0" indent="0" algn="l" defTabSz="914400" rtl="0" eaLnBrk="1" fontAlgn="auto" latinLnBrk="0" hangingPunct="1">
-              <a:lnSpc>
-                <a:spcPct val="100000"/>
-              </a:lnSpc>
-              <a:spcBef>
-                <a:spcPts val="0"/>
-              </a:spcBef>
-              <a:spcAft>
-                <a:spcPts val="0"/>
-              </a:spcAft>
-              <a:buClrTx/>
-              <a:buSzTx/>
-              <a:buFontTx/>
-              <a:buNone/>
-              <a:tabLst/>
-              <a:defRPr/>
-            </a:pPr>
-            <a:endParaRPr lang="en-CA" sz="1200" kern="1200" dirty="0">
-              <a:solidFill>
-                <a:schemeClr val="tx1"/>
-              </a:solidFill>
-              <a:effectLst/>
-              <a:latin typeface="+mn-lt"/>
-              <a:ea typeface="+mn-ea"/>
-              <a:cs typeface="+mn-cs"/>
-            </a:endParaRPr>
-          </a:p>
-          <a:p>
-            <a:pPr marL="0" marR="0" lvl="0" indent="0" algn="l" defTabSz="914400" rtl="0" eaLnBrk="1" fontAlgn="auto" latinLnBrk="0" hangingPunct="1">
-              <a:lnSpc>
-                <a:spcPct val="100000"/>
-              </a:lnSpc>
-              <a:spcBef>
-                <a:spcPts val="0"/>
-              </a:spcBef>
-              <a:spcAft>
-                <a:spcPts val="0"/>
-              </a:spcAft>
-              <a:buClrTx/>
-              <a:buSzTx/>
-              <a:buFontTx/>
-              <a:buNone/>
-              <a:tabLst/>
-              <a:defRPr/>
-            </a:pPr>
-            <a:endParaRPr lang="en-CA" sz="1200" kern="1200" dirty="0">
-              <a:solidFill>
-                <a:schemeClr val="tx1"/>
-              </a:solidFill>
-              <a:effectLst/>
-              <a:latin typeface="+mn-lt"/>
-              <a:ea typeface="+mn-ea"/>
-              <a:cs typeface="+mn-cs"/>
-            </a:endParaRPr>
-          </a:p>
-          <a:p>
-            <a:pPr marL="0" marR="0" lvl="0" indent="0" algn="l" defTabSz="914400" rtl="0" eaLnBrk="1" fontAlgn="auto" latinLnBrk="0" hangingPunct="1">
-              <a:lnSpc>
-                <a:spcPct val="100000"/>
-              </a:lnSpc>
-              <a:spcBef>
-                <a:spcPts val="0"/>
-              </a:spcBef>
-              <a:spcAft>
-                <a:spcPts val="0"/>
-              </a:spcAft>
-              <a:buClrTx/>
-              <a:buSzTx/>
-              <a:buFontTx/>
-              <a:buNone/>
-              <a:tabLst/>
-              <a:defRPr/>
-            </a:pPr>
-            <a:endParaRPr lang="en-CA" sz="1200" kern="1200" dirty="0">
-              <a:solidFill>
-                <a:schemeClr val="tx1"/>
-              </a:solidFill>
-              <a:effectLst/>
-              <a:latin typeface="+mn-lt"/>
-              <a:ea typeface="+mn-ea"/>
-              <a:cs typeface="+mn-cs"/>
-            </a:endParaRPr>
-          </a:p>
-          <a:p>
-            <a:endParaRPr lang="en-CA" sz="1200" i="1" kern="1200" dirty="0">
-              <a:solidFill>
-                <a:schemeClr val="tx1"/>
-              </a:solidFill>
-              <a:effectLst/>
-              <a:latin typeface="+mn-lt"/>
-              <a:ea typeface="+mn-ea"/>
-              <a:cs typeface="+mn-cs"/>
-            </a:endParaRPr>
-          </a:p>
-          <a:p>
-            <a:endParaRPr lang="en-CA" sz="1200" i="1" kern="1200" dirty="0">
-              <a:solidFill>
-                <a:schemeClr val="tx1"/>
-              </a:solidFill>
-              <a:effectLst/>
-              <a:latin typeface="+mn-lt"/>
-              <a:ea typeface="+mn-ea"/>
-              <a:cs typeface="+mn-cs"/>
-            </a:endParaRPr>
-          </a:p>
-          <a:p>
-            <a:endParaRPr lang="en-US" dirty="0"/>
-          </a:p>
-        </p:txBody>
-      </p:sp>
-      <p:sp>
-        <p:nvSpPr>
-          <p:cNvPr id="4" name="Slide Number Placeholder 3"/>
-          <p:cNvSpPr>
-            <a:spLocks noGrp="1"/>
-          </p:cNvSpPr>
-          <p:nvPr>
-            <p:ph type="sldNum" sz="quarter" idx="5"/>
-          </p:nvPr>
-        </p:nvSpPr>
-        <p:spPr/>
-        <p:txBody>
-          <a:bodyPr/>
-          <a:lstStyle/>
-          <a:p>
-            <a:fld id="{EAF9EB4E-D50A-4CF1-9B06-457599E410FB}" type="slidenum">
-              <a:rPr lang="en-CA" smtClean="0"/>
-              <a:t>11</a:t>
-            </a:fld>
-            <a:endParaRPr lang="en-CA"/>
-          </a:p>
-        </p:txBody>
-      </p:sp>
-    </p:spTree>
-    <p:extLst>
-      <p:ext uri="{BB962C8B-B14F-4D97-AF65-F5344CB8AC3E}">
-        <p14:creationId xmlns:p14="http://schemas.microsoft.com/office/powerpoint/2010/main" val="3294888723"/>
       </p:ext>
     </p:extLst>
   </p:cSld>
@@ -23226,14 +23090,865 @@
           <a:p>
             <a:r>
               <a:rPr lang="en-US" dirty="0"/>
-              <a:t>We are starting from zero investment into this,</a:t>
-            </a:r>
+              <a:t>Milestones, lastly the objective at the moment would be to have a working version of the protocol ready to go in April.</a:t>
+            </a:r>
+          </a:p>
+          <a:p>
+            <a:endParaRPr lang="en-US" dirty="0"/>
           </a:p>
           <a:p>
             <a:r>
               <a:rPr lang="en-US" dirty="0"/>
-              <a:t>Now committing 0.4FTE of a PS2</a:t>
-            </a:r>
+              <a:t>From now </a:t>
+            </a:r>
+            <a:r>
+              <a:rPr lang="en-US" dirty="0" err="1"/>
+              <a:t>ntil</a:t>
+            </a:r>
+            <a:r>
+              <a:rPr lang="en-US" dirty="0"/>
+              <a:t> then , I would be the building this thing out, continuously working on it, while also  getting it </a:t>
+            </a:r>
+            <a:r>
+              <a:rPr lang="en-US"/>
+              <a:t>to different points </a:t>
+            </a:r>
+            <a:r>
+              <a:rPr lang="en-US" dirty="0"/>
+              <a:t>where collaboration with different skilled professionals can be most effective.</a:t>
+            </a:r>
+          </a:p>
+          <a:p>
+            <a:endParaRPr lang="en-US" dirty="0"/>
+          </a:p>
+          <a:p>
+            <a:r>
+              <a:rPr lang="en-US" dirty="0"/>
+              <a:t>And then once version 1 is built, then future work involves </a:t>
+            </a:r>
+          </a:p>
+          <a:p>
+            <a:endParaRPr lang="en-US" dirty="0"/>
+          </a:p>
+          <a:p>
+            <a:endParaRPr lang="en-US" dirty="0"/>
+          </a:p>
+          <a:p>
+            <a:r>
+              <a:rPr lang="en-US" dirty="0"/>
+              <a:t>So that’s the pitch, if anyone wants to pause now, I can answer any questions you have, otherwise I can show you some of what I’ve been working on so you can see my actual idea and vison for this project</a:t>
+            </a:r>
+          </a:p>
+          <a:p>
+            <a:endParaRPr lang="en-US" dirty="0"/>
+          </a:p>
+          <a:p>
+            <a:endParaRPr lang="en-US" dirty="0"/>
+          </a:p>
+          <a:p>
+            <a:endParaRPr lang="en-US" dirty="0"/>
+          </a:p>
+          <a:p>
+            <a:endParaRPr lang="en-US" dirty="0"/>
+          </a:p>
+          <a:p>
+            <a:endParaRPr lang="en-US" dirty="0"/>
+          </a:p>
+          <a:p>
+            <a:endParaRPr lang="en-US" dirty="0"/>
+          </a:p>
+          <a:p>
+            <a:endParaRPr lang="en-US" dirty="0"/>
+          </a:p>
+          <a:p>
+            <a:endParaRPr lang="en-US" dirty="0"/>
+          </a:p>
+          <a:p>
+            <a:r>
+              <a:rPr lang="en-US" dirty="0"/>
+              <a:t>In January the goal would be to have it at a point where collaboration can be most effective. So starting to get input and have discussions on the actual content of the protocol, and also the behind-the-scenes technical work to make sure that this is a professional, functional product that we can put out there with confidence.</a:t>
+            </a:r>
+          </a:p>
+          <a:p>
+            <a:endParaRPr lang="en-US" dirty="0"/>
+          </a:p>
+          <a:p>
+            <a:endParaRPr lang="en-US" dirty="0"/>
+          </a:p>
+          <a:p>
+            <a:endParaRPr lang="en-US" dirty="0"/>
+          </a:p>
+          <a:p>
+            <a:r>
+              <a:rPr lang="en-US" dirty="0"/>
+              <a:t>Deliver a working product in April</a:t>
+            </a:r>
+          </a:p>
+          <a:p>
+            <a:endParaRPr lang="en-US" dirty="0"/>
+          </a:p>
+          <a:p>
+            <a:endParaRPr lang="en-US" dirty="0"/>
+          </a:p>
+          <a:p>
+            <a:endParaRPr lang="en-US" dirty="0"/>
+          </a:p>
+          <a:p>
+            <a:r>
+              <a:rPr lang="en-US" b="1" dirty="0"/>
+              <a:t>AK</a:t>
+            </a:r>
+          </a:p>
+          <a:p>
+            <a:r>
+              <a:rPr lang="en-US" dirty="0"/>
+              <a:t>-my proposal is far more internal.. I don’t think it’s productive to include all the stakeholders at this stage</a:t>
+            </a:r>
+          </a:p>
+          <a:p>
+            <a:r>
+              <a:rPr lang="en-US" dirty="0"/>
+              <a:t>-build a prototype</a:t>
+            </a:r>
+          </a:p>
+          <a:p>
+            <a:r>
+              <a:rPr lang="en-US" dirty="0"/>
+              <a:t>-ensure it aligns with CSI policies and procedures and is feasible within those</a:t>
+            </a:r>
+          </a:p>
+          <a:p>
+            <a:endParaRPr lang="en-US" dirty="0"/>
+          </a:p>
+          <a:p>
+            <a:r>
+              <a:rPr lang="en-US" b="1" dirty="0"/>
+              <a:t>CH</a:t>
+            </a:r>
+          </a:p>
+          <a:p>
+            <a:r>
+              <a:rPr lang="en-US" u="sng" dirty="0"/>
+              <a:t>Discovery and Planning (0-3 months)</a:t>
+            </a:r>
+          </a:p>
+          <a:p>
+            <a:r>
+              <a:rPr lang="en-US" dirty="0"/>
+              <a:t>-</a:t>
+            </a:r>
+            <a:r>
+              <a:rPr lang="en-CA" sz="1200" kern="1200" dirty="0">
+                <a:solidFill>
+                  <a:schemeClr val="tx1"/>
+                </a:solidFill>
+                <a:effectLst/>
+                <a:latin typeface="+mn-lt"/>
+                <a:ea typeface="+mn-ea"/>
+                <a:cs typeface="+mn-cs"/>
+              </a:rPr>
+              <a:t>comprehensive stakeholder consultation and needs analysis</a:t>
+            </a:r>
+          </a:p>
+          <a:p>
+            <a:r>
+              <a:rPr lang="en-CA" sz="1200" i="1" kern="1200" dirty="0">
+                <a:solidFill>
+                  <a:schemeClr val="tx1"/>
+                </a:solidFill>
+                <a:effectLst/>
+                <a:latin typeface="+mn-lt"/>
+                <a:ea typeface="+mn-ea"/>
+                <a:cs typeface="+mn-cs"/>
+              </a:rPr>
+              <a:t>	-We discover that athletes sometimes get hurt and there is a lack of effective, structured protocols 	to support the rehab process and include all stakeholders</a:t>
+            </a:r>
+          </a:p>
+          <a:p>
+            <a:pPr marL="0" marR="0" lvl="0" indent="0" algn="l" defTabSz="914400" rtl="0" eaLnBrk="1" fontAlgn="auto" latinLnBrk="0" hangingPunct="1">
+              <a:lnSpc>
+                <a:spcPct val="100000"/>
+              </a:lnSpc>
+              <a:spcBef>
+                <a:spcPts val="0"/>
+              </a:spcBef>
+              <a:spcAft>
+                <a:spcPts val="0"/>
+              </a:spcAft>
+              <a:buClrTx/>
+              <a:buSzTx/>
+              <a:buFontTx/>
+              <a:buNone/>
+              <a:tabLst/>
+              <a:defRPr/>
+            </a:pPr>
+            <a:r>
+              <a:rPr lang="en-CA" sz="1200" b="0" u="sng" kern="1200" dirty="0">
+                <a:solidFill>
+                  <a:schemeClr val="tx1"/>
+                </a:solidFill>
+                <a:effectLst/>
+                <a:latin typeface="+mn-lt"/>
+                <a:ea typeface="+mn-ea"/>
+                <a:cs typeface="+mn-cs"/>
+              </a:rPr>
+              <a:t>Phase 2: Design and Development </a:t>
+            </a:r>
+            <a:r>
+              <a:rPr lang="en-CA" sz="1200" u="sng" kern="1200" dirty="0">
+                <a:solidFill>
+                  <a:schemeClr val="tx1"/>
+                </a:solidFill>
+                <a:effectLst/>
+                <a:latin typeface="+mn-lt"/>
+                <a:ea typeface="+mn-ea"/>
+                <a:cs typeface="+mn-cs"/>
+              </a:rPr>
+              <a:t>(months 3–6)</a:t>
+            </a:r>
+            <a:endParaRPr lang="en-CA" sz="1200" i="1" u="sng" kern="1200" dirty="0">
+              <a:solidFill>
+                <a:schemeClr val="tx1"/>
+              </a:solidFill>
+              <a:effectLst/>
+              <a:latin typeface="+mn-lt"/>
+              <a:ea typeface="+mn-ea"/>
+              <a:cs typeface="+mn-cs"/>
+            </a:endParaRPr>
+          </a:p>
+          <a:p>
+            <a:pPr marL="0" marR="0" lvl="0" indent="0" algn="l" defTabSz="914400" rtl="0" eaLnBrk="1" fontAlgn="auto" latinLnBrk="0" hangingPunct="1">
+              <a:lnSpc>
+                <a:spcPct val="100000"/>
+              </a:lnSpc>
+              <a:spcBef>
+                <a:spcPts val="0"/>
+              </a:spcBef>
+              <a:spcAft>
+                <a:spcPts val="0"/>
+              </a:spcAft>
+              <a:buClrTx/>
+              <a:buSzTx/>
+              <a:buFontTx/>
+              <a:buNone/>
+              <a:tabLst/>
+              <a:defRPr/>
+            </a:pPr>
+            <a:r>
+              <a:rPr lang="en-CA" sz="1200" i="1" kern="1200" dirty="0">
+                <a:solidFill>
+                  <a:schemeClr val="tx1"/>
+                </a:solidFill>
+                <a:effectLst/>
+                <a:latin typeface="+mn-lt"/>
+                <a:ea typeface="+mn-ea"/>
+                <a:cs typeface="+mn-cs"/>
+              </a:rPr>
+              <a:t>-</a:t>
+            </a:r>
+            <a:r>
+              <a:rPr lang="en-CA" sz="1200" kern="1200" dirty="0">
+                <a:solidFill>
+                  <a:schemeClr val="tx1"/>
+                </a:solidFill>
+                <a:effectLst/>
+                <a:latin typeface="+mn-lt"/>
+                <a:ea typeface="+mn-ea"/>
+                <a:cs typeface="+mn-cs"/>
+              </a:rPr>
+              <a:t>facility enhancements will be planned</a:t>
+            </a:r>
+          </a:p>
+          <a:p>
+            <a:pPr marL="0" marR="0" lvl="0" indent="0" algn="l" defTabSz="914400" rtl="0" eaLnBrk="1" fontAlgn="auto" latinLnBrk="0" hangingPunct="1">
+              <a:lnSpc>
+                <a:spcPct val="100000"/>
+              </a:lnSpc>
+              <a:spcBef>
+                <a:spcPts val="0"/>
+              </a:spcBef>
+              <a:spcAft>
+                <a:spcPts val="0"/>
+              </a:spcAft>
+              <a:buClrTx/>
+              <a:buSzTx/>
+              <a:buFontTx/>
+              <a:buNone/>
+              <a:tabLst/>
+              <a:defRPr/>
+            </a:pPr>
+            <a:r>
+              <a:rPr lang="en-CA" sz="1200" kern="1200" dirty="0">
+                <a:solidFill>
+                  <a:schemeClr val="tx1"/>
+                </a:solidFill>
+                <a:effectLst/>
+                <a:latin typeface="+mn-lt"/>
+                <a:ea typeface="+mn-ea"/>
+                <a:cs typeface="+mn-cs"/>
+              </a:rPr>
+              <a:t>-Biodex isokinetic dynamometer equipment will be procured</a:t>
+            </a:r>
+          </a:p>
+          <a:p>
+            <a:pPr marL="0" marR="0" lvl="0" indent="0" algn="l" defTabSz="914400" rtl="0" eaLnBrk="1" fontAlgn="auto" latinLnBrk="0" hangingPunct="1">
+              <a:lnSpc>
+                <a:spcPct val="100000"/>
+              </a:lnSpc>
+              <a:spcBef>
+                <a:spcPts val="0"/>
+              </a:spcBef>
+              <a:spcAft>
+                <a:spcPts val="0"/>
+              </a:spcAft>
+              <a:buClrTx/>
+              <a:buSzTx/>
+              <a:buFontTx/>
+              <a:buNone/>
+              <a:tabLst/>
+              <a:defRPr/>
+            </a:pPr>
+            <a:r>
+              <a:rPr lang="en-CA" sz="1200" kern="1200" dirty="0">
+                <a:solidFill>
+                  <a:schemeClr val="tx1"/>
+                </a:solidFill>
+                <a:effectLst/>
+                <a:latin typeface="+mn-lt"/>
+                <a:ea typeface="+mn-ea"/>
+                <a:cs typeface="+mn-cs"/>
+              </a:rPr>
+              <a:t>-Operational guidelines and best practice protocols will be developed</a:t>
+            </a:r>
+          </a:p>
+          <a:p>
+            <a:pPr marL="0" marR="0" lvl="0" indent="0" algn="l" defTabSz="914400" rtl="0" eaLnBrk="1" fontAlgn="auto" latinLnBrk="0" hangingPunct="1">
+              <a:lnSpc>
+                <a:spcPct val="100000"/>
+              </a:lnSpc>
+              <a:spcBef>
+                <a:spcPts val="0"/>
+              </a:spcBef>
+              <a:spcAft>
+                <a:spcPts val="0"/>
+              </a:spcAft>
+              <a:buClrTx/>
+              <a:buSzTx/>
+              <a:buFontTx/>
+              <a:buNone/>
+              <a:tabLst/>
+              <a:defRPr/>
+            </a:pPr>
+            <a:r>
+              <a:rPr lang="en-CA" sz="1200" kern="1200" dirty="0">
+                <a:solidFill>
+                  <a:schemeClr val="tx1"/>
+                </a:solidFill>
+                <a:effectLst/>
+                <a:latin typeface="+mn-lt"/>
+                <a:ea typeface="+mn-ea"/>
+                <a:cs typeface="+mn-cs"/>
+              </a:rPr>
+              <a:t>-staff training</a:t>
+            </a:r>
+          </a:p>
+          <a:p>
+            <a:r>
+              <a:rPr lang="en-CA" sz="1200" kern="1200" dirty="0">
+                <a:solidFill>
+                  <a:schemeClr val="tx1"/>
+                </a:solidFill>
+                <a:effectLst/>
+                <a:latin typeface="+mn-lt"/>
+                <a:ea typeface="+mn-ea"/>
+                <a:cs typeface="+mn-cs"/>
+              </a:rPr>
+              <a:t>-Establishing research partnerships with academic and clinical institutions</a:t>
+            </a:r>
+          </a:p>
+          <a:p>
+            <a:r>
+              <a:rPr lang="en-CA" sz="1200" kern="1200" dirty="0">
+                <a:solidFill>
+                  <a:schemeClr val="tx1"/>
+                </a:solidFill>
+                <a:effectLst/>
+                <a:latin typeface="+mn-lt"/>
+                <a:ea typeface="+mn-ea"/>
+                <a:cs typeface="+mn-cs"/>
+              </a:rPr>
+              <a:t>	</a:t>
+            </a:r>
+            <a:r>
+              <a:rPr lang="en-CA" sz="1200" i="1" kern="1200" dirty="0">
+                <a:solidFill>
+                  <a:schemeClr val="tx1"/>
+                </a:solidFill>
+                <a:effectLst/>
+                <a:latin typeface="+mn-lt"/>
+                <a:ea typeface="+mn-ea"/>
+                <a:cs typeface="+mn-cs"/>
+              </a:rPr>
+              <a:t>-Build the protocol document</a:t>
+            </a:r>
+          </a:p>
+          <a:p>
+            <a:r>
+              <a:rPr lang="en-CA" sz="1200" i="1" kern="1200" dirty="0">
+                <a:solidFill>
+                  <a:schemeClr val="tx1"/>
+                </a:solidFill>
+                <a:effectLst/>
+                <a:latin typeface="+mn-lt"/>
+                <a:ea typeface="+mn-ea"/>
+                <a:cs typeface="+mn-cs"/>
+              </a:rPr>
+              <a:t>	-Set up </a:t>
+            </a:r>
+            <a:r>
+              <a:rPr lang="en-CA" sz="1200" i="1" kern="1200" dirty="0" err="1">
+                <a:solidFill>
+                  <a:schemeClr val="tx1"/>
+                </a:solidFill>
+                <a:effectLst/>
+                <a:latin typeface="+mn-lt"/>
+                <a:ea typeface="+mn-ea"/>
+                <a:cs typeface="+mn-cs"/>
+              </a:rPr>
+              <a:t>Tindeq</a:t>
+            </a:r>
+            <a:endParaRPr lang="en-CA" sz="1200" i="1" kern="1200" dirty="0">
+              <a:solidFill>
+                <a:schemeClr val="tx1"/>
+              </a:solidFill>
+              <a:effectLst/>
+              <a:latin typeface="+mn-lt"/>
+              <a:ea typeface="+mn-ea"/>
+              <a:cs typeface="+mn-cs"/>
+            </a:endParaRPr>
+          </a:p>
+          <a:p>
+            <a:pPr marL="0" marR="0" lvl="0" indent="0" algn="l" defTabSz="914400" rtl="0" eaLnBrk="1" fontAlgn="auto" latinLnBrk="0" hangingPunct="1">
+              <a:lnSpc>
+                <a:spcPct val="100000"/>
+              </a:lnSpc>
+              <a:spcBef>
+                <a:spcPts val="0"/>
+              </a:spcBef>
+              <a:spcAft>
+                <a:spcPts val="0"/>
+              </a:spcAft>
+              <a:buClrTx/>
+              <a:buSzTx/>
+              <a:buFontTx/>
+              <a:buNone/>
+              <a:tabLst/>
+              <a:defRPr/>
+            </a:pPr>
+            <a:r>
+              <a:rPr lang="en-CA" sz="1200" b="0" u="sng" kern="1200" dirty="0">
+                <a:solidFill>
+                  <a:schemeClr val="tx1"/>
+                </a:solidFill>
+                <a:effectLst/>
+                <a:latin typeface="+mn-lt"/>
+                <a:ea typeface="+mn-ea"/>
+                <a:cs typeface="+mn-cs"/>
+              </a:rPr>
+              <a:t>Phase 3: Pilot Implementation and Testing (months 6–12)</a:t>
+            </a:r>
+          </a:p>
+          <a:p>
+            <a:r>
+              <a:rPr lang="en-CA" sz="1200" kern="1200" dirty="0">
+                <a:solidFill>
+                  <a:schemeClr val="tx1"/>
+                </a:solidFill>
+                <a:effectLst/>
+                <a:latin typeface="+mn-lt"/>
+                <a:ea typeface="+mn-ea"/>
+                <a:cs typeface="+mn-cs"/>
+              </a:rPr>
+              <a:t>-initial rollout of RTP services through a pilot program in collaboration with select winter sport NSOs</a:t>
+            </a:r>
+          </a:p>
+          <a:p>
+            <a:r>
+              <a:rPr lang="en-CA" sz="1200" kern="1200" dirty="0">
+                <a:solidFill>
+                  <a:schemeClr val="tx1"/>
+                </a:solidFill>
+                <a:effectLst/>
+                <a:latin typeface="+mn-lt"/>
+                <a:ea typeface="+mn-ea"/>
+                <a:cs typeface="+mn-cs"/>
+              </a:rPr>
+              <a:t>-development of RTP service packages accessible to the broader public via Performance Nation</a:t>
+            </a:r>
+          </a:p>
+          <a:p>
+            <a:endParaRPr lang="en-CA" sz="1200" kern="1200" dirty="0">
+              <a:solidFill>
+                <a:schemeClr val="tx1"/>
+              </a:solidFill>
+              <a:effectLst/>
+              <a:latin typeface="+mn-lt"/>
+              <a:ea typeface="+mn-ea"/>
+              <a:cs typeface="+mn-cs"/>
+            </a:endParaRPr>
+          </a:p>
+          <a:p>
+            <a:pPr marL="0" marR="0" lvl="0" indent="0" algn="l" defTabSz="914400" rtl="0" eaLnBrk="1" fontAlgn="auto" latinLnBrk="0" hangingPunct="1">
+              <a:lnSpc>
+                <a:spcPct val="100000"/>
+              </a:lnSpc>
+              <a:spcBef>
+                <a:spcPts val="0"/>
+              </a:spcBef>
+              <a:spcAft>
+                <a:spcPts val="0"/>
+              </a:spcAft>
+              <a:buClrTx/>
+              <a:buSzTx/>
+              <a:buFontTx/>
+              <a:buNone/>
+              <a:tabLst/>
+              <a:defRPr/>
+            </a:pPr>
+            <a:r>
+              <a:rPr lang="en-CA" sz="1200" b="0" u="sng" kern="1200" dirty="0">
+                <a:solidFill>
+                  <a:schemeClr val="tx1"/>
+                </a:solidFill>
+                <a:effectLst/>
+                <a:latin typeface="+mn-lt"/>
+                <a:ea typeface="+mn-ea"/>
+                <a:cs typeface="+mn-cs"/>
+              </a:rPr>
+              <a:t>Phase 4: Full-Scale Implementation and Launch (months 12–18)</a:t>
+            </a:r>
+          </a:p>
+          <a:p>
+            <a:r>
+              <a:rPr lang="en-CA" sz="1200" kern="1200" dirty="0">
+                <a:solidFill>
+                  <a:schemeClr val="tx1"/>
+                </a:solidFill>
+                <a:effectLst/>
+                <a:latin typeface="+mn-lt"/>
+                <a:ea typeface="+mn-ea"/>
+                <a:cs typeface="+mn-cs"/>
+              </a:rPr>
+              <a:t>-fully operational and accessible to all NSO and PSO partners as well as the public via Performance Nation</a:t>
+            </a:r>
+          </a:p>
+          <a:p>
+            <a:pPr marL="0" marR="0" lvl="0" indent="0" algn="l" defTabSz="914400" rtl="0" eaLnBrk="1" fontAlgn="auto" latinLnBrk="0" hangingPunct="1">
+              <a:lnSpc>
+                <a:spcPct val="100000"/>
+              </a:lnSpc>
+              <a:spcBef>
+                <a:spcPts val="0"/>
+              </a:spcBef>
+              <a:spcAft>
+                <a:spcPts val="0"/>
+              </a:spcAft>
+              <a:buClrTx/>
+              <a:buSzTx/>
+              <a:buFontTx/>
+              <a:buNone/>
+              <a:tabLst/>
+              <a:defRPr/>
+            </a:pPr>
+            <a:r>
+              <a:rPr lang="en-CA" sz="1200" kern="1200" dirty="0">
+                <a:solidFill>
+                  <a:schemeClr val="tx1"/>
+                </a:solidFill>
+                <a:effectLst/>
+                <a:latin typeface="+mn-lt"/>
+                <a:ea typeface="+mn-ea"/>
+                <a:cs typeface="+mn-cs"/>
+              </a:rPr>
+              <a:t>-comprehensive marketing and communication strategy</a:t>
+            </a:r>
+          </a:p>
+          <a:p>
+            <a:endParaRPr lang="en-CA" sz="1200" kern="1200" dirty="0">
+              <a:solidFill>
+                <a:schemeClr val="tx1"/>
+              </a:solidFill>
+              <a:effectLst/>
+              <a:latin typeface="+mn-lt"/>
+              <a:ea typeface="+mn-ea"/>
+              <a:cs typeface="+mn-cs"/>
+            </a:endParaRPr>
+          </a:p>
+          <a:p>
+            <a:pPr marL="0" marR="0" lvl="0" indent="0" algn="l" defTabSz="914400" rtl="0" eaLnBrk="1" fontAlgn="auto" latinLnBrk="0" hangingPunct="1">
+              <a:lnSpc>
+                <a:spcPct val="100000"/>
+              </a:lnSpc>
+              <a:spcBef>
+                <a:spcPts val="0"/>
+              </a:spcBef>
+              <a:spcAft>
+                <a:spcPts val="0"/>
+              </a:spcAft>
+              <a:buClrTx/>
+              <a:buSzTx/>
+              <a:buFontTx/>
+              <a:buNone/>
+              <a:tabLst/>
+              <a:defRPr/>
+            </a:pPr>
+            <a:r>
+              <a:rPr lang="en-CA" sz="1200" b="0" u="sng" kern="1200" dirty="0">
+                <a:solidFill>
+                  <a:schemeClr val="tx1"/>
+                </a:solidFill>
+                <a:effectLst/>
+                <a:latin typeface="+mn-lt"/>
+                <a:ea typeface="+mn-ea"/>
+                <a:cs typeface="+mn-cs"/>
+              </a:rPr>
+              <a:t>Phase 5: Evaluation and Continuous Improvement (ongoing)</a:t>
+            </a:r>
+          </a:p>
+          <a:p>
+            <a:r>
+              <a:rPr lang="en-CA" sz="1200" kern="1200" dirty="0">
+                <a:solidFill>
+                  <a:schemeClr val="tx1"/>
+                </a:solidFill>
+                <a:effectLst/>
+                <a:latin typeface="+mn-lt"/>
+                <a:ea typeface="+mn-ea"/>
+                <a:cs typeface="+mn-cs"/>
+              </a:rPr>
+              <a:t>-monitoring program outcomes against the established KPIs</a:t>
+            </a:r>
+          </a:p>
+          <a:p>
+            <a:r>
+              <a:rPr lang="en-CA" sz="1200" kern="1200" dirty="0">
+                <a:solidFill>
+                  <a:schemeClr val="tx1"/>
+                </a:solidFill>
+                <a:effectLst/>
+                <a:latin typeface="+mn-lt"/>
+                <a:ea typeface="+mn-ea"/>
+                <a:cs typeface="+mn-cs"/>
+              </a:rPr>
+              <a:t>-regular audits and impact assessments to evaluate effectiveness, refine protocols, and integrate emerging</a:t>
+            </a:r>
+          </a:p>
+          <a:p>
+            <a:r>
+              <a:rPr lang="en-CA" sz="1200" kern="1200" dirty="0">
+                <a:solidFill>
+                  <a:schemeClr val="tx1"/>
+                </a:solidFill>
+                <a:effectLst/>
+                <a:latin typeface="+mn-lt"/>
+                <a:ea typeface="+mn-ea"/>
+                <a:cs typeface="+mn-cs"/>
+              </a:rPr>
+              <a:t>technologies</a:t>
+            </a:r>
+          </a:p>
+          <a:p>
+            <a:pPr marL="0" marR="0" lvl="0" indent="0" algn="l" defTabSz="914400" rtl="0" eaLnBrk="1" fontAlgn="auto" latinLnBrk="0" hangingPunct="1">
+              <a:lnSpc>
+                <a:spcPct val="100000"/>
+              </a:lnSpc>
+              <a:spcBef>
+                <a:spcPts val="0"/>
+              </a:spcBef>
+              <a:spcAft>
+                <a:spcPts val="0"/>
+              </a:spcAft>
+              <a:buClrTx/>
+              <a:buSzTx/>
+              <a:buFontTx/>
+              <a:buNone/>
+              <a:tabLst/>
+              <a:defRPr/>
+            </a:pPr>
+            <a:endParaRPr lang="en-CA" sz="1200" kern="1200" dirty="0">
+              <a:solidFill>
+                <a:schemeClr val="tx1"/>
+              </a:solidFill>
+              <a:effectLst/>
+              <a:latin typeface="+mn-lt"/>
+              <a:ea typeface="+mn-ea"/>
+              <a:cs typeface="+mn-cs"/>
+            </a:endParaRPr>
+          </a:p>
+          <a:p>
+            <a:pPr marL="0" marR="0" lvl="0" indent="0" algn="l" defTabSz="914400" rtl="0" eaLnBrk="1" fontAlgn="auto" latinLnBrk="0" hangingPunct="1">
+              <a:lnSpc>
+                <a:spcPct val="100000"/>
+              </a:lnSpc>
+              <a:spcBef>
+                <a:spcPts val="0"/>
+              </a:spcBef>
+              <a:spcAft>
+                <a:spcPts val="0"/>
+              </a:spcAft>
+              <a:buClrTx/>
+              <a:buSzTx/>
+              <a:buFontTx/>
+              <a:buNone/>
+              <a:tabLst/>
+              <a:defRPr/>
+            </a:pPr>
+            <a:endParaRPr lang="en-CA" sz="1200" kern="1200" dirty="0">
+              <a:solidFill>
+                <a:schemeClr val="tx1"/>
+              </a:solidFill>
+              <a:effectLst/>
+              <a:latin typeface="+mn-lt"/>
+              <a:ea typeface="+mn-ea"/>
+              <a:cs typeface="+mn-cs"/>
+            </a:endParaRPr>
+          </a:p>
+          <a:p>
+            <a:pPr marL="0" marR="0" lvl="0" indent="0" algn="l" defTabSz="914400" rtl="0" eaLnBrk="1" fontAlgn="auto" latinLnBrk="0" hangingPunct="1">
+              <a:lnSpc>
+                <a:spcPct val="100000"/>
+              </a:lnSpc>
+              <a:spcBef>
+                <a:spcPts val="0"/>
+              </a:spcBef>
+              <a:spcAft>
+                <a:spcPts val="0"/>
+              </a:spcAft>
+              <a:buClrTx/>
+              <a:buSzTx/>
+              <a:buFontTx/>
+              <a:buNone/>
+              <a:tabLst/>
+              <a:defRPr/>
+            </a:pPr>
+            <a:endParaRPr lang="en-CA" sz="1200" kern="1200" dirty="0">
+              <a:solidFill>
+                <a:schemeClr val="tx1"/>
+              </a:solidFill>
+              <a:effectLst/>
+              <a:latin typeface="+mn-lt"/>
+              <a:ea typeface="+mn-ea"/>
+              <a:cs typeface="+mn-cs"/>
+            </a:endParaRPr>
+          </a:p>
+          <a:p>
+            <a:pPr marL="0" marR="0" lvl="0" indent="0" algn="l" defTabSz="914400" rtl="0" eaLnBrk="1" fontAlgn="auto" latinLnBrk="0" hangingPunct="1">
+              <a:lnSpc>
+                <a:spcPct val="100000"/>
+              </a:lnSpc>
+              <a:spcBef>
+                <a:spcPts val="0"/>
+              </a:spcBef>
+              <a:spcAft>
+                <a:spcPts val="0"/>
+              </a:spcAft>
+              <a:buClrTx/>
+              <a:buSzTx/>
+              <a:buFontTx/>
+              <a:buNone/>
+              <a:tabLst/>
+              <a:defRPr/>
+            </a:pPr>
+            <a:endParaRPr lang="en-CA" sz="1200" kern="1200" dirty="0">
+              <a:solidFill>
+                <a:schemeClr val="tx1"/>
+              </a:solidFill>
+              <a:effectLst/>
+              <a:latin typeface="+mn-lt"/>
+              <a:ea typeface="+mn-ea"/>
+              <a:cs typeface="+mn-cs"/>
+            </a:endParaRPr>
+          </a:p>
+          <a:p>
+            <a:pPr marL="0" marR="0" lvl="0" indent="0" algn="l" defTabSz="914400" rtl="0" eaLnBrk="1" fontAlgn="auto" latinLnBrk="0" hangingPunct="1">
+              <a:lnSpc>
+                <a:spcPct val="100000"/>
+              </a:lnSpc>
+              <a:spcBef>
+                <a:spcPts val="0"/>
+              </a:spcBef>
+              <a:spcAft>
+                <a:spcPts val="0"/>
+              </a:spcAft>
+              <a:buClrTx/>
+              <a:buSzTx/>
+              <a:buFontTx/>
+              <a:buNone/>
+              <a:tabLst/>
+              <a:defRPr/>
+            </a:pPr>
+            <a:endParaRPr lang="en-CA" sz="1200" kern="1200" dirty="0">
+              <a:solidFill>
+                <a:schemeClr val="tx1"/>
+              </a:solidFill>
+              <a:effectLst/>
+              <a:latin typeface="+mn-lt"/>
+              <a:ea typeface="+mn-ea"/>
+              <a:cs typeface="+mn-cs"/>
+            </a:endParaRPr>
+          </a:p>
+          <a:p>
+            <a:pPr marL="0" marR="0" lvl="0" indent="0" algn="l" defTabSz="914400" rtl="0" eaLnBrk="1" fontAlgn="auto" latinLnBrk="0" hangingPunct="1">
+              <a:lnSpc>
+                <a:spcPct val="100000"/>
+              </a:lnSpc>
+              <a:spcBef>
+                <a:spcPts val="0"/>
+              </a:spcBef>
+              <a:spcAft>
+                <a:spcPts val="0"/>
+              </a:spcAft>
+              <a:buClrTx/>
+              <a:buSzTx/>
+              <a:buFontTx/>
+              <a:buNone/>
+              <a:tabLst/>
+              <a:defRPr/>
+            </a:pPr>
+            <a:endParaRPr lang="en-CA" sz="1200" kern="1200" dirty="0">
+              <a:solidFill>
+                <a:schemeClr val="tx1"/>
+              </a:solidFill>
+              <a:effectLst/>
+              <a:latin typeface="+mn-lt"/>
+              <a:ea typeface="+mn-ea"/>
+              <a:cs typeface="+mn-cs"/>
+            </a:endParaRPr>
+          </a:p>
+          <a:p>
+            <a:endParaRPr lang="en-CA" sz="1200" i="1" kern="1200" dirty="0">
+              <a:solidFill>
+                <a:schemeClr val="tx1"/>
+              </a:solidFill>
+              <a:effectLst/>
+              <a:latin typeface="+mn-lt"/>
+              <a:ea typeface="+mn-ea"/>
+              <a:cs typeface="+mn-cs"/>
+            </a:endParaRPr>
+          </a:p>
+          <a:p>
+            <a:endParaRPr lang="en-CA" sz="1200" i="1" kern="1200" dirty="0">
+              <a:solidFill>
+                <a:schemeClr val="tx1"/>
+              </a:solidFill>
+              <a:effectLst/>
+              <a:latin typeface="+mn-lt"/>
+              <a:ea typeface="+mn-ea"/>
+              <a:cs typeface="+mn-cs"/>
+            </a:endParaRPr>
+          </a:p>
+          <a:p>
+            <a:endParaRPr lang="en-US" dirty="0"/>
           </a:p>
         </p:txBody>
       </p:sp>
@@ -23255,6 +23970,99 @@
             <a:fld id="{EAF9EB4E-D50A-4CF1-9B06-457599E410FB}" type="slidenum">
               <a:rPr lang="en-CA" smtClean="0"/>
               <a:t>13</a:t>
+            </a:fld>
+            <a:endParaRPr lang="en-CA"/>
+          </a:p>
+        </p:txBody>
+      </p:sp>
+    </p:spTree>
+    <p:extLst>
+      <p:ext uri="{BB962C8B-B14F-4D97-AF65-F5344CB8AC3E}">
+        <p14:creationId xmlns:p14="http://schemas.microsoft.com/office/powerpoint/2010/main" val="3294888723"/>
+      </p:ext>
+    </p:extLst>
+  </p:cSld>
+  <p:clrMapOvr>
+    <a:masterClrMapping/>
+  </p:clrMapOvr>
+</p:notes>
+</file>
+
+<file path=ppt/notesSlides/notesSlide13.xml><?xml version="1.0" encoding="utf-8"?>
+<p:notes xmlns:a="http://schemas.openxmlformats.org/drawingml/2006/main" xmlns:r="http://schemas.openxmlformats.org/officeDocument/2006/relationships" xmlns:p="http://schemas.openxmlformats.org/presentationml/2006/main">
+  <p:cSld>
+    <p:spTree>
+      <p:nvGrpSpPr>
+        <p:cNvPr id="1" name=""/>
+        <p:cNvGrpSpPr/>
+        <p:nvPr/>
+      </p:nvGrpSpPr>
+      <p:grpSpPr>
+        <a:xfrm>
+          <a:off x="0" y="0"/>
+          <a:ext cx="0" cy="0"/>
+          <a:chOff x="0" y="0"/>
+          <a:chExt cx="0" cy="0"/>
+        </a:xfrm>
+      </p:grpSpPr>
+      <p:sp>
+        <p:nvSpPr>
+          <p:cNvPr id="2" name="Slide Image Placeholder 1"/>
+          <p:cNvSpPr>
+            <a:spLocks noGrp="1" noRot="1" noChangeAspect="1"/>
+          </p:cNvSpPr>
+          <p:nvPr>
+            <p:ph type="sldImg"/>
+          </p:nvPr>
+        </p:nvSpPr>
+        <p:spPr/>
+      </p:sp>
+      <p:sp>
+        <p:nvSpPr>
+          <p:cNvPr id="3" name="Notes Placeholder 2"/>
+          <p:cNvSpPr>
+            <a:spLocks noGrp="1"/>
+          </p:cNvSpPr>
+          <p:nvPr>
+            <p:ph type="body" idx="1"/>
+          </p:nvPr>
+        </p:nvSpPr>
+        <p:spPr/>
+        <p:txBody>
+          <a:bodyPr/>
+          <a:lstStyle/>
+          <a:p>
+            <a:r>
+              <a:rPr lang="en-US" dirty="0"/>
+              <a:t>We are starting from zero investment into this,</a:t>
+            </a:r>
+          </a:p>
+          <a:p>
+            <a:r>
+              <a:rPr lang="en-US" dirty="0"/>
+              <a:t>Now committing 0.4FTE of a PS2</a:t>
+            </a:r>
+          </a:p>
+        </p:txBody>
+      </p:sp>
+      <p:sp>
+        <p:nvSpPr>
+          <p:cNvPr id="4" name="Slide Number Placeholder 3"/>
+          <p:cNvSpPr>
+            <a:spLocks noGrp="1"/>
+          </p:cNvSpPr>
+          <p:nvPr>
+            <p:ph type="sldNum" sz="quarter" idx="5"/>
+          </p:nvPr>
+        </p:nvSpPr>
+        <p:spPr/>
+        <p:txBody>
+          <a:bodyPr/>
+          <a:lstStyle/>
+          <a:p>
+            <a:fld id="{EAF9EB4E-D50A-4CF1-9B06-457599E410FB}" type="slidenum">
+              <a:rPr lang="en-CA" smtClean="0"/>
+              <a:t>15</a:t>
             </a:fld>
             <a:endParaRPr lang="en-CA"/>
           </a:p>
@@ -24262,391 +25070,78 @@
           <a:bodyPr/>
           <a:lstStyle/>
           <a:p>
-            <a:pPr marL="0" indent="0">
-              <a:spcBef>
-                <a:spcPts val="0"/>
-              </a:spcBef>
-              <a:buNone/>
-            </a:pPr>
-            <a:r>
-              <a:rPr lang="en-CA" sz="1200" b="0" dirty="0"/>
-              <a:t>Speaking of others, competition benchmarking,</a:t>
-            </a:r>
-          </a:p>
-          <a:p>
-            <a:pPr marL="0" indent="0">
-              <a:spcBef>
-                <a:spcPts val="0"/>
-              </a:spcBef>
-              <a:buNone/>
-            </a:pPr>
-            <a:r>
-              <a:rPr lang="en-CA" sz="1200" b="0" dirty="0"/>
-              <a:t>I have this split into 2 categories:</a:t>
-            </a:r>
-          </a:p>
-          <a:p>
-            <a:pPr marL="0" indent="0">
-              <a:spcBef>
-                <a:spcPts val="0"/>
-              </a:spcBef>
-              <a:buNone/>
-            </a:pPr>
-            <a:r>
-              <a:rPr lang="en-CA" sz="1200" b="0" dirty="0"/>
-              <a:t>1)Who are we learning from, wo are we modelling our solution after?</a:t>
-            </a:r>
-          </a:p>
-          <a:p>
-            <a:pPr marL="0" indent="0">
-              <a:spcBef>
-                <a:spcPts val="0"/>
-              </a:spcBef>
-              <a:buNone/>
-            </a:pPr>
-            <a:r>
-              <a:rPr lang="en-CA" sz="1200" b="0" dirty="0"/>
-              <a:t>        This is not an exhaustive list but includes some excellent examples for us to build on</a:t>
-            </a:r>
-          </a:p>
-          <a:p>
-            <a:pPr marL="0" indent="0">
-              <a:spcBef>
-                <a:spcPts val="0"/>
-              </a:spcBef>
-              <a:buNone/>
-            </a:pPr>
-            <a:endParaRPr lang="en-CA" sz="1200" b="0" dirty="0"/>
-          </a:p>
-          <a:p>
-            <a:pPr marL="0" indent="0">
-              <a:spcBef>
-                <a:spcPts val="0"/>
-              </a:spcBef>
-              <a:buNone/>
-            </a:pPr>
-            <a:r>
-              <a:rPr lang="en-CA" sz="1200" b="0" dirty="0"/>
-              <a:t>2)Who else in Canada is leading ACL Rehabs on a similar scale</a:t>
-            </a:r>
-          </a:p>
-          <a:p>
-            <a:pPr marL="0" indent="0">
-              <a:spcBef>
-                <a:spcPts val="0"/>
-              </a:spcBef>
-              <a:buNone/>
-            </a:pPr>
-            <a:endParaRPr lang="en-CA" sz="1200" b="0" dirty="0"/>
-          </a:p>
-          <a:p>
-            <a:pPr marL="0" indent="0">
-              <a:spcBef>
-                <a:spcPts val="0"/>
-              </a:spcBef>
-              <a:buNone/>
-            </a:pPr>
-            <a:r>
-              <a:rPr lang="en-CA" sz="1200" b="0" dirty="0"/>
-              <a:t>So the question is what makes this solution different than the competition and why would people choose this solution over others.</a:t>
-            </a:r>
-          </a:p>
-          <a:p>
-            <a:pPr marL="0" indent="0">
-              <a:spcBef>
-                <a:spcPts val="0"/>
-              </a:spcBef>
-              <a:buNone/>
-            </a:pPr>
-            <a:endParaRPr lang="en-CA" sz="1200" b="0" dirty="0"/>
-          </a:p>
-          <a:p>
-            <a:pPr marL="0" indent="0">
-              <a:spcBef>
-                <a:spcPts val="0"/>
-              </a:spcBef>
-              <a:buNone/>
-            </a:pPr>
-            <a:r>
-              <a:rPr lang="en-CA" sz="1200" b="0" dirty="0"/>
-              <a:t>So these novel aspects that I mentioned ... these are gaps in current protocols, and my solution is meant to fill these gaps and improve upon each example that you see here</a:t>
-            </a:r>
-          </a:p>
-          <a:p>
-            <a:pPr marL="0" indent="0">
-              <a:spcBef>
-                <a:spcPts val="0"/>
-              </a:spcBef>
-              <a:buNone/>
-            </a:pPr>
-            <a:endParaRPr lang="en-CA" sz="1200" b="1" dirty="0"/>
-          </a:p>
-          <a:p>
-            <a:pPr marL="0" indent="0">
-              <a:spcBef>
-                <a:spcPts val="0"/>
-              </a:spcBef>
-              <a:buNone/>
-            </a:pPr>
-            <a:r>
-              <a:rPr lang="en-CA" sz="1200" b="0" dirty="0"/>
-              <a:t>One way I think of these improvements, is that they are helping us understand not just what needs to be done throughout a </a:t>
-            </a:r>
-            <a:r>
-              <a:rPr lang="en-CA" sz="1200" b="0" dirty="0" err="1"/>
-              <a:t>rehabm</a:t>
-            </a:r>
-            <a:r>
-              <a:rPr lang="en-CA" sz="1200" b="0" dirty="0"/>
-              <a:t> but also how to do it.</a:t>
-            </a:r>
-          </a:p>
-          <a:p>
-            <a:pPr marL="0" indent="0">
-              <a:spcBef>
-                <a:spcPts val="0"/>
-              </a:spcBef>
-              <a:buNone/>
-            </a:pPr>
-            <a:endParaRPr lang="en-CA" sz="1200" b="1" dirty="0"/>
-          </a:p>
-          <a:p>
-            <a:pPr marL="0" indent="0">
-              <a:spcBef>
-                <a:spcPts val="0"/>
-              </a:spcBef>
-              <a:buNone/>
-            </a:pPr>
-            <a:endParaRPr lang="en-CA" sz="1200" b="1" dirty="0"/>
-          </a:p>
-          <a:p>
-            <a:pPr marL="0" indent="0">
-              <a:spcBef>
-                <a:spcPts val="0"/>
-              </a:spcBef>
-              <a:buNone/>
-            </a:pPr>
-            <a:r>
-              <a:rPr lang="en-CA" sz="1200" b="1" dirty="0"/>
-              <a:t>Describe your key differentiators that make your solution different than your competition.</a:t>
-            </a:r>
-          </a:p>
-          <a:p>
-            <a:pPr marL="0" indent="0">
-              <a:spcBef>
-                <a:spcPts val="0"/>
-              </a:spcBef>
-              <a:buNone/>
-            </a:pPr>
-            <a:r>
-              <a:rPr lang="en-CA" sz="1200" dirty="0"/>
-              <a:t>A fully integrated digital tool</a:t>
-            </a:r>
-          </a:p>
-          <a:p>
-            <a:pPr marL="0" indent="0">
-              <a:spcBef>
-                <a:spcPts val="0"/>
-              </a:spcBef>
-              <a:buNone/>
-            </a:pPr>
-            <a:r>
-              <a:rPr lang="en-CA" sz="1200" dirty="0"/>
-              <a:t>“Open Source” …</a:t>
-            </a:r>
-          </a:p>
-          <a:p>
-            <a:pPr marL="0" indent="0">
-              <a:spcBef>
-                <a:spcPts val="0"/>
-              </a:spcBef>
-              <a:buNone/>
-            </a:pPr>
-            <a:endParaRPr lang="en-CA" sz="1200" dirty="0"/>
-          </a:p>
-          <a:p>
-            <a:pPr marL="0" indent="0">
-              <a:spcBef>
-                <a:spcPts val="0"/>
-              </a:spcBef>
-              <a:buNone/>
-            </a:pPr>
-            <a:r>
-              <a:rPr lang="en-CA" sz="1200" b="1" dirty="0"/>
-              <a:t>[KPI: Is your solution unique enough that your target market (customers) will choose your solution over alternatives?] </a:t>
-            </a:r>
-          </a:p>
-          <a:p>
-            <a:pPr marL="0" indent="0">
-              <a:spcBef>
-                <a:spcPts val="0"/>
-              </a:spcBef>
-              <a:buNone/>
-            </a:pPr>
-            <a:r>
-              <a:rPr lang="en-CA" sz="1200" dirty="0"/>
-              <a:t>Yes, possibly.  I could see other Institutes saying, “well this is good, we’ll use the tool”</a:t>
-            </a:r>
-          </a:p>
-          <a:p>
-            <a:pPr marL="0" indent="0">
-              <a:spcBef>
-                <a:spcPts val="0"/>
-              </a:spcBef>
-              <a:buNone/>
-            </a:pPr>
-            <a:r>
-              <a:rPr lang="en-CA" sz="1200" dirty="0"/>
-              <a:t>Also, because it's an online platform, were' not restricted to just Whistler and Victoria</a:t>
-            </a:r>
-          </a:p>
-          <a:p>
-            <a:pPr marL="0" indent="0">
-              <a:spcBef>
-                <a:spcPts val="0"/>
-              </a:spcBef>
-              <a:buNone/>
-            </a:pPr>
-            <a:endParaRPr lang="en-CA" sz="1200" b="1" i="1" dirty="0">
-              <a:solidFill>
-                <a:srgbClr val="002060"/>
-              </a:solidFill>
-            </a:endParaRPr>
-          </a:p>
-          <a:p>
-            <a:pPr marL="0" indent="0">
-              <a:spcBef>
-                <a:spcPts val="0"/>
-              </a:spcBef>
-              <a:buNone/>
-            </a:pPr>
-            <a:endParaRPr lang="en-CA" sz="1200" b="1" i="1" dirty="0">
-              <a:solidFill>
-                <a:srgbClr val="002060"/>
-              </a:solidFill>
-            </a:endParaRPr>
+            <a:r>
+              <a:rPr lang="en-US" dirty="0"/>
+              <a:t>We are already doing this work, and we are not collecting revenue for it.</a:t>
+            </a:r>
           </a:p>
           <a:p>
             <a:endParaRPr lang="en-US" dirty="0"/>
           </a:p>
           <a:p>
+            <a:r>
+              <a:rPr lang="en-US" dirty="0"/>
+              <a:t>Service agreements with our sport partners must include clear plans outlining the services delivered in the event of injury, and the mechanisms through which those services will be compensated.  </a:t>
+            </a:r>
+          </a:p>
+          <a:p>
             <a:endParaRPr lang="en-US" dirty="0"/>
           </a:p>
           <a:p>
+            <a:r>
+              <a:rPr lang="en-US" dirty="0"/>
+              <a:t>Now that we have a formalized system in place, we have something tangible to bring to those discussions.  We can clearly show our partners how we will deliver an extremely high level of service and we can structure agreements to create fair and sustainable value for </a:t>
+            </a:r>
+            <a:r>
+              <a:rPr lang="en-US"/>
+              <a:t>everyone involved.</a:t>
+            </a:r>
             <a:endParaRPr lang="en-US" dirty="0"/>
           </a:p>
           <a:p>
+            <a:endParaRPr lang="en-US" dirty="0"/>
+          </a:p>
+          <a:p>
+            <a:endParaRPr lang="en-US" dirty="0"/>
+          </a:p>
+          <a:p>
+            <a:endParaRPr lang="en-US" dirty="0"/>
+          </a:p>
+          <a:p>
+            <a:endParaRPr lang="en-US" dirty="0"/>
+          </a:p>
+          <a:p>
+            <a:endParaRPr lang="en-US" dirty="0"/>
+          </a:p>
+          <a:p>
+            <a:endParaRPr lang="en-US" dirty="0"/>
+          </a:p>
+          <a:p>
             <a:r>
               <a:rPr lang="en-US" dirty="0"/>
-              <a:t>Competition:</a:t>
-            </a:r>
+              <a:t>Could this be an initiative that doesn’t flow through the NSOs?  Can this be something that is funded directly by OTP or something else, and then provides amazing value to the NSOs?</a:t>
+            </a:r>
+          </a:p>
+          <a:p>
+            <a:endParaRPr lang="en-US" dirty="0"/>
+          </a:p>
+          <a:p>
+            <a:endParaRPr lang="en-US" dirty="0"/>
+          </a:p>
+          <a:p>
+            <a:endParaRPr lang="en-US" dirty="0"/>
+          </a:p>
+          <a:p>
+            <a:endParaRPr lang="en-US" dirty="0"/>
+          </a:p>
+          <a:p>
+            <a:endParaRPr lang="en-US" dirty="0"/>
           </a:p>
           <a:p>
             <a:r>
               <a:rPr lang="en-US" dirty="0"/>
-              <a:t>-CSI Calgary (collaborate)</a:t>
-            </a:r>
-          </a:p>
-          <a:p>
-            <a:r>
-              <a:rPr lang="en-US" dirty="0"/>
-              <a:t>-Private</a:t>
-            </a:r>
-          </a:p>
-          <a:p>
-            <a:r>
-              <a:rPr lang="en-US" dirty="0"/>
-              <a:t>-</a:t>
-            </a:r>
-            <a:r>
-              <a:rPr lang="en-US" dirty="0" err="1"/>
-              <a:t>Fortius</a:t>
-            </a:r>
-            <a:r>
-              <a:rPr lang="en-US" dirty="0"/>
-              <a:t> (n/a)</a:t>
-            </a:r>
-          </a:p>
-          <a:p>
-            <a:endParaRPr lang="en-US" dirty="0"/>
-          </a:p>
-          <a:p>
-            <a:endParaRPr lang="en-US" dirty="0"/>
-          </a:p>
-          <a:p>
-            <a:r>
-              <a:rPr lang="en-US" dirty="0"/>
-              <a:t>World Leading Examples:</a:t>
-            </a:r>
-          </a:p>
-          <a:p>
-            <a:r>
-              <a:rPr lang="en-US" dirty="0"/>
-              <a:t>(and one thing they do best that we can learn from)</a:t>
-            </a:r>
-          </a:p>
-          <a:p>
-            <a:r>
-              <a:rPr lang="en-US" dirty="0"/>
-              <a:t>-</a:t>
-            </a:r>
-            <a:r>
-              <a:rPr lang="en-CA" sz="1200" kern="1200" dirty="0">
-                <a:solidFill>
-                  <a:schemeClr val="tx1"/>
-                </a:solidFill>
-                <a:effectLst/>
-                <a:latin typeface="+mn-lt"/>
-                <a:ea typeface="+mn-ea"/>
-                <a:cs typeface="+mn-cs"/>
-              </a:rPr>
-              <a:t>United States Ski and Snowboard</a:t>
-            </a:r>
-          </a:p>
-          <a:p>
-            <a:r>
-              <a:rPr lang="en-CA" sz="1200" kern="1200" dirty="0">
-                <a:solidFill>
-                  <a:schemeClr val="tx1"/>
-                </a:solidFill>
-                <a:effectLst/>
-                <a:latin typeface="+mn-lt"/>
-                <a:ea typeface="+mn-ea"/>
-                <a:cs typeface="+mn-cs"/>
-              </a:rPr>
-              <a:t>-SPARC Sports Physiotherapy &amp; Athletic Rehabilitation Clinic – Ireland, Enda King</a:t>
-            </a:r>
-          </a:p>
-          <a:p>
-            <a:r>
-              <a:rPr lang="en-CA" sz="1200" kern="1200" dirty="0">
-                <a:solidFill>
-                  <a:schemeClr val="tx1"/>
-                </a:solidFill>
-                <a:effectLst/>
-                <a:latin typeface="+mn-lt"/>
-                <a:ea typeface="+mn-ea"/>
-                <a:cs typeface="+mn-cs"/>
-              </a:rPr>
-              <a:t>-OTP Return to Health and Performance ‘Think Tank’</a:t>
-            </a:r>
-          </a:p>
-          <a:p>
-            <a:endParaRPr lang="en-CA" sz="1200" kern="1200" dirty="0">
-              <a:solidFill>
-                <a:schemeClr val="tx1"/>
-              </a:solidFill>
-              <a:effectLst/>
-              <a:latin typeface="+mn-lt"/>
-              <a:ea typeface="+mn-ea"/>
-              <a:cs typeface="+mn-cs"/>
-            </a:endParaRPr>
-          </a:p>
-          <a:p>
-            <a:endParaRPr lang="en-US" dirty="0"/>
-          </a:p>
-          <a:p>
-            <a:endParaRPr lang="en-US" dirty="0"/>
+              <a:t>I would submit the idea that we do not have a revenue generation problem, we have a revenue collection problem.</a:t>
+            </a:r>
           </a:p>
         </p:txBody>
       </p:sp>
@@ -24667,7 +25162,7 @@
           <a:p>
             <a:fld id="{EAF9EB4E-D50A-4CF1-9B06-457599E410FB}" type="slidenum">
               <a:rPr lang="en-CA" smtClean="0"/>
-              <a:t>6</a:t>
+              <a:t>7</a:t>
             </a:fld>
             <a:endParaRPr lang="en-CA"/>
           </a:p>
@@ -24676,7 +25171,7 @@
     </p:spTree>
     <p:extLst>
       <p:ext uri="{BB962C8B-B14F-4D97-AF65-F5344CB8AC3E}">
-        <p14:creationId xmlns:p14="http://schemas.microsoft.com/office/powerpoint/2010/main" val="3664131730"/>
+        <p14:creationId xmlns:p14="http://schemas.microsoft.com/office/powerpoint/2010/main" val="2157803353"/>
       </p:ext>
     </p:extLst>
   </p:cSld>
@@ -24737,141 +25232,369 @@
               <a:buNone/>
             </a:pPr>
             <a:r>
-              <a:rPr lang="en-CA" sz="1200" b="1" dirty="0"/>
-              <a:t>Who does this problem focus on?  </a:t>
-            </a:r>
-          </a:p>
-          <a:p>
-            <a:pPr marL="0" marR="0" lvl="0" indent="0" algn="l" defTabSz="914400" rtl="0" eaLnBrk="1" fontAlgn="auto" latinLnBrk="0" hangingPunct="1">
-              <a:lnSpc>
-                <a:spcPct val="100000"/>
-              </a:lnSpc>
+              <a:rPr lang="en-CA" sz="1200" b="0" dirty="0"/>
+              <a:t>Speaking of others, competition benchmarking,</a:t>
+            </a:r>
+          </a:p>
+          <a:p>
+            <a:pPr marL="0" indent="0">
               <a:spcBef>
                 <a:spcPts val="0"/>
               </a:spcBef>
-              <a:spcAft>
-                <a:spcPts val="0"/>
-              </a:spcAft>
-              <a:buClrTx/>
-              <a:buSzTx/>
-              <a:buFontTx/>
               <a:buNone/>
-              <a:tabLst/>
-              <a:defRPr/>
             </a:pPr>
             <a:r>
-              <a:rPr lang="en-US" dirty="0"/>
-              <a:t>My proposal is to start with a protocol for able bodied elite athletes.  This allows us to target a big piece of our core business, then the protocol can be scaled and adapted to support other partners and other markets.</a:t>
-            </a:r>
-          </a:p>
-          <a:p>
-            <a:pPr marL="0" marR="0" lvl="0" indent="0" algn="l" defTabSz="914400" rtl="0" eaLnBrk="1" fontAlgn="auto" latinLnBrk="0" hangingPunct="1">
-              <a:lnSpc>
-                <a:spcPct val="100000"/>
-              </a:lnSpc>
+              <a:rPr lang="en-CA" sz="1200" b="0" dirty="0"/>
+              <a:t>I have this split into 2 categories:</a:t>
+            </a:r>
+          </a:p>
+          <a:p>
+            <a:pPr marL="0" indent="0">
               <a:spcBef>
                 <a:spcPts val="0"/>
               </a:spcBef>
-              <a:spcAft>
-                <a:spcPts val="0"/>
-              </a:spcAft>
-              <a:buClrTx/>
-              <a:buSzTx/>
-              <a:buFontTx/>
               <a:buNone/>
-              <a:tabLst/>
-              <a:defRPr/>
             </a:pPr>
-            <a:endParaRPr lang="en-US" dirty="0"/>
-          </a:p>
-          <a:p>
-            <a:r>
-              <a:rPr lang="en-US" dirty="0"/>
-              <a:t>So below on the left I've got 3 markets we already service.</a:t>
-            </a:r>
-          </a:p>
-          <a:p>
-            <a:r>
-              <a:rPr lang="en-US" dirty="0"/>
-              <a:t>And in bold, 3 markets which I believe this protocol could open up for us.</a:t>
-            </a:r>
-          </a:p>
-          <a:p>
-            <a:endParaRPr lang="en-US" dirty="0"/>
-          </a:p>
-          <a:p>
-            <a:r>
-              <a:rPr lang="en-US" dirty="0"/>
-              <a:t>One thing specifically that I'd like to talk more about afterwards is the potential to service local and remote PN clients.</a:t>
-            </a:r>
-          </a:p>
-          <a:p>
-            <a:endParaRPr lang="en-US" dirty="0"/>
-          </a:p>
-          <a:p>
-            <a:endParaRPr lang="en-US" dirty="0"/>
-          </a:p>
-          <a:p>
-            <a:endParaRPr lang="en-US" dirty="0"/>
-          </a:p>
-          <a:p>
-            <a:endParaRPr lang="en-US" dirty="0"/>
-          </a:p>
-          <a:p>
-            <a:endParaRPr lang="en-US" dirty="0"/>
-          </a:p>
-          <a:p>
-            <a:endParaRPr lang="en-US" dirty="0"/>
-          </a:p>
-          <a:p>
-            <a:endParaRPr lang="en-US" dirty="0"/>
-          </a:p>
-          <a:p>
-            <a:endParaRPr lang="en-US" dirty="0"/>
-          </a:p>
-          <a:p>
-            <a:endParaRPr lang="en-US" dirty="0"/>
-          </a:p>
-          <a:p>
-            <a:r>
-              <a:rPr lang="en-US" dirty="0"/>
-              <a:t>Hierarchy:</a:t>
-            </a:r>
-          </a:p>
-          <a:p>
-            <a:r>
-              <a:rPr lang="en-US" dirty="0"/>
-              <a:t>NSO athletes is supposed to be our core business, this is at the top of the hierarchy, but it is also the smallest “market”.  Build the one big thing, targeted towards one specific pillar of our core business, then it can easily be scaled and adapted to these other markets</a:t>
-            </a:r>
-          </a:p>
-          <a:p>
-            <a:endParaRPr lang="en-US" dirty="0"/>
-          </a:p>
-          <a:p>
-            <a:endParaRPr lang="en-US" dirty="0"/>
-          </a:p>
-          <a:p>
-            <a:pPr marL="0" marR="0" lvl="0" indent="0" algn="l" defTabSz="914400" rtl="0" eaLnBrk="1" fontAlgn="auto" latinLnBrk="0" hangingPunct="1">
-              <a:lnSpc>
-                <a:spcPct val="100000"/>
-              </a:lnSpc>
+            <a:r>
+              <a:rPr lang="en-CA" sz="1200" b="0" dirty="0"/>
+              <a:t>1)Who are we learning from, wo are we modelling our solution after?</a:t>
+            </a:r>
+          </a:p>
+          <a:p>
+            <a:pPr marL="0" indent="0">
               <a:spcBef>
                 <a:spcPts val="0"/>
               </a:spcBef>
-              <a:spcAft>
+              <a:buNone/>
+            </a:pPr>
+            <a:r>
+              <a:rPr lang="en-CA" sz="1200" b="0" dirty="0"/>
+              <a:t>        This is not an exhaustive list but includes some excellent examples for us to build on</a:t>
+            </a:r>
+          </a:p>
+          <a:p>
+            <a:pPr marL="0" indent="0">
+              <a:spcBef>
                 <a:spcPts val="0"/>
-              </a:spcAft>
-              <a:buClrTx/>
-              <a:buSzTx/>
-              <a:buFontTx/>
+              </a:spcBef>
               <a:buNone/>
-              <a:tabLst/>
-              <a:defRPr/>
             </a:pPr>
+            <a:endParaRPr lang="en-CA" sz="1200" b="0" dirty="0"/>
+          </a:p>
+          <a:p>
+            <a:pPr marL="0" indent="0">
+              <a:spcBef>
+                <a:spcPts val="0"/>
+              </a:spcBef>
+              <a:buNone/>
+            </a:pPr>
+            <a:r>
+              <a:rPr lang="en-CA" sz="1200" b="0" dirty="0"/>
+              <a:t>2)Who else in Canada is leading ACL Rehabs on a similar scale</a:t>
+            </a:r>
+          </a:p>
+          <a:p>
+            <a:pPr marL="0" indent="0">
+              <a:spcBef>
+                <a:spcPts val="0"/>
+              </a:spcBef>
+              <a:buNone/>
+            </a:pPr>
+            <a:endParaRPr lang="en-CA" sz="1200" b="0" dirty="0"/>
+          </a:p>
+          <a:p>
+            <a:pPr marL="0" indent="0">
+              <a:spcBef>
+                <a:spcPts val="0"/>
+              </a:spcBef>
+              <a:buNone/>
+            </a:pPr>
+            <a:r>
+              <a:rPr lang="en-CA" sz="1200" b="0" dirty="0"/>
+              <a:t>So the question is what makes this solution different than the competition and why would people choose this solution over others.</a:t>
+            </a:r>
+          </a:p>
+          <a:p>
+            <a:pPr marL="0" indent="0">
+              <a:spcBef>
+                <a:spcPts val="0"/>
+              </a:spcBef>
+              <a:buNone/>
+            </a:pPr>
+            <a:endParaRPr lang="en-CA" sz="1200" b="0" dirty="0"/>
+          </a:p>
+          <a:p>
+            <a:pPr marL="0" indent="0">
+              <a:spcBef>
+                <a:spcPts val="0"/>
+              </a:spcBef>
+              <a:buNone/>
+            </a:pPr>
+            <a:r>
+              <a:rPr lang="en-CA" sz="1200" b="0" dirty="0"/>
+              <a:t>So these novel aspects that I mentioned ... these are gaps in current protocols, and my solution is meant to fill these gaps and improve upon each example that you see here</a:t>
+            </a:r>
+          </a:p>
+          <a:p>
+            <a:pPr marL="0" indent="0">
+              <a:spcBef>
+                <a:spcPts val="0"/>
+              </a:spcBef>
+              <a:buNone/>
+            </a:pPr>
+            <a:endParaRPr lang="en-CA" sz="1200" b="1" dirty="0"/>
+          </a:p>
+          <a:p>
+            <a:pPr marL="0" indent="0">
+              <a:spcBef>
+                <a:spcPts val="0"/>
+              </a:spcBef>
+              <a:buNone/>
+            </a:pPr>
+            <a:r>
+              <a:rPr lang="en-CA" sz="1200" b="0" dirty="0"/>
+              <a:t>One way I think of these improvements, is that they are helping us understand not just what needs to be done throughout a </a:t>
+            </a:r>
+            <a:r>
+              <a:rPr lang="en-CA" sz="1200" b="0" dirty="0" err="1"/>
+              <a:t>rehabm</a:t>
+            </a:r>
+            <a:r>
+              <a:rPr lang="en-CA" sz="1200" b="0" dirty="0"/>
+              <a:t> but also how to do it.</a:t>
+            </a:r>
+          </a:p>
+          <a:p>
+            <a:pPr marL="0" indent="0">
+              <a:spcBef>
+                <a:spcPts val="0"/>
+              </a:spcBef>
+              <a:buNone/>
+            </a:pPr>
+            <a:endParaRPr lang="en-CA" sz="1200" b="1" dirty="0"/>
+          </a:p>
+          <a:p>
+            <a:pPr marL="0" indent="0">
+              <a:spcBef>
+                <a:spcPts val="0"/>
+              </a:spcBef>
+              <a:buNone/>
+            </a:pPr>
+            <a:endParaRPr lang="en-CA" sz="1200" b="1" dirty="0"/>
+          </a:p>
+          <a:p>
+            <a:pPr marL="0" indent="0">
+              <a:spcBef>
+                <a:spcPts val="0"/>
+              </a:spcBef>
+              <a:buNone/>
+            </a:pPr>
             <a:r>
               <a:rPr lang="en-CA" sz="1200" b="1" dirty="0"/>
-              <a:t>Can you get any sense of projected number of client/customers that might be interested in this solution? </a:t>
-            </a:r>
+              <a:t>Describe your key differentiators that make your solution different than your competition.</a:t>
+            </a:r>
+          </a:p>
+          <a:p>
+            <a:pPr marL="0" indent="0">
+              <a:spcBef>
+                <a:spcPts val="0"/>
+              </a:spcBef>
+              <a:buNone/>
+            </a:pPr>
+            <a:r>
+              <a:rPr lang="en-CA" sz="1200" dirty="0"/>
+              <a:t>A fully integrated digital tool</a:t>
+            </a:r>
+          </a:p>
+          <a:p>
+            <a:pPr marL="0" indent="0">
+              <a:spcBef>
+                <a:spcPts val="0"/>
+              </a:spcBef>
+              <a:buNone/>
+            </a:pPr>
+            <a:r>
+              <a:rPr lang="en-CA" sz="1200" dirty="0"/>
+              <a:t>“Open Source” …</a:t>
+            </a:r>
+          </a:p>
+          <a:p>
+            <a:pPr marL="0" indent="0">
+              <a:spcBef>
+                <a:spcPts val="0"/>
+              </a:spcBef>
+              <a:buNone/>
+            </a:pPr>
+            <a:endParaRPr lang="en-CA" sz="1200" dirty="0"/>
+          </a:p>
+          <a:p>
+            <a:pPr marL="0" indent="0">
+              <a:spcBef>
+                <a:spcPts val="0"/>
+              </a:spcBef>
+              <a:buNone/>
+            </a:pPr>
+            <a:r>
+              <a:rPr lang="en-CA" sz="1200" b="1" dirty="0"/>
+              <a:t>[KPI: Is your solution unique enough that your target market (customers) will choose your solution over alternatives?] </a:t>
+            </a:r>
+          </a:p>
+          <a:p>
+            <a:pPr marL="0" indent="0">
+              <a:spcBef>
+                <a:spcPts val="0"/>
+              </a:spcBef>
+              <a:buNone/>
+            </a:pPr>
+            <a:r>
+              <a:rPr lang="en-CA" sz="1200" dirty="0"/>
+              <a:t>Yes, possibly.  I could see other Institutes saying, “well this is good, we’ll use the tool”</a:t>
+            </a:r>
+          </a:p>
+          <a:p>
+            <a:pPr marL="0" indent="0">
+              <a:spcBef>
+                <a:spcPts val="0"/>
+              </a:spcBef>
+              <a:buNone/>
+            </a:pPr>
+            <a:r>
+              <a:rPr lang="en-CA" sz="1200" dirty="0"/>
+              <a:t>Also, because it's an online platform, were' not restricted to just Whistler and Victoria</a:t>
+            </a:r>
+          </a:p>
+          <a:p>
+            <a:pPr marL="0" indent="0">
+              <a:spcBef>
+                <a:spcPts val="0"/>
+              </a:spcBef>
+              <a:buNone/>
+            </a:pPr>
+            <a:endParaRPr lang="en-CA" sz="1200" b="1" i="1" dirty="0">
+              <a:solidFill>
+                <a:srgbClr val="002060"/>
+              </a:solidFill>
+            </a:endParaRPr>
+          </a:p>
+          <a:p>
+            <a:pPr marL="0" indent="0">
+              <a:spcBef>
+                <a:spcPts val="0"/>
+              </a:spcBef>
+              <a:buNone/>
+            </a:pPr>
+            <a:endParaRPr lang="en-CA" sz="1200" b="1" i="1" dirty="0">
+              <a:solidFill>
+                <a:srgbClr val="002060"/>
+              </a:solidFill>
+            </a:endParaRPr>
+          </a:p>
+          <a:p>
+            <a:endParaRPr lang="en-US" dirty="0"/>
+          </a:p>
+          <a:p>
+            <a:endParaRPr lang="en-US" dirty="0"/>
+          </a:p>
+          <a:p>
+            <a:endParaRPr lang="en-US" dirty="0"/>
+          </a:p>
+          <a:p>
+            <a:r>
+              <a:rPr lang="en-US" dirty="0"/>
+              <a:t>Competition:</a:t>
+            </a:r>
+          </a:p>
+          <a:p>
+            <a:r>
+              <a:rPr lang="en-US" dirty="0"/>
+              <a:t>-CSI Calgary (collaborate)</a:t>
+            </a:r>
+          </a:p>
+          <a:p>
+            <a:r>
+              <a:rPr lang="en-US" dirty="0"/>
+              <a:t>-Private</a:t>
+            </a:r>
+          </a:p>
+          <a:p>
+            <a:r>
+              <a:rPr lang="en-US" dirty="0"/>
+              <a:t>-</a:t>
+            </a:r>
+            <a:r>
+              <a:rPr lang="en-US" dirty="0" err="1"/>
+              <a:t>Fortius</a:t>
+            </a:r>
+            <a:r>
+              <a:rPr lang="en-US" dirty="0"/>
+              <a:t> (n/a)</a:t>
+            </a:r>
+          </a:p>
+          <a:p>
+            <a:endParaRPr lang="en-US" dirty="0"/>
+          </a:p>
+          <a:p>
+            <a:endParaRPr lang="en-US" dirty="0"/>
+          </a:p>
+          <a:p>
+            <a:r>
+              <a:rPr lang="en-US" dirty="0"/>
+              <a:t>World Leading Examples:</a:t>
+            </a:r>
+          </a:p>
+          <a:p>
+            <a:r>
+              <a:rPr lang="en-US" dirty="0"/>
+              <a:t>(and one thing they do best that we can learn from)</a:t>
+            </a:r>
+          </a:p>
+          <a:p>
+            <a:r>
+              <a:rPr lang="en-US" dirty="0"/>
+              <a:t>-</a:t>
+            </a:r>
+            <a:r>
+              <a:rPr lang="en-CA" sz="1200" kern="1200" dirty="0">
+                <a:solidFill>
+                  <a:schemeClr val="tx1"/>
+                </a:solidFill>
+                <a:effectLst/>
+                <a:latin typeface="+mn-lt"/>
+                <a:ea typeface="+mn-ea"/>
+                <a:cs typeface="+mn-cs"/>
+              </a:rPr>
+              <a:t>United States Ski and Snowboard</a:t>
+            </a:r>
+          </a:p>
+          <a:p>
+            <a:r>
+              <a:rPr lang="en-CA" sz="1200" kern="1200" dirty="0">
+                <a:solidFill>
+                  <a:schemeClr val="tx1"/>
+                </a:solidFill>
+                <a:effectLst/>
+                <a:latin typeface="+mn-lt"/>
+                <a:ea typeface="+mn-ea"/>
+                <a:cs typeface="+mn-cs"/>
+              </a:rPr>
+              <a:t>-SPARC Sports Physiotherapy &amp; Athletic Rehabilitation Clinic – Ireland, Enda King</a:t>
+            </a:r>
+          </a:p>
+          <a:p>
+            <a:r>
+              <a:rPr lang="en-CA" sz="1200" kern="1200" dirty="0">
+                <a:solidFill>
+                  <a:schemeClr val="tx1"/>
+                </a:solidFill>
+                <a:effectLst/>
+                <a:latin typeface="+mn-lt"/>
+                <a:ea typeface="+mn-ea"/>
+                <a:cs typeface="+mn-cs"/>
+              </a:rPr>
+              <a:t>-OTP Return to Health and Performance ‘Think Tank’</a:t>
+            </a:r>
+          </a:p>
+          <a:p>
             <a:endParaRPr lang="en-CA" sz="1200" kern="1200" dirty="0">
               <a:solidFill>
                 <a:schemeClr val="tx1"/>
@@ -24883,100 +25606,40 @@
             </a:endParaRPr>
           </a:p>
           <a:p>
-            <a:r>
-              <a:rPr lang="en-CA" sz="1200" kern="1200" dirty="0">
-                <a:solidFill>
-                  <a:schemeClr val="tx1"/>
-                </a:solidFill>
-                <a:effectLst/>
-                <a:latin typeface="+mn-lt"/>
-                <a:ea typeface="+mn-ea"/>
-                <a:cs typeface="+mn-cs"/>
-              </a:rPr>
-              <a:t>-</a:t>
-            </a:r>
-            <a:r>
-              <a:rPr lang="en-US" sz="1200" kern="1200" dirty="0">
-                <a:solidFill>
-                  <a:schemeClr val="tx1"/>
-                </a:solidFill>
-                <a:effectLst/>
-                <a:latin typeface="+mn-lt"/>
-                <a:ea typeface="+mn-ea"/>
-                <a:cs typeface="+mn-cs"/>
-              </a:rPr>
-              <a:t>research has shown that the risk of injury and the frequency of severe injuries in freestyle skiing are high.  A retrospective study of all freestyle ski disciplines during the three World Cup seasons between 2006-2009 estimated a 44.0% (95%CI: 38.9 – 49.0%) incidence of injury each season and a 31.9% (95%CI: 27.6 – 36.2%) incidence of time-loss (≥ 1 day) injury across all competitors (</a:t>
-            </a:r>
-            <a:r>
-              <a:rPr lang="en-US" sz="1200" kern="1200" dirty="0" err="1">
-                <a:solidFill>
-                  <a:schemeClr val="tx1"/>
-                </a:solidFill>
-                <a:effectLst/>
-                <a:latin typeface="+mn-lt"/>
-                <a:ea typeface="+mn-ea"/>
-                <a:cs typeface="+mn-cs"/>
-              </a:rPr>
-              <a:t>Flørenes</a:t>
-            </a:r>
-            <a:r>
-              <a:rPr lang="en-US" sz="1200" kern="1200" dirty="0">
-                <a:solidFill>
-                  <a:schemeClr val="tx1"/>
-                </a:solidFill>
-                <a:effectLst/>
-                <a:latin typeface="+mn-lt"/>
-                <a:ea typeface="+mn-ea"/>
-                <a:cs typeface="+mn-cs"/>
-              </a:rPr>
-              <a:t> et al., 2010).  Alarmingly, severe injuries leading to time loss from training and competition of greater than 28 days were the most frequent type of injury, which is in contrast to most other sports, where severe injuries are the least frequent.  Other research found that 47% of the 95 competitors at the 2001 FIS Freestyle World Championship had experienced at least one major knee injury (&gt;20 days lost) and 26% had suffered at least one previous ACL injury (Heir et al., 2003). </a:t>
-            </a:r>
-          </a:p>
-          <a:p>
-            <a:endParaRPr lang="en-US" sz="1200" kern="1200" dirty="0">
-              <a:solidFill>
-                <a:schemeClr val="tx1"/>
-              </a:solidFill>
-              <a:effectLst/>
-              <a:latin typeface="+mn-lt"/>
-              <a:ea typeface="+mn-ea"/>
-              <a:cs typeface="+mn-cs"/>
-            </a:endParaRPr>
-          </a:p>
-          <a:p>
-            <a:r>
-              <a:rPr lang="en-CA" sz="1200" kern="1200" dirty="0">
-                <a:solidFill>
-                  <a:schemeClr val="tx1"/>
-                </a:solidFill>
-                <a:effectLst/>
-                <a:latin typeface="+mn-lt"/>
-                <a:ea typeface="+mn-ea"/>
-                <a:cs typeface="+mn-cs"/>
-              </a:rPr>
-              <a:t>Back In Action Physiotherapy alone reports treating 320 different patients with knee injuries annually</a:t>
-            </a:r>
-          </a:p>
-          <a:p>
-            <a:endParaRPr lang="en-CA" sz="1200" kern="1200" dirty="0">
-              <a:solidFill>
-                <a:schemeClr val="tx1"/>
-              </a:solidFill>
-              <a:effectLst/>
-              <a:latin typeface="+mn-lt"/>
-              <a:ea typeface="+mn-ea"/>
-              <a:cs typeface="+mn-cs"/>
-            </a:endParaRPr>
-          </a:p>
-          <a:p>
             <a:endParaRPr lang="en-US" dirty="0"/>
+          </a:p>
+          <a:p>
+            <a:endParaRPr lang="en-US" dirty="0"/>
+          </a:p>
+        </p:txBody>
+      </p:sp>
+      <p:sp>
+        <p:nvSpPr>
+          <p:cNvPr id="4" name="Slide Number Placeholder 3"/>
+          <p:cNvSpPr>
+            <a:spLocks noGrp="1"/>
+          </p:cNvSpPr>
+          <p:nvPr>
+            <p:ph type="sldNum" sz="quarter" idx="5"/>
+          </p:nvPr>
+        </p:nvSpPr>
+        <p:spPr/>
+        <p:txBody>
+          <a:bodyPr/>
+          <a:lstStyle/>
+          <a:p>
+            <a:fld id="{EAF9EB4E-D50A-4CF1-9B06-457599E410FB}" type="slidenum">
+              <a:rPr lang="en-CA" smtClean="0"/>
+              <a:t>8</a:t>
+            </a:fld>
+            <a:endParaRPr lang="en-CA"/>
           </a:p>
         </p:txBody>
       </p:sp>
     </p:spTree>
     <p:extLst>
       <p:ext uri="{BB962C8B-B14F-4D97-AF65-F5344CB8AC3E}">
-        <p14:creationId xmlns:p14="http://schemas.microsoft.com/office/powerpoint/2010/main" val="250508036"/>
+        <p14:creationId xmlns:p14="http://schemas.microsoft.com/office/powerpoint/2010/main" val="3664131730"/>
       </p:ext>
     </p:extLst>
   </p:cSld>
@@ -25037,41 +25700,8 @@
               <a:buNone/>
             </a:pPr>
             <a:r>
-              <a:rPr lang="en-CA" sz="1200" dirty="0"/>
-              <a:t>The role’s already been created, I’m already working on the protocol, </a:t>
-            </a:r>
-          </a:p>
-          <a:p>
-            <a:pPr marL="0" indent="0">
-              <a:spcBef>
-                <a:spcPts val="0"/>
-              </a:spcBef>
-              <a:buNone/>
-            </a:pPr>
-            <a:r>
-              <a:rPr lang="en-CA" sz="1200" dirty="0"/>
-              <a:t>so hopefully I don’t have to talk much about myself at the moment</a:t>
-            </a:r>
-          </a:p>
-          <a:p>
-            <a:pPr marL="0" indent="0">
-              <a:spcBef>
-                <a:spcPts val="0"/>
-              </a:spcBef>
-              <a:buNone/>
-            </a:pPr>
-            <a:endParaRPr lang="en-CA" sz="1200" dirty="0"/>
-          </a:p>
-          <a:p>
-            <a:pPr marL="0" indent="0">
-              <a:spcBef>
-                <a:spcPts val="0"/>
-              </a:spcBef>
-              <a:buNone/>
-            </a:pPr>
-            <a:r>
-              <a:rPr lang="en-CA" sz="1200" dirty="0"/>
-              <a:t>What I would say,</a:t>
+              <a:rPr lang="en-CA" sz="1200" b="1" dirty="0"/>
+              <a:t>Who does this problem focus on?  </a:t>
             </a:r>
           </a:p>
           <a:p>
@@ -25093,292 +25723,223 @@
               <a:defRPr/>
             </a:pPr>
             <a:r>
-              <a:rPr lang="en-CA" sz="1200" b="0" i="0" dirty="0">
-                <a:solidFill>
-                  <a:srgbClr val="002060"/>
-                </a:solidFill>
-              </a:rPr>
-              <a:t>Part of my proposal is to keep the working group very small at the start and to expand out as needed.  I think Craig is an integral part of this project given his experience specifically leading rehabilitations. And also, really grateful to have the support of Marc in this with his vision for what this could be and obviously all the technical expertise that he brings.</a:t>
-            </a:r>
-          </a:p>
-          <a:p>
-            <a:pPr marL="0" indent="0">
+              <a:rPr lang="en-US" dirty="0"/>
+              <a:t>My proposal is to start with a protocol for able bodied elite athletes.  This allows us to target a big piece of our core business, then the protocol can be scaled and adapted to support other partners and other markets.</a:t>
+            </a:r>
+          </a:p>
+          <a:p>
+            <a:pPr marL="0" marR="0" lvl="0" indent="0" algn="l" defTabSz="914400" rtl="0" eaLnBrk="1" fontAlgn="auto" latinLnBrk="0" hangingPunct="1">
+              <a:lnSpc>
+                <a:spcPct val="100000"/>
+              </a:lnSpc>
               <a:spcBef>
                 <a:spcPts val="0"/>
               </a:spcBef>
+              <a:spcAft>
+                <a:spcPts val="0"/>
+              </a:spcAft>
+              <a:buClrTx/>
+              <a:buSzTx/>
+              <a:buFontTx/>
               <a:buNone/>
+              <a:tabLst/>
+              <a:defRPr/>
             </a:pPr>
-            <a:endParaRPr lang="en-CA" sz="1200" dirty="0"/>
-          </a:p>
-          <a:p>
-            <a:pPr marL="0" indent="0">
+            <a:endParaRPr lang="en-US" dirty="0"/>
+          </a:p>
+          <a:p>
+            <a:r>
+              <a:rPr lang="en-US" dirty="0"/>
+              <a:t>So below on the left I've got 3 markets we already service.</a:t>
+            </a:r>
+          </a:p>
+          <a:p>
+            <a:r>
+              <a:rPr lang="en-US" dirty="0"/>
+              <a:t>And in bold, 3 markets which I believe this protocol could open up for us.</a:t>
+            </a:r>
+          </a:p>
+          <a:p>
+            <a:endParaRPr lang="en-US" dirty="0"/>
+          </a:p>
+          <a:p>
+            <a:r>
+              <a:rPr lang="en-US" dirty="0"/>
+              <a:t>One thing specifically that I'd like to talk more about afterwards is the potential to service local and remote PN clients.</a:t>
+            </a:r>
+          </a:p>
+          <a:p>
+            <a:endParaRPr lang="en-US" dirty="0"/>
+          </a:p>
+          <a:p>
+            <a:endParaRPr lang="en-US" dirty="0"/>
+          </a:p>
+          <a:p>
+            <a:endParaRPr lang="en-US" dirty="0"/>
+          </a:p>
+          <a:p>
+            <a:endParaRPr lang="en-US" dirty="0"/>
+          </a:p>
+          <a:p>
+            <a:endParaRPr lang="en-US" dirty="0"/>
+          </a:p>
+          <a:p>
+            <a:endParaRPr lang="en-US" dirty="0"/>
+          </a:p>
+          <a:p>
+            <a:endParaRPr lang="en-US" dirty="0"/>
+          </a:p>
+          <a:p>
+            <a:endParaRPr lang="en-US" dirty="0"/>
+          </a:p>
+          <a:p>
+            <a:endParaRPr lang="en-US" dirty="0"/>
+          </a:p>
+          <a:p>
+            <a:r>
+              <a:rPr lang="en-US" dirty="0"/>
+              <a:t>Hierarchy:</a:t>
+            </a:r>
+          </a:p>
+          <a:p>
+            <a:r>
+              <a:rPr lang="en-US" dirty="0"/>
+              <a:t>NSO athletes is supposed to be our core business, this is at the top of the hierarchy, but it is also the smallest “market”.  Build the one big thing, targeted towards one specific pillar of our core business, then it can easily be scaled and adapted to these other markets</a:t>
+            </a:r>
+          </a:p>
+          <a:p>
+            <a:endParaRPr lang="en-US" dirty="0"/>
+          </a:p>
+          <a:p>
+            <a:endParaRPr lang="en-US" dirty="0"/>
+          </a:p>
+          <a:p>
+            <a:pPr marL="0" marR="0" lvl="0" indent="0" algn="l" defTabSz="914400" rtl="0" eaLnBrk="1" fontAlgn="auto" latinLnBrk="0" hangingPunct="1">
+              <a:lnSpc>
+                <a:spcPct val="100000"/>
+              </a:lnSpc>
               <a:spcBef>
                 <a:spcPts val="0"/>
               </a:spcBef>
+              <a:spcAft>
+                <a:spcPts val="0"/>
+              </a:spcAft>
+              <a:buClrTx/>
+              <a:buSzTx/>
+              <a:buFontTx/>
               <a:buNone/>
+              <a:tabLst/>
+              <a:defRPr/>
             </a:pPr>
-            <a:endParaRPr lang="en-CA" sz="1200" dirty="0"/>
-          </a:p>
-          <a:p>
-            <a:pPr marL="0" indent="0">
-              <a:spcBef>
-                <a:spcPts val="0"/>
-              </a:spcBef>
-              <a:buNone/>
-            </a:pPr>
-            <a:endParaRPr lang="en-CA" sz="1200" dirty="0"/>
-          </a:p>
-          <a:p>
-            <a:pPr marL="0" indent="0">
-              <a:spcBef>
-                <a:spcPts val="0"/>
-              </a:spcBef>
-              <a:buNone/>
-            </a:pPr>
-            <a:endParaRPr lang="en-CA" sz="1200" dirty="0"/>
-          </a:p>
-          <a:p>
-            <a:pPr marL="0" indent="0">
-              <a:spcBef>
-                <a:spcPts val="0"/>
-              </a:spcBef>
-              <a:buNone/>
-            </a:pPr>
-            <a:endParaRPr lang="en-CA" sz="1200" dirty="0"/>
-          </a:p>
-          <a:p>
-            <a:pPr marL="0" indent="0">
-              <a:spcBef>
-                <a:spcPts val="0"/>
-              </a:spcBef>
-              <a:buNone/>
-            </a:pPr>
-            <a:endParaRPr lang="en-CA" sz="1200" dirty="0"/>
-          </a:p>
-          <a:p>
-            <a:pPr marL="0" indent="0">
-              <a:spcBef>
-                <a:spcPts val="0"/>
-              </a:spcBef>
-              <a:buNone/>
-            </a:pPr>
-            <a:endParaRPr lang="en-CA" sz="1200" dirty="0"/>
-          </a:p>
-          <a:p>
-            <a:pPr marL="0" indent="0">
-              <a:spcBef>
-                <a:spcPts val="0"/>
-              </a:spcBef>
-              <a:buNone/>
-            </a:pPr>
-            <a:endParaRPr lang="en-CA" sz="1200" dirty="0"/>
-          </a:p>
-          <a:p>
-            <a:pPr marL="0" indent="0">
-              <a:spcBef>
-                <a:spcPts val="0"/>
-              </a:spcBef>
-              <a:buNone/>
-            </a:pPr>
-            <a:endParaRPr lang="en-CA" sz="1200" dirty="0"/>
-          </a:p>
-          <a:p>
-            <a:pPr marL="0" indent="0">
-              <a:spcBef>
-                <a:spcPts val="0"/>
-              </a:spcBef>
-              <a:buNone/>
-            </a:pPr>
-            <a:endParaRPr lang="en-CA" sz="1200" dirty="0"/>
-          </a:p>
-          <a:p>
-            <a:pPr marL="0" indent="0">
-              <a:spcBef>
-                <a:spcPts val="0"/>
-              </a:spcBef>
-              <a:buNone/>
-            </a:pPr>
-            <a:endParaRPr lang="en-CA" sz="1200" dirty="0"/>
-          </a:p>
-          <a:p>
-            <a:pPr marL="0" indent="0">
-              <a:spcBef>
-                <a:spcPts val="0"/>
-              </a:spcBef>
-              <a:buNone/>
-            </a:pPr>
-            <a:r>
-              <a:rPr lang="en-CA" sz="1200" dirty="0"/>
-              <a:t>The main reason that I am interested in taking on this project is because it aligns with my goals of doing work that is first and foremost practical and impactful, but also involves problem solving, innovation and academic research.  I think that this endeavor doesn’t work without all of those things. I feel that I’m in a unique position to deliver an effective outcome. I think the approach I’m taking is bold, but by aiming high in this case, there is really very little downside.</a:t>
-            </a:r>
-          </a:p>
-          <a:p>
-            <a:pPr marL="0" indent="0">
-              <a:spcBef>
-                <a:spcPts val="0"/>
-              </a:spcBef>
-              <a:buNone/>
-            </a:pPr>
-            <a:endParaRPr lang="en-CA" sz="1200" b="0" i="0" dirty="0">
+            <a:r>
+              <a:rPr lang="en-CA" sz="1200" b="1" dirty="0"/>
+              <a:t>Can you get any sense of projected number of client/customers that might be interested in this solution? </a:t>
+            </a:r>
+            <a:endParaRPr lang="en-CA" sz="1200" kern="1200" dirty="0">
               <a:solidFill>
-                <a:srgbClr val="002060"/>
+                <a:schemeClr val="tx1"/>
               </a:solidFill>
+              <a:effectLst/>
+              <a:latin typeface="+mn-lt"/>
+              <a:ea typeface="+mn-ea"/>
+              <a:cs typeface="+mn-cs"/>
             </a:endParaRPr>
           </a:p>
           <a:p>
-            <a:pPr marL="0" indent="0">
-              <a:spcBef>
-                <a:spcPts val="0"/>
-              </a:spcBef>
-              <a:buNone/>
-            </a:pPr>
-            <a:endParaRPr lang="en-CA" sz="1200" b="0" i="0" dirty="0">
+            <a:r>
+              <a:rPr lang="en-CA" sz="1200" kern="1200" dirty="0">
+                <a:solidFill>
+                  <a:schemeClr val="tx1"/>
+                </a:solidFill>
+                <a:effectLst/>
+                <a:latin typeface="+mn-lt"/>
+                <a:ea typeface="+mn-ea"/>
+                <a:cs typeface="+mn-cs"/>
+              </a:rPr>
+              <a:t>-</a:t>
+            </a:r>
+            <a:r>
+              <a:rPr lang="en-US" sz="1200" kern="1200" dirty="0">
+                <a:solidFill>
+                  <a:schemeClr val="tx1"/>
+                </a:solidFill>
+                <a:effectLst/>
+                <a:latin typeface="+mn-lt"/>
+                <a:ea typeface="+mn-ea"/>
+                <a:cs typeface="+mn-cs"/>
+              </a:rPr>
+              <a:t>research has shown that the risk of injury and the frequency of severe injuries in freestyle skiing are high.  A retrospective study of all freestyle ski disciplines during the three World Cup seasons between 2006-2009 estimated a 44.0% (95%CI: 38.9 – 49.0%) incidence of injury each season and a 31.9% (95%CI: 27.6 – 36.2%) incidence of time-loss (≥ 1 day) injury across all competitors (</a:t>
+            </a:r>
+            <a:r>
+              <a:rPr lang="en-US" sz="1200" kern="1200" dirty="0" err="1">
+                <a:solidFill>
+                  <a:schemeClr val="tx1"/>
+                </a:solidFill>
+                <a:effectLst/>
+                <a:latin typeface="+mn-lt"/>
+                <a:ea typeface="+mn-ea"/>
+                <a:cs typeface="+mn-cs"/>
+              </a:rPr>
+              <a:t>Flørenes</a:t>
+            </a:r>
+            <a:r>
+              <a:rPr lang="en-US" sz="1200" kern="1200" dirty="0">
+                <a:solidFill>
+                  <a:schemeClr val="tx1"/>
+                </a:solidFill>
+                <a:effectLst/>
+                <a:latin typeface="+mn-lt"/>
+                <a:ea typeface="+mn-ea"/>
+                <a:cs typeface="+mn-cs"/>
+              </a:rPr>
+              <a:t> et al., 2010).  Alarmingly, severe injuries leading to time loss from training and competition of greater than 28 days were the most frequent type of injury, which is in contrast to most other sports, where severe injuries are the least frequent.  Other research found that 47% of the 95 competitors at the 2001 FIS Freestyle World Championship had experienced at least one major knee injury (&gt;20 days lost) and 26% had suffered at least one previous ACL injury (Heir et al., 2003). </a:t>
+            </a:r>
+          </a:p>
+          <a:p>
+            <a:endParaRPr lang="en-US" sz="1200" kern="1200" dirty="0">
               <a:solidFill>
-                <a:srgbClr val="002060"/>
+                <a:schemeClr val="tx1"/>
               </a:solidFill>
+              <a:effectLst/>
+              <a:latin typeface="+mn-lt"/>
+              <a:ea typeface="+mn-ea"/>
+              <a:cs typeface="+mn-cs"/>
             </a:endParaRPr>
           </a:p>
           <a:p>
-            <a:pPr marL="0" indent="0">
-              <a:spcBef>
-                <a:spcPts val="0"/>
-              </a:spcBef>
-              <a:buNone/>
-            </a:pPr>
-            <a:endParaRPr lang="en-CA" sz="1200" b="0" i="0" dirty="0">
+            <a:r>
+              <a:rPr lang="en-CA" sz="1200" kern="1200" dirty="0">
+                <a:solidFill>
+                  <a:schemeClr val="tx1"/>
+                </a:solidFill>
+                <a:effectLst/>
+                <a:latin typeface="+mn-lt"/>
+                <a:ea typeface="+mn-ea"/>
+                <a:cs typeface="+mn-cs"/>
+              </a:rPr>
+              <a:t>Back In Action Physiotherapy alone reports treating 320 different patients with knee injuries annually</a:t>
+            </a:r>
+          </a:p>
+          <a:p>
+            <a:endParaRPr lang="en-CA" sz="1200" kern="1200" dirty="0">
               <a:solidFill>
-                <a:srgbClr val="002060"/>
+                <a:schemeClr val="tx1"/>
               </a:solidFill>
+              <a:effectLst/>
+              <a:latin typeface="+mn-lt"/>
+              <a:ea typeface="+mn-ea"/>
+              <a:cs typeface="+mn-cs"/>
             </a:endParaRPr>
           </a:p>
           <a:p>
-            <a:pPr marL="0" indent="0">
-              <a:spcBef>
-                <a:spcPts val="0"/>
-              </a:spcBef>
-              <a:buNone/>
-            </a:pPr>
-            <a:endParaRPr lang="en-CA" sz="1200" b="0" i="0" dirty="0">
-              <a:solidFill>
-                <a:srgbClr val="002060"/>
-              </a:solidFill>
-            </a:endParaRPr>
-          </a:p>
-          <a:p>
-            <a:pPr marL="0" indent="0">
-              <a:spcBef>
-                <a:spcPts val="0"/>
-              </a:spcBef>
-              <a:buNone/>
-            </a:pPr>
-            <a:endParaRPr lang="en-CA" sz="1200" b="0" i="0" dirty="0">
-              <a:solidFill>
-                <a:srgbClr val="002060"/>
-              </a:solidFill>
-            </a:endParaRPr>
-          </a:p>
-          <a:p>
-            <a:pPr marL="0" indent="0">
-              <a:spcBef>
-                <a:spcPts val="0"/>
-              </a:spcBef>
-              <a:buNone/>
-            </a:pPr>
-            <a:endParaRPr lang="en-CA" sz="1200" b="0" i="0" dirty="0">
-              <a:solidFill>
-                <a:srgbClr val="002060"/>
-              </a:solidFill>
-            </a:endParaRPr>
-          </a:p>
-          <a:p>
-            <a:pPr marL="0" indent="0">
-              <a:spcBef>
-                <a:spcPts val="0"/>
-              </a:spcBef>
-              <a:buNone/>
-            </a:pPr>
-            <a:endParaRPr lang="en-CA" sz="1200" b="0" i="0" dirty="0">
-              <a:solidFill>
-                <a:srgbClr val="002060"/>
-              </a:solidFill>
-            </a:endParaRPr>
-          </a:p>
-          <a:p>
-            <a:pPr marL="0" indent="0">
-              <a:spcBef>
-                <a:spcPts val="0"/>
-              </a:spcBef>
-              <a:buNone/>
-            </a:pPr>
-            <a:endParaRPr lang="en-CA" sz="1200" b="0" i="0" dirty="0">
-              <a:solidFill>
-                <a:srgbClr val="002060"/>
-              </a:solidFill>
-            </a:endParaRPr>
-          </a:p>
-          <a:p>
-            <a:pPr marL="0" indent="0">
-              <a:spcBef>
-                <a:spcPts val="0"/>
-              </a:spcBef>
-              <a:buNone/>
-            </a:pPr>
-            <a:endParaRPr lang="en-CA" sz="1200" b="0" i="0" dirty="0">
-              <a:solidFill>
-                <a:srgbClr val="002060"/>
-              </a:solidFill>
-            </a:endParaRPr>
-          </a:p>
-          <a:p>
-            <a:r>
-              <a:rPr lang="en-US" dirty="0"/>
-              <a:t>Instead of getting on a zoom, and going around the circle saying “what do you think, what do you think”, I think the best approach is to build something, piece by piece so we have something to talk about, and then everyone gets hands-on with it and we decide as a group what works and what doesn’t work.</a:t>
-            </a:r>
-          </a:p>
-          <a:p>
             <a:endParaRPr lang="en-US" dirty="0"/>
-          </a:p>
-          <a:p>
-            <a:r>
-              <a:rPr lang="en-US" dirty="0"/>
-              <a:t>-Experience with successful and unsuccessful collaboration</a:t>
-            </a:r>
-          </a:p>
-          <a:p>
-            <a:r>
-              <a:rPr lang="en-US" dirty="0"/>
-              <a:t>-</a:t>
-            </a:r>
-          </a:p>
-        </p:txBody>
-      </p:sp>
-      <p:sp>
-        <p:nvSpPr>
-          <p:cNvPr id="4" name="Slide Number Placeholder 3"/>
-          <p:cNvSpPr>
-            <a:spLocks noGrp="1"/>
-          </p:cNvSpPr>
-          <p:nvPr>
-            <p:ph type="sldNum" sz="quarter" idx="5"/>
-          </p:nvPr>
-        </p:nvSpPr>
-        <p:spPr/>
-        <p:txBody>
-          <a:bodyPr/>
-          <a:lstStyle/>
-          <a:p>
-            <a:fld id="{EAF9EB4E-D50A-4CF1-9B06-457599E410FB}" type="slidenum">
-              <a:rPr lang="en-CA" smtClean="0"/>
-              <a:t>8</a:t>
-            </a:fld>
-            <a:endParaRPr lang="en-CA"/>
           </a:p>
         </p:txBody>
       </p:sp>
     </p:spTree>
     <p:extLst>
       <p:ext uri="{BB962C8B-B14F-4D97-AF65-F5344CB8AC3E}">
-        <p14:creationId xmlns:p14="http://schemas.microsoft.com/office/powerpoint/2010/main" val="1675297175"/>
+        <p14:creationId xmlns:p14="http://schemas.microsoft.com/office/powerpoint/2010/main" val="250508036"/>
       </p:ext>
     </p:extLst>
   </p:cSld>
@@ -25432,519 +25993,48 @@
           <a:bodyPr/>
           <a:lstStyle/>
           <a:p>
-            <a:r>
-              <a:rPr lang="en-CA" sz="1200" b="0" dirty="0"/>
-              <a:t>My goal with this slide is to just share one idea that I have of how this product could be delivered </a:t>
-            </a:r>
-          </a:p>
-          <a:p>
-            <a:endParaRPr lang="en-CA" sz="1200" b="0" dirty="0"/>
-          </a:p>
-          <a:p>
-            <a:r>
-              <a:rPr lang="en-CA" sz="1200" b="0" dirty="0"/>
-              <a:t>A lot of the talk that I’ve heard is “how do we get the NSOs to fund it”..</a:t>
-            </a:r>
-          </a:p>
-          <a:p>
-            <a:r>
-              <a:rPr lang="en-CA" sz="1200" b="0" dirty="0"/>
-              <a:t>My proposal would be to start with a different business model which would be something more subscription based.</a:t>
-            </a:r>
-          </a:p>
-          <a:p>
-            <a:endParaRPr lang="en-CA" sz="1200" b="0" dirty="0"/>
-          </a:p>
-          <a:p>
-            <a:r>
-              <a:rPr lang="en-CA" sz="1200" b="0" dirty="0"/>
-              <a:t>So in this example there’s a monthly cost per athlete, and that can be scalable to our time commitment and the integration with our services.</a:t>
-            </a:r>
-          </a:p>
-          <a:p>
-            <a:endParaRPr lang="en-CA" sz="1200" b="0" dirty="0"/>
-          </a:p>
-          <a:p>
-            <a:r>
-              <a:rPr lang="en-CA" sz="1200" b="0" dirty="0"/>
-              <a:t>So let’s say a bronze package</a:t>
-            </a:r>
-          </a:p>
-          <a:p>
-            <a:r>
-              <a:rPr lang="en-CA" sz="1200" b="0" dirty="0"/>
-              <a:t>-relatively inexpensive to customer / relatively simple for us to deliver</a:t>
-            </a:r>
-          </a:p>
-          <a:p>
-            <a:r>
-              <a:rPr lang="en-CA" sz="1200" b="0" dirty="0"/>
-              <a:t>And then in contrast, a gold package, would essentially be an improved and standardized version of what we already do for our Olympic athletes</a:t>
-            </a:r>
-          </a:p>
-          <a:p>
-            <a:r>
-              <a:rPr lang="en-CA" sz="1200" b="0" dirty="0"/>
-              <a:t>-very time consuming / valued accordingly</a:t>
-            </a:r>
-          </a:p>
-          <a:p>
-            <a:endParaRPr lang="en-CA" sz="1200" b="0" dirty="0"/>
-          </a:p>
-          <a:p>
-            <a:r>
-              <a:rPr lang="en-CA" sz="1200" b="0" dirty="0"/>
-              <a:t>In addition to the subscription model, we could offer an upfront option, thinking specifically of our partner NSOs, </a:t>
-            </a:r>
-          </a:p>
-          <a:p>
-            <a:r>
-              <a:rPr lang="en-CA" sz="1200" b="0" dirty="0"/>
-              <a:t>This would be priced strategically to allow us to have some guaranteed revenue and to allow the sports to have cost certainty and the knowledge that their athletes will be well supported in the case of injury</a:t>
-            </a:r>
-          </a:p>
-          <a:p>
-            <a:endParaRPr lang="en-CA" sz="1200" b="0" dirty="0"/>
-          </a:p>
-          <a:p>
-            <a:r>
-              <a:rPr lang="en-CA" sz="1200" b="0" dirty="0"/>
-              <a:t>Upfront options could be scaled in much the same way</a:t>
-            </a:r>
-          </a:p>
-          <a:p>
-            <a:endParaRPr lang="en-CA" sz="1200" b="0" dirty="0"/>
-          </a:p>
-          <a:p>
-            <a:endParaRPr lang="en-CA" sz="1200" b="0" dirty="0"/>
-          </a:p>
-          <a:p>
-            <a:endParaRPr lang="en-CA" sz="1200" b="0" dirty="0"/>
-          </a:p>
-          <a:p>
-            <a:endParaRPr lang="en-CA" sz="1200" b="0" dirty="0"/>
-          </a:p>
-          <a:p>
-            <a:endParaRPr lang="en-CA" sz="1200" b="0" dirty="0"/>
-          </a:p>
-          <a:p>
-            <a:endParaRPr lang="en-CA" sz="1200" b="0" dirty="0"/>
-          </a:p>
-          <a:p>
-            <a:endParaRPr lang="en-CA" sz="1200" b="0" dirty="0"/>
-          </a:p>
-          <a:p>
-            <a:r>
-              <a:rPr lang="en-CA" sz="1200" b="0" dirty="0"/>
-              <a:t>Offer a product that can be effective without a massive time commitment by our staff, but is made more effective proportionately with more time commitment and deeper integration with our staff and services.</a:t>
-            </a:r>
-          </a:p>
-          <a:p>
-            <a:r>
-              <a:rPr lang="en-CA" sz="1200" b="0" dirty="0"/>
-              <a:t>Chart: Bronze, Silver, Gold..</a:t>
-            </a:r>
-          </a:p>
-          <a:p>
-            <a:r>
-              <a:rPr lang="en-CA" sz="1200" b="0" dirty="0"/>
-              <a:t>	protocol, sessions, testing..</a:t>
-            </a:r>
-          </a:p>
-          <a:p>
-            <a:endParaRPr lang="en-CA" sz="1200" b="0" dirty="0"/>
-          </a:p>
-          <a:p>
-            <a:endParaRPr lang="en-CA" sz="1200" b="0" dirty="0"/>
-          </a:p>
-          <a:p>
-            <a:r>
-              <a:rPr lang="en-CA" sz="1200" b="0" dirty="0"/>
-              <a:t>So Bronze..</a:t>
-            </a:r>
-          </a:p>
-          <a:p>
-            <a:r>
-              <a:rPr lang="en-CA" sz="1200" b="0" dirty="0"/>
-              <a:t>So we’re offering a specialized service, we’re bringing in monthly revenue, and we are not making a huge time-commitment.</a:t>
-            </a:r>
-          </a:p>
-          <a:p>
-            <a:endParaRPr lang="en-CA" sz="1200" b="0" dirty="0"/>
-          </a:p>
-          <a:p>
-            <a:r>
-              <a:rPr lang="en-CA" sz="1200" b="0" dirty="0"/>
-              <a:t>However, we design it in such a way, and make it clear, that the more contact the athlete has with our staff and our services, the more effective the rehab will be..</a:t>
-            </a:r>
-          </a:p>
-          <a:p>
-            <a:endParaRPr lang="en-CA" sz="1200" b="0" dirty="0"/>
-          </a:p>
-          <a:p>
-            <a:endParaRPr lang="en-CA" sz="1200" b="0" dirty="0"/>
-          </a:p>
-          <a:p>
-            <a:r>
-              <a:rPr lang="en-CA" sz="1200" b="0" dirty="0"/>
-              <a:t>Gold package, is likely very similar to what we do now for our NSOs, which is a massive time commitment, and impossible for us to recoup anything close to the real value on what we deliver</a:t>
-            </a:r>
-          </a:p>
-          <a:p>
-            <a:endParaRPr lang="en-CA" sz="1200" b="0" dirty="0"/>
-          </a:p>
-          <a:p>
-            <a:endParaRPr lang="en-CA" sz="1200" b="0" dirty="0"/>
-          </a:p>
-          <a:p>
-            <a:endParaRPr lang="en-CA" sz="1200" b="0" dirty="0"/>
-          </a:p>
-          <a:p>
-            <a:endParaRPr lang="en-CA" sz="1200" b="0" dirty="0"/>
-          </a:p>
-          <a:p>
-            <a:endParaRPr lang="en-CA" sz="1200" b="0" dirty="0"/>
-          </a:p>
-          <a:p>
-            <a:r>
-              <a:rPr lang="en-CA" sz="1200" b="0" dirty="0"/>
-              <a:t>. This is something that can be applied to athletes from any of the identified target markets.  Just for an example, we develop a bronze package that gives the athlete access to the ACL protocol and they get 1 workout in our facility and 1 testing session per month.</a:t>
-            </a:r>
-          </a:p>
-          <a:p>
-            <a:endParaRPr lang="en-CA" sz="1200" b="0" dirty="0"/>
-          </a:p>
-          <a:p>
-            <a:r>
-              <a:rPr lang="en-CA" sz="1200" b="0" dirty="0"/>
-              <a:t>The reason I chose to use this example specifically, I think that the way to get value in the rehab field is to </a:t>
-            </a:r>
-          </a:p>
-          <a:p>
-            <a:endParaRPr lang="en-CA" sz="1200" b="1" dirty="0"/>
-          </a:p>
-          <a:p>
-            <a:r>
-              <a:rPr lang="en-CA" sz="1200" b="1" dirty="0"/>
-              <a:t>Hybrid business model</a:t>
-            </a:r>
-          </a:p>
-          <a:p>
-            <a:r>
-              <a:rPr lang="en-CA" sz="1200" b="0" dirty="0"/>
-              <a:t>NSOs (and others) invest in the program upfront </a:t>
-            </a:r>
-          </a:p>
-          <a:p>
-            <a:endParaRPr lang="en-CA" sz="1200" b="1" dirty="0"/>
-          </a:p>
-          <a:p>
-            <a:r>
-              <a:rPr lang="en-CA" sz="1200" b="1" dirty="0"/>
-              <a:t>Subscription</a:t>
-            </a:r>
-          </a:p>
-          <a:p>
-            <a:r>
-              <a:rPr lang="en-CA" sz="1200" b="0" dirty="0"/>
-              <a:t>I think it might work better for most as a subscription model.</a:t>
-            </a:r>
-          </a:p>
-          <a:p>
-            <a:r>
-              <a:rPr lang="en-CA" sz="1200" b="0" dirty="0"/>
-              <a:t>Maybe not the sport, since they would require “Gold” level service which should be extremely expensive.</a:t>
-            </a:r>
-          </a:p>
-          <a:p>
-            <a:endParaRPr lang="en-CA" sz="1200" b="0" dirty="0"/>
-          </a:p>
-          <a:p>
-            <a:endParaRPr lang="en-CA" sz="1200" b="1" dirty="0"/>
-          </a:p>
-          <a:p>
-            <a:endParaRPr lang="en-CA" sz="1200" b="1" dirty="0"/>
-          </a:p>
-          <a:p>
-            <a:endParaRPr lang="en-CA" sz="1200" b="1" dirty="0"/>
-          </a:p>
-          <a:p>
-            <a:endParaRPr lang="en-CA" sz="1200" b="1" dirty="0"/>
-          </a:p>
-          <a:p>
-            <a:endParaRPr lang="en-CA" sz="1200" b="1" dirty="0"/>
-          </a:p>
-          <a:p>
-            <a:endParaRPr lang="en-CA" sz="1200" b="1" dirty="0"/>
-          </a:p>
-          <a:p>
-            <a:endParaRPr lang="en-CA" sz="1200" b="1" dirty="0"/>
-          </a:p>
-          <a:p>
-            <a:r>
-              <a:rPr lang="en-CA" sz="1200" b="1" dirty="0"/>
-              <a:t>Pull together a draft top-level forecast of potential revenues and expenses into a draft budget</a:t>
-            </a:r>
-          </a:p>
-          <a:p>
-            <a:r>
-              <a:rPr lang="en-CA" sz="1200" b="1" dirty="0"/>
-              <a:t>Within the context of sport, show that in a not-for-profit model, there would be enough interest to support the solutions:</a:t>
-            </a:r>
-          </a:p>
-          <a:p>
-            <a:r>
-              <a:rPr lang="en-CA" sz="1200" b="0" dirty="0"/>
-              <a:t>-Interest is a funny word, it’s more like “need”.  Maybe some people are ”interested”</a:t>
-            </a:r>
-          </a:p>
-          <a:p>
-            <a:r>
-              <a:rPr lang="en-CA" sz="1200" b="0" dirty="0"/>
-              <a:t>-We will be doing rehabs either way</a:t>
-            </a:r>
-          </a:p>
-          <a:p>
-            <a:r>
-              <a:rPr lang="en-CA" sz="1200" b="0" dirty="0"/>
-              <a:t>	Even if we don’t care about doing it well for the sake of it…</a:t>
-            </a:r>
-          </a:p>
-          <a:p>
-            <a:r>
-              <a:rPr lang="en-CA" sz="1200" b="0" dirty="0"/>
-              <a:t>	We might as well do it in a highly organized manner</a:t>
-            </a:r>
-          </a:p>
-          <a:p>
-            <a:r>
-              <a:rPr lang="en-CA" sz="1200" b="0" dirty="0"/>
-              <a:t>-Build the thing, present it to them, convince NSOs to pay upfront</a:t>
-            </a:r>
-          </a:p>
-          <a:p>
-            <a:r>
-              <a:rPr lang="en-CA" sz="1200" b="0" dirty="0"/>
-              <a:t>	If someone gets hurt, the rehab is included in the agreement, and they know exactly what they 	are getting from the rehab.</a:t>
-            </a:r>
-          </a:p>
-          <a:p>
-            <a:r>
-              <a:rPr lang="en-CA" sz="1200" b="0" dirty="0"/>
-              <a:t>	Or they can pay the PN rate when someone gets injured..?</a:t>
-            </a:r>
-          </a:p>
-          <a:p>
-            <a:r>
-              <a:rPr lang="en-CA" sz="1200" b="0" dirty="0"/>
-              <a:t>	i.e. You pay $10k per year for full access OR you pay $20k for a 12 month rehab (this is a bargain for the full service including staff time commitment)</a:t>
-            </a:r>
-          </a:p>
-          <a:p>
-            <a:endParaRPr lang="en-US" b="1" dirty="0"/>
-          </a:p>
-          <a:p>
+            <a:pPr marL="0" indent="0">
+              <a:spcBef>
+                <a:spcPts val="0"/>
+              </a:spcBef>
+              <a:buNone/>
+            </a:pPr>
+            <a:r>
+              <a:rPr lang="en-CA" sz="1200" dirty="0"/>
+              <a:t>The role’s already been created, I’m already working on the protocol, </a:t>
+            </a:r>
+          </a:p>
+          <a:p>
+            <a:pPr marL="0" indent="0">
+              <a:spcBef>
+                <a:spcPts val="0"/>
+              </a:spcBef>
+              <a:buNone/>
+            </a:pPr>
+            <a:r>
+              <a:rPr lang="en-CA" sz="1200" dirty="0"/>
+              <a:t>so hopefully I don’t have to talk much about myself at the moment</a:t>
+            </a:r>
+          </a:p>
+          <a:p>
+            <a:pPr marL="0" indent="0">
+              <a:spcBef>
+                <a:spcPts val="0"/>
+              </a:spcBef>
+              <a:buNone/>
+            </a:pPr>
             <a:endParaRPr lang="en-CA" sz="1200" dirty="0"/>
           </a:p>
           <a:p>
-            <a:endParaRPr lang="en-CA" sz="1200" dirty="0"/>
-          </a:p>
-          <a:p>
-            <a:r>
-              <a:rPr lang="en-CA" sz="1200" b="1" dirty="0"/>
-              <a:t>Is there enough revenues to cover costs in a sustainable manner?</a:t>
-            </a:r>
-          </a:p>
-          <a:p>
+            <a:pPr marL="0" indent="0">
+              <a:spcBef>
+                <a:spcPts val="0"/>
+              </a:spcBef>
+              <a:buNone/>
+            </a:pPr>
             <a:r>
               <a:rPr lang="en-CA" sz="1200" dirty="0"/>
-              <a:t>-I feel like it’s not PS job to collect revenue</a:t>
-            </a:r>
-          </a:p>
-          <a:p>
-            <a:r>
-              <a:rPr lang="en-CA" sz="1200" dirty="0"/>
-              <a:t>-Our job is to offer the best service possible, not to sell it or ensure collection of revenue</a:t>
-            </a:r>
-          </a:p>
-          <a:p>
-            <a:r>
-              <a:rPr lang="en-CA" sz="1200" dirty="0"/>
-              <a:t>-PS does the work to generate the revenue, the revenue just doesn’t always get collected</a:t>
-            </a:r>
-            <a:endParaRPr lang="en-US" dirty="0"/>
-          </a:p>
-          <a:p>
-            <a:endParaRPr lang="en-US" dirty="0"/>
-          </a:p>
-          <a:p>
-            <a:endParaRPr lang="en-US" dirty="0"/>
-          </a:p>
-          <a:p>
-            <a:endParaRPr lang="en-US" dirty="0"/>
-          </a:p>
-          <a:p>
-            <a:r>
-              <a:rPr lang="en-US" dirty="0"/>
-              <a:t>AK:</a:t>
-            </a:r>
-          </a:p>
-          <a:p>
-            <a:r>
-              <a:rPr lang="en-US" dirty="0"/>
-              <a:t>-Our core business is supposed to be supporting Canadian high performance athletes.  This is a crucial part of supporting them</a:t>
-            </a:r>
-          </a:p>
-          <a:p>
-            <a:endParaRPr lang="en-US" dirty="0"/>
-          </a:p>
-          <a:p>
-            <a:r>
-              <a:rPr lang="en-US" dirty="0"/>
-              <a:t>-This would be the first comprehensive and open-source system within Canada</a:t>
-            </a:r>
-          </a:p>
-          <a:p>
-            <a:r>
-              <a:rPr lang="en-US" dirty="0"/>
-              <a:t>  -i.e. Izzy: that was just service delivery, there was never really a structured, scalable protocol</a:t>
-            </a:r>
-          </a:p>
-          <a:p>
-            <a:r>
-              <a:rPr lang="en-US" dirty="0"/>
-              <a:t>-R&amp;D:</a:t>
-            </a:r>
-          </a:p>
-          <a:p>
-            <a:r>
-              <a:rPr lang="en-US" dirty="0"/>
-              <a:t>   There are a lot of opportunities just from improving our data management.  R&amp;D doesn’t have to involve a Biodex.  It’s just a way to potentially fund it via grants etc.</a:t>
-            </a:r>
-          </a:p>
-          <a:p>
-            <a:r>
-              <a:rPr lang="en-US" dirty="0"/>
-              <a:t>-my proposal involves basically no cost, but it has a guaranteed outcome.  The protocol will be delivered.  It will be useable for any of our staff.  From there we can probably market to NSOs, can </a:t>
-            </a:r>
-          </a:p>
-          <a:p>
-            <a:endParaRPr lang="en-US" dirty="0"/>
-          </a:p>
-          <a:p>
-            <a:r>
-              <a:rPr lang="en-US" dirty="0"/>
-              <a:t>-What is the cost to not doing this?  We keep having rehab cases to do, our practitioners work inefficiently to cover these on a case-by-case basis, we do not learn/grow/innovate, we do not have procedures in place to inform research and innovation, we have no way to properly value this service and the organization (and practitioners) do not get properly compensated.</a:t>
-            </a:r>
-          </a:p>
-          <a:p>
-            <a:endParaRPr lang="en-US" dirty="0"/>
-          </a:p>
-          <a:p>
-            <a:r>
-              <a:rPr lang="en-US" dirty="0"/>
-              <a:t>-we can sell you the protocol for $x or $x per month, that is IP that has value on it’s own, but the product really takes off when it leverages it’s connection to our athlete management system and especially when it is delivered by own of our expert practitioners</a:t>
-            </a:r>
-          </a:p>
-          <a:p>
-            <a:endParaRPr lang="en-US" dirty="0"/>
-          </a:p>
-          <a:p>
-            <a:r>
-              <a:rPr lang="en-US" dirty="0"/>
-              <a:t>Bronze/Silver Package</a:t>
-            </a:r>
-          </a:p>
-          <a:p>
-            <a:r>
-              <a:rPr lang="en-US" dirty="0"/>
-              <a:t>(enough to fully engage with the protocol, but you pretty much do all the work on your own)</a:t>
-            </a:r>
-          </a:p>
-          <a:p>
-            <a:r>
-              <a:rPr lang="en-US" dirty="0"/>
-              <a:t>-website, program</a:t>
-            </a:r>
-          </a:p>
-          <a:p>
-            <a:r>
-              <a:rPr lang="en-US" dirty="0"/>
-              <a:t>-1 testing session per month</a:t>
-            </a:r>
-          </a:p>
-          <a:p>
-            <a:r>
-              <a:rPr lang="en-US" dirty="0"/>
-              <a:t>-1 training session per month</a:t>
-            </a:r>
-          </a:p>
-          <a:p>
-            <a:endParaRPr lang="en-US" dirty="0"/>
-          </a:p>
-          <a:p>
-            <a:endParaRPr lang="en-US" dirty="0"/>
-          </a:p>
-          <a:p>
-            <a:r>
-              <a:rPr lang="en-US" dirty="0"/>
-              <a:t>CH:</a:t>
-            </a:r>
-          </a:p>
-          <a:p>
-            <a:r>
-              <a:rPr lang="en-US" dirty="0"/>
-              <a:t>-</a:t>
-            </a:r>
-            <a:r>
-              <a:rPr lang="en-CA" sz="1200" kern="1200" dirty="0">
-                <a:solidFill>
-                  <a:schemeClr val="tx1"/>
-                </a:solidFill>
-                <a:effectLst/>
-                <a:latin typeface="+mn-lt"/>
-                <a:ea typeface="+mn-ea"/>
-                <a:cs typeface="+mn-cs"/>
-              </a:rPr>
-              <a:t>Increased and stable NSO and PSO investment in performance services</a:t>
-            </a:r>
-          </a:p>
-          <a:p>
-            <a:r>
-              <a:rPr lang="en-CA" sz="1200" kern="1200" dirty="0">
-                <a:solidFill>
-                  <a:schemeClr val="tx1"/>
-                </a:solidFill>
-                <a:effectLst/>
-                <a:latin typeface="+mn-lt"/>
-                <a:ea typeface="+mn-ea"/>
-                <a:cs typeface="+mn-cs"/>
-              </a:rPr>
-              <a:t>-strengthening stakeholder engagement </a:t>
-            </a:r>
-            <a:r>
-              <a:rPr lang="en-CA" sz="1200" kern="1200" dirty="0" err="1">
-                <a:solidFill>
-                  <a:schemeClr val="tx1"/>
-                </a:solidFill>
-                <a:effectLst/>
-                <a:latin typeface="+mn-lt"/>
-                <a:ea typeface="+mn-ea"/>
-                <a:cs typeface="+mn-cs"/>
-              </a:rPr>
-              <a:t>byfostering</a:t>
-            </a:r>
-            <a:r>
-              <a:rPr lang="en-CA" sz="1200" kern="1200" dirty="0">
-                <a:solidFill>
-                  <a:schemeClr val="tx1"/>
-                </a:solidFill>
-                <a:effectLst/>
-                <a:latin typeface="+mn-lt"/>
-                <a:ea typeface="+mn-ea"/>
-                <a:cs typeface="+mn-cs"/>
-              </a:rPr>
-              <a:t> collaboration with NSO and PSO partners</a:t>
+              <a:t>What I would say,</a:t>
             </a:r>
           </a:p>
           <a:p>
@@ -25966,148 +26056,261 @@
               <a:defRPr/>
             </a:pPr>
             <a:r>
-              <a:rPr lang="en-US" dirty="0"/>
-              <a:t>-scaled </a:t>
-            </a:r>
-            <a:r>
-              <a:rPr lang="en-CA" sz="1200" kern="1200" dirty="0">
+              <a:rPr lang="en-CA" sz="1200" b="0" i="0" dirty="0">
                 <a:solidFill>
-                  <a:schemeClr val="tx1"/>
+                  <a:srgbClr val="002060"/>
                 </a:solidFill>
-                <a:effectLst/>
-                <a:latin typeface="+mn-lt"/>
-                <a:ea typeface="+mn-ea"/>
-                <a:cs typeface="+mn-cs"/>
               </a:rPr>
-              <a:t>private pay RTP service for</a:t>
-            </a:r>
-            <a:r>
-              <a:rPr lang="en-US" sz="1200" kern="1200" dirty="0">
-                <a:solidFill>
-                  <a:schemeClr val="tx1"/>
-                </a:solidFill>
-                <a:effectLst/>
-                <a:latin typeface="+mn-lt"/>
-                <a:ea typeface="+mn-ea"/>
-                <a:cs typeface="+mn-cs"/>
-              </a:rPr>
-              <a:t> PN</a:t>
-            </a:r>
-          </a:p>
-          <a:p>
-            <a:r>
-              <a:rPr lang="en-US" sz="1200" kern="1200" dirty="0">
-                <a:solidFill>
-                  <a:schemeClr val="tx1"/>
-                </a:solidFill>
-                <a:effectLst/>
-                <a:latin typeface="+mn-lt"/>
-                <a:ea typeface="+mn-ea"/>
-                <a:cs typeface="+mn-cs"/>
-              </a:rPr>
-              <a:t>-</a:t>
-            </a:r>
-            <a:r>
-              <a:rPr lang="en-CA" sz="1200" kern="1200" dirty="0">
-                <a:solidFill>
-                  <a:schemeClr val="tx1"/>
-                </a:solidFill>
-                <a:effectLst/>
-                <a:latin typeface="+mn-lt"/>
-                <a:ea typeface="+mn-ea"/>
-                <a:cs typeface="+mn-cs"/>
-              </a:rPr>
-              <a:t>The population in Whistler is approaching 16,000 residents, with almost 30,000 in Squamish and 4,000 in Pemberton</a:t>
-            </a:r>
-          </a:p>
-          <a:p>
-            <a:pPr marL="0" marR="0" lvl="0" indent="0" algn="l" defTabSz="914400" rtl="0" eaLnBrk="1" fontAlgn="auto" latinLnBrk="0" hangingPunct="1">
-              <a:lnSpc>
-                <a:spcPct val="100000"/>
-              </a:lnSpc>
+              <a:t>Part of my proposal is to keep the working group very small at the start and to expand out as needed.  I think Craig is an integral part of this project given his experience specifically leading rehabilitations. And also, really grateful to have the support of Marc in this with his vision for what this could be and obviously all the technical expertise that he brings.</a:t>
+            </a:r>
+          </a:p>
+          <a:p>
+            <a:pPr marL="0" indent="0">
               <a:spcBef>
                 <a:spcPts val="0"/>
               </a:spcBef>
-              <a:spcAft>
-                <a:spcPts val="0"/>
-              </a:spcAft>
-              <a:buClrTx/>
-              <a:buSzTx/>
-              <a:buFontTx/>
               <a:buNone/>
-              <a:tabLst/>
-              <a:defRPr/>
             </a:pPr>
-            <a:endParaRPr lang="en-CA" sz="1200" kern="1200" dirty="0">
-              <a:solidFill>
-                <a:schemeClr val="tx1"/>
-              </a:solidFill>
-              <a:effectLst/>
-              <a:latin typeface="+mn-lt"/>
-              <a:ea typeface="+mn-ea"/>
-              <a:cs typeface="+mn-cs"/>
-            </a:endParaRPr>
-          </a:p>
-          <a:p>
-            <a:pPr marL="0" marR="0" lvl="0" indent="0" algn="l" defTabSz="914400" rtl="0" eaLnBrk="1" fontAlgn="auto" latinLnBrk="0" hangingPunct="1">
-              <a:lnSpc>
-                <a:spcPct val="100000"/>
-              </a:lnSpc>
+            <a:endParaRPr lang="en-CA" sz="1200" dirty="0"/>
+          </a:p>
+          <a:p>
+            <a:pPr marL="0" indent="0">
               <a:spcBef>
                 <a:spcPts val="0"/>
               </a:spcBef>
-              <a:spcAft>
-                <a:spcPts val="0"/>
-              </a:spcAft>
-              <a:buClrTx/>
-              <a:buSzTx/>
-              <a:buFontTx/>
               <a:buNone/>
-              <a:tabLst/>
-              <a:defRPr/>
             </a:pPr>
-            <a:r>
-              <a:rPr lang="en-CA" sz="1200" kern="1200" dirty="0">
-                <a:solidFill>
-                  <a:schemeClr val="tx1"/>
-                </a:solidFill>
-                <a:effectLst/>
-                <a:latin typeface="+mn-lt"/>
-                <a:ea typeface="+mn-ea"/>
-                <a:cs typeface="+mn-cs"/>
-              </a:rPr>
-              <a:t>-I think we build the protocol without a Biodex and then we can decide if and how we go about getting one later</a:t>
-            </a:r>
-          </a:p>
-          <a:p>
-            <a:pPr marL="0" marR="0" lvl="0" indent="0" algn="l" defTabSz="914400" rtl="0" eaLnBrk="1" fontAlgn="auto" latinLnBrk="0" hangingPunct="1">
-              <a:lnSpc>
-                <a:spcPct val="100000"/>
-              </a:lnSpc>
+            <a:endParaRPr lang="en-CA" sz="1200" dirty="0"/>
+          </a:p>
+          <a:p>
+            <a:pPr marL="0" indent="0">
               <a:spcBef>
                 <a:spcPts val="0"/>
               </a:spcBef>
-              <a:spcAft>
+              <a:buNone/>
+            </a:pPr>
+            <a:endParaRPr lang="en-CA" sz="1200" dirty="0"/>
+          </a:p>
+          <a:p>
+            <a:pPr marL="0" indent="0">
+              <a:spcBef>
                 <a:spcPts val="0"/>
-              </a:spcAft>
-              <a:buClrTx/>
-              <a:buSzTx/>
-              <a:buFontTx/>
+              </a:spcBef>
               <a:buNone/>
-              <a:tabLst/>
-              <a:defRPr/>
             </a:pPr>
-            <a:r>
-              <a:rPr lang="en-CA" sz="1200" kern="1200" dirty="0">
-                <a:solidFill>
-                  <a:schemeClr val="tx1"/>
-                </a:solidFill>
-                <a:effectLst/>
-                <a:latin typeface="+mn-lt"/>
-                <a:ea typeface="+mn-ea"/>
-                <a:cs typeface="+mn-cs"/>
-              </a:rPr>
-              <a:t>	-grants, R&amp;D partnerships</a:t>
+            <a:endParaRPr lang="en-CA" sz="1200" dirty="0"/>
+          </a:p>
+          <a:p>
+            <a:pPr marL="0" indent="0">
+              <a:spcBef>
+                <a:spcPts val="0"/>
+              </a:spcBef>
+              <a:buNone/>
+            </a:pPr>
+            <a:endParaRPr lang="en-CA" sz="1200" dirty="0"/>
+          </a:p>
+          <a:p>
+            <a:pPr marL="0" indent="0">
+              <a:spcBef>
+                <a:spcPts val="0"/>
+              </a:spcBef>
+              <a:buNone/>
+            </a:pPr>
+            <a:endParaRPr lang="en-CA" sz="1200" dirty="0"/>
+          </a:p>
+          <a:p>
+            <a:pPr marL="0" indent="0">
+              <a:spcBef>
+                <a:spcPts val="0"/>
+              </a:spcBef>
+              <a:buNone/>
+            </a:pPr>
+            <a:endParaRPr lang="en-CA" sz="1200" dirty="0"/>
+          </a:p>
+          <a:p>
+            <a:pPr marL="0" indent="0">
+              <a:spcBef>
+                <a:spcPts val="0"/>
+              </a:spcBef>
+              <a:buNone/>
+            </a:pPr>
+            <a:endParaRPr lang="en-CA" sz="1200" dirty="0"/>
+          </a:p>
+          <a:p>
+            <a:pPr marL="0" indent="0">
+              <a:spcBef>
+                <a:spcPts val="0"/>
+              </a:spcBef>
+              <a:buNone/>
+            </a:pPr>
+            <a:endParaRPr lang="en-CA" sz="1200" dirty="0"/>
+          </a:p>
+          <a:p>
+            <a:pPr marL="0" indent="0">
+              <a:spcBef>
+                <a:spcPts val="0"/>
+              </a:spcBef>
+              <a:buNone/>
+            </a:pPr>
+            <a:endParaRPr lang="en-CA" sz="1200" dirty="0"/>
+          </a:p>
+          <a:p>
+            <a:pPr marL="0" indent="0">
+              <a:spcBef>
+                <a:spcPts val="0"/>
+              </a:spcBef>
+              <a:buNone/>
+            </a:pPr>
+            <a:endParaRPr lang="en-CA" sz="1200" dirty="0"/>
+          </a:p>
+          <a:p>
+            <a:pPr marL="0" indent="0">
+              <a:spcBef>
+                <a:spcPts val="0"/>
+              </a:spcBef>
+              <a:buNone/>
+            </a:pPr>
+            <a:r>
+              <a:rPr lang="en-CA" sz="1200" dirty="0"/>
+              <a:t>The main reason that I am interested in taking on this project is because it aligns with my goals of doing work that is first and foremost practical and impactful, but also involves problem solving, innovation and academic research.  I think that this endeavor doesn’t work without all of those things. I feel that I’m in a unique position to deliver an effective outcome. I think the approach I’m taking is bold, but by aiming high in this case, there is really very little downside.</a:t>
+            </a:r>
+          </a:p>
+          <a:p>
+            <a:pPr marL="0" indent="0">
+              <a:spcBef>
+                <a:spcPts val="0"/>
+              </a:spcBef>
+              <a:buNone/>
+            </a:pPr>
+            <a:endParaRPr lang="en-CA" sz="1200" b="0" i="0" dirty="0">
+              <a:solidFill>
+                <a:srgbClr val="002060"/>
+              </a:solidFill>
+            </a:endParaRPr>
+          </a:p>
+          <a:p>
+            <a:pPr marL="0" indent="0">
+              <a:spcBef>
+                <a:spcPts val="0"/>
+              </a:spcBef>
+              <a:buNone/>
+            </a:pPr>
+            <a:endParaRPr lang="en-CA" sz="1200" b="0" i="0" dirty="0">
+              <a:solidFill>
+                <a:srgbClr val="002060"/>
+              </a:solidFill>
+            </a:endParaRPr>
+          </a:p>
+          <a:p>
+            <a:pPr marL="0" indent="0">
+              <a:spcBef>
+                <a:spcPts val="0"/>
+              </a:spcBef>
+              <a:buNone/>
+            </a:pPr>
+            <a:endParaRPr lang="en-CA" sz="1200" b="0" i="0" dirty="0">
+              <a:solidFill>
+                <a:srgbClr val="002060"/>
+              </a:solidFill>
+            </a:endParaRPr>
+          </a:p>
+          <a:p>
+            <a:pPr marL="0" indent="0">
+              <a:spcBef>
+                <a:spcPts val="0"/>
+              </a:spcBef>
+              <a:buNone/>
+            </a:pPr>
+            <a:endParaRPr lang="en-CA" sz="1200" b="0" i="0" dirty="0">
+              <a:solidFill>
+                <a:srgbClr val="002060"/>
+              </a:solidFill>
+            </a:endParaRPr>
+          </a:p>
+          <a:p>
+            <a:pPr marL="0" indent="0">
+              <a:spcBef>
+                <a:spcPts val="0"/>
+              </a:spcBef>
+              <a:buNone/>
+            </a:pPr>
+            <a:endParaRPr lang="en-CA" sz="1200" b="0" i="0" dirty="0">
+              <a:solidFill>
+                <a:srgbClr val="002060"/>
+              </a:solidFill>
+            </a:endParaRPr>
+          </a:p>
+          <a:p>
+            <a:pPr marL="0" indent="0">
+              <a:spcBef>
+                <a:spcPts val="0"/>
+              </a:spcBef>
+              <a:buNone/>
+            </a:pPr>
+            <a:endParaRPr lang="en-CA" sz="1200" b="0" i="0" dirty="0">
+              <a:solidFill>
+                <a:srgbClr val="002060"/>
+              </a:solidFill>
+            </a:endParaRPr>
+          </a:p>
+          <a:p>
+            <a:pPr marL="0" indent="0">
+              <a:spcBef>
+                <a:spcPts val="0"/>
+              </a:spcBef>
+              <a:buNone/>
+            </a:pPr>
+            <a:endParaRPr lang="en-CA" sz="1200" b="0" i="0" dirty="0">
+              <a:solidFill>
+                <a:srgbClr val="002060"/>
+              </a:solidFill>
+            </a:endParaRPr>
+          </a:p>
+          <a:p>
+            <a:pPr marL="0" indent="0">
+              <a:spcBef>
+                <a:spcPts val="0"/>
+              </a:spcBef>
+              <a:buNone/>
+            </a:pPr>
+            <a:endParaRPr lang="en-CA" sz="1200" b="0" i="0" dirty="0">
+              <a:solidFill>
+                <a:srgbClr val="002060"/>
+              </a:solidFill>
+            </a:endParaRPr>
+          </a:p>
+          <a:p>
+            <a:pPr marL="0" indent="0">
+              <a:spcBef>
+                <a:spcPts val="0"/>
+              </a:spcBef>
+              <a:buNone/>
+            </a:pPr>
+            <a:endParaRPr lang="en-CA" sz="1200" b="0" i="0" dirty="0">
+              <a:solidFill>
+                <a:srgbClr val="002060"/>
+              </a:solidFill>
+            </a:endParaRPr>
+          </a:p>
+          <a:p>
+            <a:r>
+              <a:rPr lang="en-US" dirty="0"/>
+              <a:t>Instead of getting on a zoom, and going around the circle saying “what do you think, what do you think”, I think the best approach is to build something, piece by piece so we have something to talk about, and then everyone gets hands-on with it and we decide as a group what works and what doesn’t work.</a:t>
+            </a:r>
+          </a:p>
+          <a:p>
+            <a:endParaRPr lang="en-US" dirty="0"/>
+          </a:p>
+          <a:p>
+            <a:r>
+              <a:rPr lang="en-US" dirty="0"/>
+              <a:t>-Experience with successful and unsuccessful collaboration</a:t>
+            </a:r>
+          </a:p>
+          <a:p>
+            <a:r>
+              <a:rPr lang="en-US" dirty="0"/>
+              <a:t>-</a:t>
             </a:r>
           </a:p>
         </p:txBody>
@@ -26129,7 +26332,7 @@
           <a:p>
             <a:fld id="{EAF9EB4E-D50A-4CF1-9B06-457599E410FB}" type="slidenum">
               <a:rPr lang="en-CA" smtClean="0"/>
-              <a:t>9</a:t>
+              <a:t>10</a:t>
             </a:fld>
             <a:endParaRPr lang="en-CA"/>
           </a:p>
@@ -26138,7 +26341,7 @@
     </p:spTree>
     <p:extLst>
       <p:ext uri="{BB962C8B-B14F-4D97-AF65-F5344CB8AC3E}">
-        <p14:creationId xmlns:p14="http://schemas.microsoft.com/office/powerpoint/2010/main" val="1163778239"/>
+        <p14:creationId xmlns:p14="http://schemas.microsoft.com/office/powerpoint/2010/main" val="1675297175"/>
       </p:ext>
     </p:extLst>
   </p:cSld>
@@ -27861,6 +28064,1284 @@
 </file>
 
 <file path=ppt/slides/slide10.xml><?xml version="1.0" encoding="utf-8"?>
+<p:sld xmlns:a="http://schemas.openxmlformats.org/drawingml/2006/main" xmlns:r="http://schemas.openxmlformats.org/officeDocument/2006/relationships" xmlns:p="http://schemas.openxmlformats.org/presentationml/2006/main">
+  <p:cSld>
+    <p:spTree>
+      <p:nvGrpSpPr>
+        <p:cNvPr id="1" name=""/>
+        <p:cNvGrpSpPr/>
+        <p:nvPr/>
+      </p:nvGrpSpPr>
+      <p:grpSpPr>
+        <a:xfrm>
+          <a:off x="0" y="0"/>
+          <a:ext cx="0" cy="0"/>
+          <a:chOff x="0" y="0"/>
+          <a:chExt cx="0" cy="0"/>
+        </a:xfrm>
+      </p:grpSpPr>
+      <p:sp>
+        <p:nvSpPr>
+          <p:cNvPr id="63490" name="Rectangle 2"/>
+          <p:cNvSpPr>
+            <a:spLocks noGrp="1" noChangeArrowheads="1"/>
+          </p:cNvSpPr>
+          <p:nvPr>
+            <p:ph type="title"/>
+          </p:nvPr>
+        </p:nvSpPr>
+        <p:spPr>
+          <a:xfrm>
+            <a:off x="286745" y="1104559"/>
+            <a:ext cx="9808339" cy="565151"/>
+          </a:xfrm>
+          <a:noFill/>
+        </p:spPr>
+        <p:txBody>
+          <a:bodyPr>
+            <a:noAutofit/>
+          </a:bodyPr>
+          <a:lstStyle/>
+          <a:p>
+            <a:r>
+              <a:rPr lang="en-CA" sz="3733" dirty="0"/>
+              <a:t>Step 5.  Highlight Your Team Advantage</a:t>
+            </a:r>
+          </a:p>
+        </p:txBody>
+      </p:sp>
+      <p:sp>
+        <p:nvSpPr>
+          <p:cNvPr id="6" name="Rectangle 3"/>
+          <p:cNvSpPr txBox="1">
+            <a:spLocks noChangeArrowheads="1"/>
+          </p:cNvSpPr>
+          <p:nvPr/>
+        </p:nvSpPr>
+        <p:spPr>
+          <a:xfrm>
+            <a:off x="2042809" y="2207198"/>
+            <a:ext cx="9808339" cy="3287669"/>
+          </a:xfrm>
+          <a:prstGeom prst="rect">
+            <a:avLst/>
+          </a:prstGeom>
+        </p:spPr>
+        <p:txBody>
+          <a:bodyPr vert="horz" lIns="91440" tIns="45720" rIns="91440" bIns="45720" rtlCol="0">
+            <a:noAutofit/>
+          </a:bodyPr>
+          <a:lstStyle>
+            <a:lvl1pPr marL="342900" indent="-342900" algn="l" defTabSz="914400" rtl="0" eaLnBrk="1" latinLnBrk="0" hangingPunct="1">
+              <a:spcBef>
+                <a:spcPct val="20000"/>
+              </a:spcBef>
+              <a:buFont typeface="Arial" pitchFamily="34" charset="0"/>
+              <a:buChar char="•"/>
+              <a:defRPr sz="3200" kern="1200">
+                <a:solidFill>
+                  <a:schemeClr val="tx1"/>
+                </a:solidFill>
+                <a:latin typeface="Arial" pitchFamily="34" charset="0"/>
+                <a:ea typeface="+mn-ea"/>
+                <a:cs typeface="Arial" pitchFamily="34" charset="0"/>
+              </a:defRPr>
+            </a:lvl1pPr>
+            <a:lvl2pPr marL="742950" indent="-285750" algn="l" defTabSz="914400" rtl="0" eaLnBrk="1" latinLnBrk="0" hangingPunct="1">
+              <a:spcBef>
+                <a:spcPct val="20000"/>
+              </a:spcBef>
+              <a:buFont typeface="Arial" pitchFamily="34" charset="0"/>
+              <a:buChar char="–"/>
+              <a:defRPr sz="2000" kern="1200" baseline="0">
+                <a:solidFill>
+                  <a:schemeClr val="tx1"/>
+                </a:solidFill>
+                <a:latin typeface="Arial" pitchFamily="34" charset="0"/>
+                <a:ea typeface="+mn-ea"/>
+                <a:cs typeface="Arial" pitchFamily="34" charset="0"/>
+              </a:defRPr>
+            </a:lvl2pPr>
+            <a:lvl3pPr marL="1143000" indent="-228600" algn="l" defTabSz="914400" rtl="0" eaLnBrk="1" latinLnBrk="0" hangingPunct="1">
+              <a:spcBef>
+                <a:spcPct val="20000"/>
+              </a:spcBef>
+              <a:buFont typeface="Arial" pitchFamily="34" charset="0"/>
+              <a:buChar char="•"/>
+              <a:defRPr sz="1800" kern="1200" baseline="0">
+                <a:solidFill>
+                  <a:schemeClr val="tx1"/>
+                </a:solidFill>
+                <a:latin typeface="Arial" pitchFamily="34" charset="0"/>
+                <a:ea typeface="+mn-ea"/>
+                <a:cs typeface="Arial" pitchFamily="34" charset="0"/>
+              </a:defRPr>
+            </a:lvl3pPr>
+            <a:lvl4pPr marL="1600200" indent="-228600" algn="l" defTabSz="914400" rtl="0" eaLnBrk="1" latinLnBrk="0" hangingPunct="1">
+              <a:spcBef>
+                <a:spcPct val="20000"/>
+              </a:spcBef>
+              <a:buFont typeface="Arial" pitchFamily="34" charset="0"/>
+              <a:buChar char="–"/>
+              <a:defRPr sz="1600" kern="1200" baseline="0">
+                <a:solidFill>
+                  <a:schemeClr val="tx1"/>
+                </a:solidFill>
+                <a:latin typeface="Arial" pitchFamily="34" charset="0"/>
+                <a:ea typeface="+mn-ea"/>
+                <a:cs typeface="Arial" pitchFamily="34" charset="0"/>
+              </a:defRPr>
+            </a:lvl4pPr>
+            <a:lvl5pPr marL="2057400" indent="-228600" algn="l" defTabSz="914400" rtl="0" eaLnBrk="1" latinLnBrk="0" hangingPunct="1">
+              <a:spcBef>
+                <a:spcPct val="20000"/>
+              </a:spcBef>
+              <a:buFont typeface="Arial" pitchFamily="34" charset="0"/>
+              <a:buChar char="»"/>
+              <a:defRPr sz="1400" kern="1200" baseline="0">
+                <a:solidFill>
+                  <a:schemeClr val="tx1"/>
+                </a:solidFill>
+                <a:latin typeface="Arial" pitchFamily="34" charset="0"/>
+                <a:ea typeface="+mn-ea"/>
+                <a:cs typeface="Arial" pitchFamily="34" charset="0"/>
+              </a:defRPr>
+            </a:lvl5pPr>
+            <a:lvl6pPr marL="2514600" indent="-228600" algn="l" defTabSz="914400" rtl="0" eaLnBrk="1" latinLnBrk="0" hangingPunct="1">
+              <a:spcBef>
+                <a:spcPct val="20000"/>
+              </a:spcBef>
+              <a:buFont typeface="Arial" pitchFamily="34" charset="0"/>
+              <a:buChar char="•"/>
+              <a:defRPr sz="2000" kern="1200">
+                <a:solidFill>
+                  <a:schemeClr val="tx1"/>
+                </a:solidFill>
+                <a:latin typeface="+mn-lt"/>
+                <a:ea typeface="+mn-ea"/>
+                <a:cs typeface="+mn-cs"/>
+              </a:defRPr>
+            </a:lvl6pPr>
+            <a:lvl7pPr marL="2971800" indent="-228600" algn="l" defTabSz="914400" rtl="0" eaLnBrk="1" latinLnBrk="0" hangingPunct="1">
+              <a:spcBef>
+                <a:spcPct val="20000"/>
+              </a:spcBef>
+              <a:buFont typeface="Arial" pitchFamily="34" charset="0"/>
+              <a:buChar char="•"/>
+              <a:defRPr sz="2000" kern="1200">
+                <a:solidFill>
+                  <a:schemeClr val="tx1"/>
+                </a:solidFill>
+                <a:latin typeface="+mn-lt"/>
+                <a:ea typeface="+mn-ea"/>
+                <a:cs typeface="+mn-cs"/>
+              </a:defRPr>
+            </a:lvl7pPr>
+            <a:lvl8pPr marL="3429000" indent="-228600" algn="l" defTabSz="914400" rtl="0" eaLnBrk="1" latinLnBrk="0" hangingPunct="1">
+              <a:spcBef>
+                <a:spcPct val="20000"/>
+              </a:spcBef>
+              <a:buFont typeface="Arial" pitchFamily="34" charset="0"/>
+              <a:buChar char="•"/>
+              <a:defRPr sz="2000" kern="1200">
+                <a:solidFill>
+                  <a:schemeClr val="tx1"/>
+                </a:solidFill>
+                <a:latin typeface="+mn-lt"/>
+                <a:ea typeface="+mn-ea"/>
+                <a:cs typeface="+mn-cs"/>
+              </a:defRPr>
+            </a:lvl8pPr>
+            <a:lvl9pPr marL="3886200" indent="-228600" algn="l" defTabSz="914400" rtl="0" eaLnBrk="1" latinLnBrk="0" hangingPunct="1">
+              <a:spcBef>
+                <a:spcPct val="20000"/>
+              </a:spcBef>
+              <a:buFont typeface="Arial" pitchFamily="34" charset="0"/>
+              <a:buChar char="•"/>
+              <a:defRPr sz="2000" kern="1200">
+                <a:solidFill>
+                  <a:schemeClr val="tx1"/>
+                </a:solidFill>
+                <a:latin typeface="+mn-lt"/>
+                <a:ea typeface="+mn-ea"/>
+                <a:cs typeface="+mn-cs"/>
+              </a:defRPr>
+            </a:lvl9pPr>
+          </a:lstStyle>
+          <a:p>
+            <a:pPr marL="0" indent="0">
+              <a:spcBef>
+                <a:spcPts val="0"/>
+              </a:spcBef>
+              <a:buNone/>
+            </a:pPr>
+            <a:r>
+              <a:rPr lang="en-CA" sz="2400" b="1" dirty="0">
+                <a:solidFill>
+                  <a:srgbClr val="002060"/>
+                </a:solidFill>
+              </a:rPr>
+              <a:t>Project Lead – Andrew Kates</a:t>
+            </a:r>
+          </a:p>
+          <a:p>
+            <a:pPr>
+              <a:spcBef>
+                <a:spcPts val="0"/>
+              </a:spcBef>
+            </a:pPr>
+            <a:r>
+              <a:rPr lang="en-CA" sz="2400" dirty="0">
+                <a:solidFill>
+                  <a:srgbClr val="002060"/>
+                </a:solidFill>
+              </a:rPr>
+              <a:t>Experience in RTP leadership + applied sport/data science</a:t>
+            </a:r>
+          </a:p>
+          <a:p>
+            <a:pPr>
+              <a:spcBef>
+                <a:spcPts val="0"/>
+              </a:spcBef>
+            </a:pPr>
+            <a:r>
+              <a:rPr lang="en-CA" sz="2400" dirty="0">
+                <a:solidFill>
+                  <a:srgbClr val="002060"/>
+                </a:solidFill>
+              </a:rPr>
+              <a:t>History of delivering outcomes</a:t>
+            </a:r>
+          </a:p>
+          <a:p>
+            <a:pPr>
+              <a:spcBef>
+                <a:spcPts val="0"/>
+              </a:spcBef>
+            </a:pPr>
+            <a:r>
+              <a:rPr lang="en-CA" sz="2400" dirty="0">
+                <a:solidFill>
+                  <a:srgbClr val="002060"/>
+                </a:solidFill>
+              </a:rPr>
+              <a:t>Practical Approach + Research/Innovation</a:t>
+            </a:r>
+          </a:p>
+          <a:p>
+            <a:pPr>
+              <a:spcBef>
+                <a:spcPts val="0"/>
+              </a:spcBef>
+            </a:pPr>
+            <a:endParaRPr lang="en-CA" sz="2400" dirty="0">
+              <a:solidFill>
+                <a:srgbClr val="002060"/>
+              </a:solidFill>
+            </a:endParaRPr>
+          </a:p>
+          <a:p>
+            <a:pPr marL="0" indent="0">
+              <a:spcBef>
+                <a:spcPts val="0"/>
+              </a:spcBef>
+              <a:buNone/>
+            </a:pPr>
+            <a:r>
+              <a:rPr lang="en-CA" sz="2400" b="1" dirty="0">
+                <a:solidFill>
+                  <a:srgbClr val="002060"/>
+                </a:solidFill>
+              </a:rPr>
+              <a:t>Initial Support – Craig, Marc</a:t>
+            </a:r>
+          </a:p>
+          <a:p>
+            <a:pPr>
+              <a:spcBef>
+                <a:spcPts val="0"/>
+              </a:spcBef>
+            </a:pPr>
+            <a:r>
+              <a:rPr lang="en-CA" sz="2400" dirty="0">
+                <a:solidFill>
+                  <a:srgbClr val="002060"/>
+                </a:solidFill>
+              </a:rPr>
+              <a:t>Experience, Expertise, Network</a:t>
+            </a:r>
+          </a:p>
+          <a:p>
+            <a:pPr>
+              <a:spcBef>
+                <a:spcPts val="0"/>
+              </a:spcBef>
+            </a:pPr>
+            <a:endParaRPr lang="en-CA" sz="2400" dirty="0">
+              <a:solidFill>
+                <a:srgbClr val="002060"/>
+              </a:solidFill>
+            </a:endParaRPr>
+          </a:p>
+          <a:p>
+            <a:pPr marL="0" indent="0">
+              <a:spcBef>
+                <a:spcPts val="0"/>
+              </a:spcBef>
+              <a:buNone/>
+            </a:pPr>
+            <a:r>
+              <a:rPr lang="en-CA" sz="2400" b="1" dirty="0">
+                <a:solidFill>
+                  <a:srgbClr val="002060"/>
+                </a:solidFill>
+              </a:rPr>
+              <a:t>Expanded Support</a:t>
+            </a:r>
+          </a:p>
+          <a:p>
+            <a:pPr>
+              <a:spcBef>
+                <a:spcPts val="0"/>
+              </a:spcBef>
+            </a:pPr>
+            <a:r>
+              <a:rPr lang="en-CA" sz="2400" dirty="0">
+                <a:solidFill>
+                  <a:srgbClr val="002060"/>
+                </a:solidFill>
+              </a:rPr>
+              <a:t>Surgery, Physiotherapy, Physiology, Nutrition, Mental Performance, DS-BPA</a:t>
+            </a:r>
+          </a:p>
+          <a:p>
+            <a:pPr marL="0" indent="0">
+              <a:spcBef>
+                <a:spcPts val="0"/>
+              </a:spcBef>
+              <a:buNone/>
+            </a:pPr>
+            <a:endParaRPr lang="en-CA" sz="2400" b="1" i="1" dirty="0">
+              <a:solidFill>
+                <a:srgbClr val="002060"/>
+              </a:solidFill>
+            </a:endParaRPr>
+          </a:p>
+        </p:txBody>
+      </p:sp>
+      <p:pic>
+        <p:nvPicPr>
+          <p:cNvPr id="5" name="Picture 8"/>
+          <p:cNvPicPr>
+            <a:picLocks noChangeAspect="1"/>
+          </p:cNvPicPr>
+          <p:nvPr/>
+        </p:nvPicPr>
+        <p:blipFill rotWithShape="1">
+          <a:blip r:embed="rId3">
+            <a:extLst>
+              <a:ext uri="{28A0092B-C50C-407E-A947-70E740481C1C}">
+                <a14:useLocalDpi xmlns:a14="http://schemas.microsoft.com/office/drawing/2010/main" val="0"/>
+              </a:ext>
+            </a:extLst>
+          </a:blip>
+          <a:srcRect l="7777" t="45360" r="61009"/>
+          <a:stretch/>
+        </p:blipFill>
+        <p:spPr bwMode="auto">
+          <a:xfrm>
+            <a:off x="1" y="2792361"/>
+            <a:ext cx="2042809" cy="1955992"/>
+          </a:xfrm>
+          <a:prstGeom prst="rect">
+            <a:avLst/>
+          </a:prstGeom>
+          <a:noFill/>
+          <a:ln>
+            <a:noFill/>
+          </a:ln>
+          <a:extLst>
+            <a:ext uri="{909E8E84-426E-40DD-AFC4-6F175D3DCCD1}">
+              <a14:hiddenFill xmlns:a14="http://schemas.microsoft.com/office/drawing/2010/main">
+                <a:solidFill>
+                  <a:srgbClr val="FFFFFF"/>
+                </a:solidFill>
+              </a14:hiddenFill>
+            </a:ext>
+            <a:ext uri="{91240B29-F687-4F45-9708-019B960494DF}">
+              <a14:hiddenLine xmlns:a14="http://schemas.microsoft.com/office/drawing/2010/main" w="9525">
+                <a:solidFill>
+                  <a:srgbClr val="000000"/>
+                </a:solidFill>
+                <a:miter lim="800000"/>
+                <a:headEnd/>
+                <a:tailEnd/>
+              </a14:hiddenLine>
+            </a:ext>
+          </a:extLst>
+        </p:spPr>
+      </p:pic>
+    </p:spTree>
+    <p:extLst>
+      <p:ext uri="{BB962C8B-B14F-4D97-AF65-F5344CB8AC3E}">
+        <p14:creationId xmlns:p14="http://schemas.microsoft.com/office/powerpoint/2010/main" val="310404465"/>
+      </p:ext>
+    </p:extLst>
+  </p:cSld>
+  <p:clrMapOvr>
+    <a:masterClrMapping/>
+  </p:clrMapOvr>
+  <mc:AlternateContent xmlns:mc="http://schemas.openxmlformats.org/markup-compatibility/2006" xmlns:p14="http://schemas.microsoft.com/office/powerpoint/2010/main">
+    <mc:Choice Requires="p14">
+      <p:transition spd="med" p14:dur="700">
+        <p:fade/>
+      </p:transition>
+    </mc:Choice>
+    <mc:Fallback xmlns="">
+      <p:transition spd="med">
+        <p:fade/>
+      </p:transition>
+    </mc:Fallback>
+  </mc:AlternateContent>
+  <p:timing>
+    <p:tnLst>
+      <p:par>
+        <p:cTn id="1" dur="indefinite" restart="never" nodeType="tmRoot">
+          <p:childTnLst>
+            <p:seq concurrent="1" nextAc="seek">
+              <p:cTn id="2" dur="indefinite" nodeType="mainSeq">
+                <p:childTnLst>
+                  <p:par>
+                    <p:cTn id="3" fill="hold">
+                      <p:stCondLst>
+                        <p:cond delay="indefinite"/>
+                      </p:stCondLst>
+                      <p:childTnLst>
+                        <p:par>
+                          <p:cTn id="4" fill="hold">
+                            <p:stCondLst>
+                              <p:cond delay="0"/>
+                            </p:stCondLst>
+                            <p:childTnLst>
+                              <p:par>
+                                <p:cTn id="5" presetID="1" presetClass="entr" presetSubtype="0" fill="hold" nodeType="clickEffect">
+                                  <p:stCondLst>
+                                    <p:cond delay="0"/>
+                                  </p:stCondLst>
+                                  <p:childTnLst>
+                                    <p:set>
+                                      <p:cBhvr>
+                                        <p:cTn id="6" dur="1" fill="hold">
+                                          <p:stCondLst>
+                                            <p:cond delay="0"/>
+                                          </p:stCondLst>
+                                        </p:cTn>
+                                        <p:tgtEl>
+                                          <p:spTgt spid="6">
+                                            <p:txEl>
+                                              <p:pRg st="5" end="5"/>
+                                            </p:txEl>
+                                          </p:spTgt>
+                                        </p:tgtEl>
+                                        <p:attrNameLst>
+                                          <p:attrName>style.visibility</p:attrName>
+                                        </p:attrNameLst>
+                                      </p:cBhvr>
+                                      <p:to>
+                                        <p:strVal val="visible"/>
+                                      </p:to>
+                                    </p:set>
+                                  </p:childTnLst>
+                                </p:cTn>
+                              </p:par>
+                              <p:par>
+                                <p:cTn id="7" presetID="1" presetClass="entr" presetSubtype="0" fill="hold" nodeType="withEffect">
+                                  <p:stCondLst>
+                                    <p:cond delay="0"/>
+                                  </p:stCondLst>
+                                  <p:childTnLst>
+                                    <p:set>
+                                      <p:cBhvr>
+                                        <p:cTn id="8" dur="1" fill="hold">
+                                          <p:stCondLst>
+                                            <p:cond delay="0"/>
+                                          </p:stCondLst>
+                                        </p:cTn>
+                                        <p:tgtEl>
+                                          <p:spTgt spid="6">
+                                            <p:txEl>
+                                              <p:pRg st="6" end="6"/>
+                                            </p:txEl>
+                                          </p:spTgt>
+                                        </p:tgtEl>
+                                        <p:attrNameLst>
+                                          <p:attrName>style.visibility</p:attrName>
+                                        </p:attrNameLst>
+                                      </p:cBhvr>
+                                      <p:to>
+                                        <p:strVal val="visible"/>
+                                      </p:to>
+                                    </p:set>
+                                  </p:childTnLst>
+                                </p:cTn>
+                              </p:par>
+                              <p:par>
+                                <p:cTn id="9" presetID="1" presetClass="entr" presetSubtype="0" fill="hold" nodeType="withEffect">
+                                  <p:stCondLst>
+                                    <p:cond delay="0"/>
+                                  </p:stCondLst>
+                                  <p:childTnLst>
+                                    <p:set>
+                                      <p:cBhvr>
+                                        <p:cTn id="10" dur="1" fill="hold">
+                                          <p:stCondLst>
+                                            <p:cond delay="0"/>
+                                          </p:stCondLst>
+                                        </p:cTn>
+                                        <p:tgtEl>
+                                          <p:spTgt spid="6">
+                                            <p:txEl>
+                                              <p:pRg st="8" end="8"/>
+                                            </p:txEl>
+                                          </p:spTgt>
+                                        </p:tgtEl>
+                                        <p:attrNameLst>
+                                          <p:attrName>style.visibility</p:attrName>
+                                        </p:attrNameLst>
+                                      </p:cBhvr>
+                                      <p:to>
+                                        <p:strVal val="visible"/>
+                                      </p:to>
+                                    </p:set>
+                                  </p:childTnLst>
+                                </p:cTn>
+                              </p:par>
+                              <p:par>
+                                <p:cTn id="11" presetID="1" presetClass="entr" presetSubtype="0" fill="hold" nodeType="withEffect">
+                                  <p:stCondLst>
+                                    <p:cond delay="0"/>
+                                  </p:stCondLst>
+                                  <p:childTnLst>
+                                    <p:set>
+                                      <p:cBhvr>
+                                        <p:cTn id="12" dur="1" fill="hold">
+                                          <p:stCondLst>
+                                            <p:cond delay="0"/>
+                                          </p:stCondLst>
+                                        </p:cTn>
+                                        <p:tgtEl>
+                                          <p:spTgt spid="6">
+                                            <p:txEl>
+                                              <p:pRg st="9" end="9"/>
+                                            </p:txEl>
+                                          </p:spTgt>
+                                        </p:tgtEl>
+                                        <p:attrNameLst>
+                                          <p:attrName>style.visibility</p:attrName>
+                                        </p:attrNameLst>
+                                      </p:cBhvr>
+                                      <p:to>
+                                        <p:strVal val="visible"/>
+                                      </p:to>
+                                    </p:set>
+                                  </p:childTnLst>
+                                </p:cTn>
+                              </p:par>
+                            </p:childTnLst>
+                          </p:cTn>
+                        </p:par>
+                      </p:childTnLst>
+                    </p:cTn>
+                  </p:par>
+                </p:childTnLst>
+              </p:cTn>
+              <p:prevCondLst>
+                <p:cond evt="onPrev" delay="0">
+                  <p:tgtEl>
+                    <p:sldTgt/>
+                  </p:tgtEl>
+                </p:cond>
+              </p:prevCondLst>
+              <p:nextCondLst>
+                <p:cond evt="onNext" delay="0">
+                  <p:tgtEl>
+                    <p:sldTgt/>
+                  </p:tgtEl>
+                </p:cond>
+              </p:nextCondLst>
+            </p:seq>
+          </p:childTnLst>
+        </p:cTn>
+      </p:par>
+    </p:tnLst>
+  </p:timing>
+</p:sld>
+</file>
+
+<file path=ppt/slides/slide11.xml><?xml version="1.0" encoding="utf-8"?>
+<p:sld xmlns:a="http://schemas.openxmlformats.org/drawingml/2006/main" xmlns:r="http://schemas.openxmlformats.org/officeDocument/2006/relationships" xmlns:p="http://schemas.openxmlformats.org/presentationml/2006/main">
+  <p:cSld>
+    <p:spTree>
+      <p:nvGrpSpPr>
+        <p:cNvPr id="1" name=""/>
+        <p:cNvGrpSpPr/>
+        <p:nvPr/>
+      </p:nvGrpSpPr>
+      <p:grpSpPr>
+        <a:xfrm>
+          <a:off x="0" y="0"/>
+          <a:ext cx="0" cy="0"/>
+          <a:chOff x="0" y="0"/>
+          <a:chExt cx="0" cy="0"/>
+        </a:xfrm>
+      </p:grpSpPr>
+      <p:sp>
+        <p:nvSpPr>
+          <p:cNvPr id="63490" name="Rectangle 2"/>
+          <p:cNvSpPr>
+            <a:spLocks noGrp="1" noChangeArrowheads="1"/>
+          </p:cNvSpPr>
+          <p:nvPr>
+            <p:ph type="title"/>
+          </p:nvPr>
+        </p:nvSpPr>
+        <p:spPr>
+          <a:xfrm>
+            <a:off x="286747" y="1104559"/>
+            <a:ext cx="6660232" cy="565151"/>
+          </a:xfrm>
+          <a:noFill/>
+        </p:spPr>
+        <p:txBody>
+          <a:bodyPr>
+            <a:noAutofit/>
+          </a:bodyPr>
+          <a:lstStyle/>
+          <a:p>
+            <a:r>
+              <a:rPr lang="en-CA" sz="3733" dirty="0"/>
+              <a:t>Step 6.  Business Model </a:t>
+            </a:r>
+          </a:p>
+        </p:txBody>
+      </p:sp>
+      <p:sp>
+        <p:nvSpPr>
+          <p:cNvPr id="6" name="Rectangle 3"/>
+          <p:cNvSpPr txBox="1">
+            <a:spLocks noChangeArrowheads="1"/>
+          </p:cNvSpPr>
+          <p:nvPr/>
+        </p:nvSpPr>
+        <p:spPr>
+          <a:xfrm>
+            <a:off x="358979" y="1962879"/>
+            <a:ext cx="6453945" cy="4038676"/>
+          </a:xfrm>
+          <a:prstGeom prst="rect">
+            <a:avLst/>
+          </a:prstGeom>
+        </p:spPr>
+        <p:txBody>
+          <a:bodyPr vert="horz" lIns="91440" tIns="45720" rIns="91440" bIns="45720" rtlCol="0">
+            <a:noAutofit/>
+          </a:bodyPr>
+          <a:lstStyle>
+            <a:lvl1pPr marL="342900" indent="-342900" algn="l" defTabSz="914400" rtl="0" eaLnBrk="1" latinLnBrk="0" hangingPunct="1">
+              <a:spcBef>
+                <a:spcPct val="20000"/>
+              </a:spcBef>
+              <a:buFont typeface="Arial" pitchFamily="34" charset="0"/>
+              <a:buChar char="•"/>
+              <a:defRPr sz="3200" kern="1200">
+                <a:solidFill>
+                  <a:schemeClr val="tx1"/>
+                </a:solidFill>
+                <a:latin typeface="Arial" pitchFamily="34" charset="0"/>
+                <a:ea typeface="+mn-ea"/>
+                <a:cs typeface="Arial" pitchFamily="34" charset="0"/>
+              </a:defRPr>
+            </a:lvl1pPr>
+            <a:lvl2pPr marL="742950" indent="-285750" algn="l" defTabSz="914400" rtl="0" eaLnBrk="1" latinLnBrk="0" hangingPunct="1">
+              <a:spcBef>
+                <a:spcPct val="20000"/>
+              </a:spcBef>
+              <a:buFont typeface="Arial" pitchFamily="34" charset="0"/>
+              <a:buChar char="–"/>
+              <a:defRPr sz="2000" kern="1200" baseline="0">
+                <a:solidFill>
+                  <a:schemeClr val="tx1"/>
+                </a:solidFill>
+                <a:latin typeface="Arial" pitchFamily="34" charset="0"/>
+                <a:ea typeface="+mn-ea"/>
+                <a:cs typeface="Arial" pitchFamily="34" charset="0"/>
+              </a:defRPr>
+            </a:lvl2pPr>
+            <a:lvl3pPr marL="1143000" indent="-228600" algn="l" defTabSz="914400" rtl="0" eaLnBrk="1" latinLnBrk="0" hangingPunct="1">
+              <a:spcBef>
+                <a:spcPct val="20000"/>
+              </a:spcBef>
+              <a:buFont typeface="Arial" pitchFamily="34" charset="0"/>
+              <a:buChar char="•"/>
+              <a:defRPr sz="1800" kern="1200" baseline="0">
+                <a:solidFill>
+                  <a:schemeClr val="tx1"/>
+                </a:solidFill>
+                <a:latin typeface="Arial" pitchFamily="34" charset="0"/>
+                <a:ea typeface="+mn-ea"/>
+                <a:cs typeface="Arial" pitchFamily="34" charset="0"/>
+              </a:defRPr>
+            </a:lvl3pPr>
+            <a:lvl4pPr marL="1600200" indent="-228600" algn="l" defTabSz="914400" rtl="0" eaLnBrk="1" latinLnBrk="0" hangingPunct="1">
+              <a:spcBef>
+                <a:spcPct val="20000"/>
+              </a:spcBef>
+              <a:buFont typeface="Arial" pitchFamily="34" charset="0"/>
+              <a:buChar char="–"/>
+              <a:defRPr sz="1600" kern="1200" baseline="0">
+                <a:solidFill>
+                  <a:schemeClr val="tx1"/>
+                </a:solidFill>
+                <a:latin typeface="Arial" pitchFamily="34" charset="0"/>
+                <a:ea typeface="+mn-ea"/>
+                <a:cs typeface="Arial" pitchFamily="34" charset="0"/>
+              </a:defRPr>
+            </a:lvl4pPr>
+            <a:lvl5pPr marL="2057400" indent="-228600" algn="l" defTabSz="914400" rtl="0" eaLnBrk="1" latinLnBrk="0" hangingPunct="1">
+              <a:spcBef>
+                <a:spcPct val="20000"/>
+              </a:spcBef>
+              <a:buFont typeface="Arial" pitchFamily="34" charset="0"/>
+              <a:buChar char="»"/>
+              <a:defRPr sz="1400" kern="1200" baseline="0">
+                <a:solidFill>
+                  <a:schemeClr val="tx1"/>
+                </a:solidFill>
+                <a:latin typeface="Arial" pitchFamily="34" charset="0"/>
+                <a:ea typeface="+mn-ea"/>
+                <a:cs typeface="Arial" pitchFamily="34" charset="0"/>
+              </a:defRPr>
+            </a:lvl5pPr>
+            <a:lvl6pPr marL="2514600" indent="-228600" algn="l" defTabSz="914400" rtl="0" eaLnBrk="1" latinLnBrk="0" hangingPunct="1">
+              <a:spcBef>
+                <a:spcPct val="20000"/>
+              </a:spcBef>
+              <a:buFont typeface="Arial" pitchFamily="34" charset="0"/>
+              <a:buChar char="•"/>
+              <a:defRPr sz="2000" kern="1200">
+                <a:solidFill>
+                  <a:schemeClr val="tx1"/>
+                </a:solidFill>
+                <a:latin typeface="+mn-lt"/>
+                <a:ea typeface="+mn-ea"/>
+                <a:cs typeface="+mn-cs"/>
+              </a:defRPr>
+            </a:lvl6pPr>
+            <a:lvl7pPr marL="2971800" indent="-228600" algn="l" defTabSz="914400" rtl="0" eaLnBrk="1" latinLnBrk="0" hangingPunct="1">
+              <a:spcBef>
+                <a:spcPct val="20000"/>
+              </a:spcBef>
+              <a:buFont typeface="Arial" pitchFamily="34" charset="0"/>
+              <a:buChar char="•"/>
+              <a:defRPr sz="2000" kern="1200">
+                <a:solidFill>
+                  <a:schemeClr val="tx1"/>
+                </a:solidFill>
+                <a:latin typeface="+mn-lt"/>
+                <a:ea typeface="+mn-ea"/>
+                <a:cs typeface="+mn-cs"/>
+              </a:defRPr>
+            </a:lvl7pPr>
+            <a:lvl8pPr marL="3429000" indent="-228600" algn="l" defTabSz="914400" rtl="0" eaLnBrk="1" latinLnBrk="0" hangingPunct="1">
+              <a:spcBef>
+                <a:spcPct val="20000"/>
+              </a:spcBef>
+              <a:buFont typeface="Arial" pitchFamily="34" charset="0"/>
+              <a:buChar char="•"/>
+              <a:defRPr sz="2000" kern="1200">
+                <a:solidFill>
+                  <a:schemeClr val="tx1"/>
+                </a:solidFill>
+                <a:latin typeface="+mn-lt"/>
+                <a:ea typeface="+mn-ea"/>
+                <a:cs typeface="+mn-cs"/>
+              </a:defRPr>
+            </a:lvl8pPr>
+            <a:lvl9pPr marL="3886200" indent="-228600" algn="l" defTabSz="914400" rtl="0" eaLnBrk="1" latinLnBrk="0" hangingPunct="1">
+              <a:spcBef>
+                <a:spcPct val="20000"/>
+              </a:spcBef>
+              <a:buFont typeface="Arial" pitchFamily="34" charset="0"/>
+              <a:buChar char="•"/>
+              <a:defRPr sz="2000" kern="1200">
+                <a:solidFill>
+                  <a:schemeClr val="tx1"/>
+                </a:solidFill>
+                <a:latin typeface="+mn-lt"/>
+                <a:ea typeface="+mn-ea"/>
+                <a:cs typeface="+mn-cs"/>
+              </a:defRPr>
+            </a:lvl9pPr>
+          </a:lstStyle>
+          <a:p>
+            <a:pPr marL="0" indent="0">
+              <a:spcBef>
+                <a:spcPts val="0"/>
+              </a:spcBef>
+              <a:buNone/>
+            </a:pPr>
+            <a:r>
+              <a:rPr lang="en-CA" sz="2400" b="1" i="1" dirty="0">
+                <a:solidFill>
+                  <a:srgbClr val="002060"/>
+                </a:solidFill>
+              </a:rPr>
+              <a:t>Subscription business model:</a:t>
+            </a:r>
+          </a:p>
+          <a:p>
+            <a:pPr>
+              <a:spcBef>
+                <a:spcPts val="0"/>
+              </a:spcBef>
+            </a:pPr>
+            <a:r>
+              <a:rPr lang="en-CA" sz="2400" dirty="0">
+                <a:solidFill>
+                  <a:srgbClr val="002060"/>
+                </a:solidFill>
+              </a:rPr>
+              <a:t>Monthly cost per athlete</a:t>
+            </a:r>
+          </a:p>
+          <a:p>
+            <a:pPr>
+              <a:spcBef>
+                <a:spcPts val="0"/>
+              </a:spcBef>
+            </a:pPr>
+            <a:r>
+              <a:rPr lang="en-CA" sz="2400" dirty="0">
+                <a:solidFill>
+                  <a:srgbClr val="002060"/>
+                </a:solidFill>
+              </a:rPr>
+              <a:t>$$$ ~ time commitment, service integration</a:t>
+            </a:r>
+          </a:p>
+          <a:p>
+            <a:pPr marL="0" indent="0">
+              <a:spcBef>
+                <a:spcPts val="0"/>
+              </a:spcBef>
+              <a:buNone/>
+            </a:pPr>
+            <a:endParaRPr lang="en-CA" sz="2400" b="1" i="1" dirty="0">
+              <a:solidFill>
+                <a:srgbClr val="002060"/>
+              </a:solidFill>
+            </a:endParaRPr>
+          </a:p>
+          <a:p>
+            <a:pPr marL="0" indent="0">
+              <a:spcBef>
+                <a:spcPts val="0"/>
+              </a:spcBef>
+              <a:buNone/>
+            </a:pPr>
+            <a:endParaRPr lang="en-CA" sz="2400" b="1" i="1" dirty="0">
+              <a:solidFill>
+                <a:srgbClr val="002060"/>
+              </a:solidFill>
+            </a:endParaRPr>
+          </a:p>
+          <a:p>
+            <a:pPr marL="0" indent="0">
+              <a:spcBef>
+                <a:spcPts val="0"/>
+              </a:spcBef>
+              <a:buNone/>
+            </a:pPr>
+            <a:r>
+              <a:rPr lang="en-CA" sz="2400" b="1" i="1" dirty="0">
+                <a:solidFill>
+                  <a:srgbClr val="002060"/>
+                </a:solidFill>
+              </a:rPr>
+              <a:t>Upfront business model:</a:t>
+            </a:r>
+          </a:p>
+          <a:p>
+            <a:pPr>
+              <a:spcBef>
+                <a:spcPts val="0"/>
+              </a:spcBef>
+            </a:pPr>
+            <a:r>
+              <a:rPr lang="en-CA" sz="2400" dirty="0">
+                <a:solidFill>
+                  <a:srgbClr val="002060"/>
+                </a:solidFill>
+              </a:rPr>
+              <a:t>NSOs pay upfront for access to this program in full</a:t>
+            </a:r>
+          </a:p>
+          <a:p>
+            <a:pPr>
+              <a:spcBef>
+                <a:spcPts val="0"/>
+              </a:spcBef>
+            </a:pPr>
+            <a:r>
+              <a:rPr lang="en-CA" sz="2400" dirty="0">
+                <a:solidFill>
+                  <a:srgbClr val="002060"/>
+                </a:solidFill>
+              </a:rPr>
+              <a:t>Less expensive, cost certainty</a:t>
+            </a:r>
+          </a:p>
+        </p:txBody>
+      </p:sp>
+      <p:graphicFrame>
+        <p:nvGraphicFramePr>
+          <p:cNvPr id="3" name="Diagram 2">
+            <a:extLst>
+              <a:ext uri="{FF2B5EF4-FFF2-40B4-BE49-F238E27FC236}">
+                <a16:creationId xmlns:a16="http://schemas.microsoft.com/office/drawing/2014/main" id="{F4A1F89C-3934-2C7C-CDDF-016B44BD3395}"/>
+              </a:ext>
+            </a:extLst>
+          </p:cNvPr>
+          <p:cNvGraphicFramePr/>
+          <p:nvPr>
+            <p:extLst>
+              <p:ext uri="{D42A27DB-BD31-4B8C-83A1-F6EECF244321}">
+                <p14:modId xmlns:p14="http://schemas.microsoft.com/office/powerpoint/2010/main" val="3795215523"/>
+              </p:ext>
+            </p:extLst>
+          </p:nvPr>
+        </p:nvGraphicFramePr>
+        <p:xfrm>
+          <a:off x="6133165" y="1382751"/>
+          <a:ext cx="7394498" cy="4755582"/>
+        </p:xfrm>
+        <a:graphic>
+          <a:graphicData uri="http://schemas.openxmlformats.org/drawingml/2006/diagram">
+            <dgm:relIds xmlns:dgm="http://schemas.openxmlformats.org/drawingml/2006/diagram" xmlns:r="http://schemas.openxmlformats.org/officeDocument/2006/relationships" r:dm="rId3" r:lo="rId4" r:qs="rId5" r:cs="rId6"/>
+          </a:graphicData>
+        </a:graphic>
+      </p:graphicFrame>
+    </p:spTree>
+    <p:extLst>
+      <p:ext uri="{BB962C8B-B14F-4D97-AF65-F5344CB8AC3E}">
+        <p14:creationId xmlns:p14="http://schemas.microsoft.com/office/powerpoint/2010/main" val="21241760"/>
+      </p:ext>
+    </p:extLst>
+  </p:cSld>
+  <p:clrMapOvr>
+    <a:masterClrMapping/>
+  </p:clrMapOvr>
+  <mc:AlternateContent xmlns:mc="http://schemas.openxmlformats.org/markup-compatibility/2006" xmlns:p14="http://schemas.microsoft.com/office/powerpoint/2010/main">
+    <mc:Choice Requires="p14">
+      <p:transition spd="med" p14:dur="700">
+        <p:fade/>
+      </p:transition>
+    </mc:Choice>
+    <mc:Fallback xmlns="">
+      <p:transition spd="med">
+        <p:fade/>
+      </p:transition>
+    </mc:Fallback>
+  </mc:AlternateContent>
+  <p:timing>
+    <p:tnLst>
+      <p:par>
+        <p:cTn id="1" dur="indefinite" restart="never" nodeType="tmRoot">
+          <p:childTnLst>
+            <p:seq concurrent="1" nextAc="seek">
+              <p:cTn id="2" dur="indefinite" nodeType="mainSeq">
+                <p:childTnLst>
+                  <p:par>
+                    <p:cTn id="3" fill="hold">
+                      <p:stCondLst>
+                        <p:cond delay="indefinite"/>
+                      </p:stCondLst>
+                      <p:childTnLst>
+                        <p:par>
+                          <p:cTn id="4" fill="hold">
+                            <p:stCondLst>
+                              <p:cond delay="0"/>
+                            </p:stCondLst>
+                            <p:childTnLst>
+                              <p:par>
+                                <p:cTn id="5" presetID="1" presetClass="entr" presetSubtype="0" fill="hold" nodeType="clickEffect">
+                                  <p:stCondLst>
+                                    <p:cond delay="0"/>
+                                  </p:stCondLst>
+                                  <p:childTnLst>
+                                    <p:set>
+                                      <p:cBhvr>
+                                        <p:cTn id="6" dur="1" fill="hold">
+                                          <p:stCondLst>
+                                            <p:cond delay="0"/>
+                                          </p:stCondLst>
+                                        </p:cTn>
+                                        <p:tgtEl>
+                                          <p:spTgt spid="6">
+                                            <p:txEl>
+                                              <p:pRg st="0" end="0"/>
+                                            </p:txEl>
+                                          </p:spTgt>
+                                        </p:tgtEl>
+                                        <p:attrNameLst>
+                                          <p:attrName>style.visibility</p:attrName>
+                                        </p:attrNameLst>
+                                      </p:cBhvr>
+                                      <p:to>
+                                        <p:strVal val="visible"/>
+                                      </p:to>
+                                    </p:set>
+                                  </p:childTnLst>
+                                </p:cTn>
+                              </p:par>
+                              <p:par>
+                                <p:cTn id="7" presetID="1" presetClass="entr" presetSubtype="0" fill="hold" nodeType="withEffect">
+                                  <p:stCondLst>
+                                    <p:cond delay="0"/>
+                                  </p:stCondLst>
+                                  <p:childTnLst>
+                                    <p:set>
+                                      <p:cBhvr>
+                                        <p:cTn id="8" dur="1" fill="hold">
+                                          <p:stCondLst>
+                                            <p:cond delay="0"/>
+                                          </p:stCondLst>
+                                        </p:cTn>
+                                        <p:tgtEl>
+                                          <p:spTgt spid="6">
+                                            <p:txEl>
+                                              <p:pRg st="1" end="1"/>
+                                            </p:txEl>
+                                          </p:spTgt>
+                                        </p:tgtEl>
+                                        <p:attrNameLst>
+                                          <p:attrName>style.visibility</p:attrName>
+                                        </p:attrNameLst>
+                                      </p:cBhvr>
+                                      <p:to>
+                                        <p:strVal val="visible"/>
+                                      </p:to>
+                                    </p:set>
+                                  </p:childTnLst>
+                                </p:cTn>
+                              </p:par>
+                              <p:par>
+                                <p:cTn id="9" presetID="1" presetClass="entr" presetSubtype="0" fill="hold" nodeType="withEffect">
+                                  <p:stCondLst>
+                                    <p:cond delay="0"/>
+                                  </p:stCondLst>
+                                  <p:childTnLst>
+                                    <p:set>
+                                      <p:cBhvr>
+                                        <p:cTn id="10" dur="1" fill="hold">
+                                          <p:stCondLst>
+                                            <p:cond delay="0"/>
+                                          </p:stCondLst>
+                                        </p:cTn>
+                                        <p:tgtEl>
+                                          <p:spTgt spid="6">
+                                            <p:txEl>
+                                              <p:pRg st="2" end="2"/>
+                                            </p:txEl>
+                                          </p:spTgt>
+                                        </p:tgtEl>
+                                        <p:attrNameLst>
+                                          <p:attrName>style.visibility</p:attrName>
+                                        </p:attrNameLst>
+                                      </p:cBhvr>
+                                      <p:to>
+                                        <p:strVal val="visible"/>
+                                      </p:to>
+                                    </p:set>
+                                  </p:childTnLst>
+                                </p:cTn>
+                              </p:par>
+                              <p:par>
+                                <p:cTn id="11" presetID="1" presetClass="entr" presetSubtype="0" fill="hold" grpId="0" nodeType="withEffect">
+                                  <p:stCondLst>
+                                    <p:cond delay="0"/>
+                                  </p:stCondLst>
+                                  <p:childTnLst>
+                                    <p:set>
+                                      <p:cBhvr>
+                                        <p:cTn id="12" dur="1" fill="hold">
+                                          <p:stCondLst>
+                                            <p:cond delay="0"/>
+                                          </p:stCondLst>
+                                        </p:cTn>
+                                        <p:tgtEl>
+                                          <p:spTgt spid="3"/>
+                                        </p:tgtEl>
+                                        <p:attrNameLst>
+                                          <p:attrName>style.visibility</p:attrName>
+                                        </p:attrNameLst>
+                                      </p:cBhvr>
+                                      <p:to>
+                                        <p:strVal val="visible"/>
+                                      </p:to>
+                                    </p:set>
+                                  </p:childTnLst>
+                                </p:cTn>
+                              </p:par>
+                            </p:childTnLst>
+                          </p:cTn>
+                        </p:par>
+                      </p:childTnLst>
+                    </p:cTn>
+                  </p:par>
+                  <p:par>
+                    <p:cTn id="13" fill="hold">
+                      <p:stCondLst>
+                        <p:cond delay="indefinite"/>
+                      </p:stCondLst>
+                      <p:childTnLst>
+                        <p:par>
+                          <p:cTn id="14" fill="hold">
+                            <p:stCondLst>
+                              <p:cond delay="0"/>
+                            </p:stCondLst>
+                            <p:childTnLst>
+                              <p:par>
+                                <p:cTn id="15" presetID="1" presetClass="entr" presetSubtype="0" fill="hold" nodeType="clickEffect">
+                                  <p:stCondLst>
+                                    <p:cond delay="0"/>
+                                  </p:stCondLst>
+                                  <p:childTnLst>
+                                    <p:set>
+                                      <p:cBhvr>
+                                        <p:cTn id="16" dur="1" fill="hold">
+                                          <p:stCondLst>
+                                            <p:cond delay="0"/>
+                                          </p:stCondLst>
+                                        </p:cTn>
+                                        <p:tgtEl>
+                                          <p:spTgt spid="6">
+                                            <p:txEl>
+                                              <p:pRg st="5" end="5"/>
+                                            </p:txEl>
+                                          </p:spTgt>
+                                        </p:tgtEl>
+                                        <p:attrNameLst>
+                                          <p:attrName>style.visibility</p:attrName>
+                                        </p:attrNameLst>
+                                      </p:cBhvr>
+                                      <p:to>
+                                        <p:strVal val="visible"/>
+                                      </p:to>
+                                    </p:set>
+                                  </p:childTnLst>
+                                </p:cTn>
+                              </p:par>
+                              <p:par>
+                                <p:cTn id="17" presetID="1" presetClass="entr" presetSubtype="0" fill="hold" nodeType="withEffect">
+                                  <p:stCondLst>
+                                    <p:cond delay="0"/>
+                                  </p:stCondLst>
+                                  <p:childTnLst>
+                                    <p:set>
+                                      <p:cBhvr>
+                                        <p:cTn id="18" dur="1" fill="hold">
+                                          <p:stCondLst>
+                                            <p:cond delay="0"/>
+                                          </p:stCondLst>
+                                        </p:cTn>
+                                        <p:tgtEl>
+                                          <p:spTgt spid="6">
+                                            <p:txEl>
+                                              <p:pRg st="6" end="6"/>
+                                            </p:txEl>
+                                          </p:spTgt>
+                                        </p:tgtEl>
+                                        <p:attrNameLst>
+                                          <p:attrName>style.visibility</p:attrName>
+                                        </p:attrNameLst>
+                                      </p:cBhvr>
+                                      <p:to>
+                                        <p:strVal val="visible"/>
+                                      </p:to>
+                                    </p:set>
+                                  </p:childTnLst>
+                                </p:cTn>
+                              </p:par>
+                              <p:par>
+                                <p:cTn id="19" presetID="1" presetClass="entr" presetSubtype="0" fill="hold" nodeType="withEffect">
+                                  <p:stCondLst>
+                                    <p:cond delay="0"/>
+                                  </p:stCondLst>
+                                  <p:childTnLst>
+                                    <p:set>
+                                      <p:cBhvr>
+                                        <p:cTn id="20" dur="1" fill="hold">
+                                          <p:stCondLst>
+                                            <p:cond delay="0"/>
+                                          </p:stCondLst>
+                                        </p:cTn>
+                                        <p:tgtEl>
+                                          <p:spTgt spid="6">
+                                            <p:txEl>
+                                              <p:pRg st="7" end="7"/>
+                                            </p:txEl>
+                                          </p:spTgt>
+                                        </p:tgtEl>
+                                        <p:attrNameLst>
+                                          <p:attrName>style.visibility</p:attrName>
+                                        </p:attrNameLst>
+                                      </p:cBhvr>
+                                      <p:to>
+                                        <p:strVal val="visible"/>
+                                      </p:to>
+                                    </p:set>
+                                  </p:childTnLst>
+                                </p:cTn>
+                              </p:par>
+                            </p:childTnLst>
+                          </p:cTn>
+                        </p:par>
+                      </p:childTnLst>
+                    </p:cTn>
+                  </p:par>
+                </p:childTnLst>
+              </p:cTn>
+              <p:prevCondLst>
+                <p:cond evt="onPrev" delay="0">
+                  <p:tgtEl>
+                    <p:sldTgt/>
+                  </p:tgtEl>
+                </p:cond>
+              </p:prevCondLst>
+              <p:nextCondLst>
+                <p:cond evt="onNext" delay="0">
+                  <p:tgtEl>
+                    <p:sldTgt/>
+                  </p:tgtEl>
+                </p:cond>
+              </p:nextCondLst>
+            </p:seq>
+          </p:childTnLst>
+        </p:cTn>
+      </p:par>
+    </p:tnLst>
+    <p:bldLst>
+      <p:bldGraphic spid="3" grpId="0">
+        <p:bldAsOne/>
+      </p:bldGraphic>
+    </p:bldLst>
+  </p:timing>
+</p:sld>
+</file>
+
+<file path=ppt/slides/slide12.xml><?xml version="1.0" encoding="utf-8"?>
 <p:sld xmlns:a="http://schemas.openxmlformats.org/drawingml/2006/main" xmlns:r="http://schemas.openxmlformats.org/officeDocument/2006/relationships" xmlns:p="http://schemas.openxmlformats.org/presentationml/2006/main" show="0">
   <p:cSld>
     <p:spTree>
@@ -28847,7 +30328,7 @@
 </p:sld>
 </file>
 
-<file path=ppt/slides/slide11.xml><?xml version="1.0" encoding="utf-8"?>
+<file path=ppt/slides/slide13.xml><?xml version="1.0" encoding="utf-8"?>
 <p:sld xmlns:a="http://schemas.openxmlformats.org/drawingml/2006/main" xmlns:r="http://schemas.openxmlformats.org/officeDocument/2006/relationships" xmlns:p="http://schemas.openxmlformats.org/presentationml/2006/main">
   <p:cSld>
     <p:spTree>
@@ -28999,7 +30480,7 @@
 </p:sld>
 </file>
 
-<file path=ppt/slides/slide12.xml><?xml version="1.0" encoding="utf-8"?>
+<file path=ppt/slides/slide14.xml><?xml version="1.0" encoding="utf-8"?>
 <p:sld xmlns:a="http://schemas.openxmlformats.org/drawingml/2006/main" xmlns:r="http://schemas.openxmlformats.org/officeDocument/2006/relationships" xmlns:p="http://schemas.openxmlformats.org/presentationml/2006/main" show="0">
   <p:cSld>
     <p:spTree>
@@ -29138,7 +30619,7 @@
 </p:sld>
 </file>
 
-<file path=ppt/slides/slide13.xml><?xml version="1.0" encoding="utf-8"?>
+<file path=ppt/slides/slide15.xml><?xml version="1.0" encoding="utf-8"?>
 <p:sld xmlns:a="http://schemas.openxmlformats.org/drawingml/2006/main" xmlns:r="http://schemas.openxmlformats.org/officeDocument/2006/relationships" xmlns:p="http://schemas.openxmlformats.org/presentationml/2006/main" show="0">
   <p:cSld>
     <p:spTree>
@@ -30822,6 +32303,555 @@
       </p:grpSpPr>
       <p:sp>
         <p:nvSpPr>
+          <p:cNvPr id="2" name="Title 1">
+            <a:extLst>
+              <a:ext uri="{FF2B5EF4-FFF2-40B4-BE49-F238E27FC236}">
+                <a16:creationId xmlns:a16="http://schemas.microsoft.com/office/drawing/2014/main" id="{7AD3A37E-B017-9684-8292-92306C831849}"/>
+              </a:ext>
+            </a:extLst>
+          </p:cNvPr>
+          <p:cNvSpPr>
+            <a:spLocks noGrp="1"/>
+          </p:cNvSpPr>
+          <p:nvPr>
+            <p:ph type="title"/>
+          </p:nvPr>
+        </p:nvSpPr>
+        <p:spPr/>
+        <p:txBody>
+          <a:bodyPr/>
+          <a:lstStyle/>
+          <a:p>
+            <a:r>
+              <a:rPr lang="en-US" dirty="0"/>
+              <a:t>After the Tour</a:t>
+            </a:r>
+          </a:p>
+        </p:txBody>
+      </p:sp>
+      <p:sp>
+        <p:nvSpPr>
+          <p:cNvPr id="3" name="Text Placeholder 2">
+            <a:extLst>
+              <a:ext uri="{FF2B5EF4-FFF2-40B4-BE49-F238E27FC236}">
+                <a16:creationId xmlns:a16="http://schemas.microsoft.com/office/drawing/2014/main" id="{5EF710E7-21FE-102D-2DB6-CDE9B94C01EF}"/>
+              </a:ext>
+            </a:extLst>
+          </p:cNvPr>
+          <p:cNvSpPr>
+            <a:spLocks noGrp="1"/>
+          </p:cNvSpPr>
+          <p:nvPr>
+            <p:ph type="body" idx="1"/>
+          </p:nvPr>
+        </p:nvSpPr>
+        <p:spPr/>
+        <p:txBody>
+          <a:bodyPr/>
+          <a:lstStyle/>
+          <a:p>
+            <a:endParaRPr lang="en-US"/>
+          </a:p>
+        </p:txBody>
+      </p:sp>
+    </p:spTree>
+    <p:extLst>
+      <p:ext uri="{BB962C8B-B14F-4D97-AF65-F5344CB8AC3E}">
+        <p14:creationId xmlns:p14="http://schemas.microsoft.com/office/powerpoint/2010/main" val="1960656376"/>
+      </p:ext>
+    </p:extLst>
+  </p:cSld>
+  <p:clrMapOvr>
+    <a:masterClrMapping/>
+  </p:clrMapOvr>
+  <mc:AlternateContent xmlns:mc="http://schemas.openxmlformats.org/markup-compatibility/2006" xmlns:p14="http://schemas.microsoft.com/office/powerpoint/2010/main">
+    <mc:Choice Requires="p14">
+      <p:transition spd="med" p14:dur="700">
+        <p:fade/>
+      </p:transition>
+    </mc:Choice>
+    <mc:Fallback xmlns="">
+      <p:transition spd="med">
+        <p:fade/>
+      </p:transition>
+    </mc:Fallback>
+  </mc:AlternateContent>
+</p:sld>
+</file>
+
+<file path=ppt/slides/slide7.xml><?xml version="1.0" encoding="utf-8"?>
+<p:sld xmlns:a="http://schemas.openxmlformats.org/drawingml/2006/main" xmlns:r="http://schemas.openxmlformats.org/officeDocument/2006/relationships" xmlns:p="http://schemas.openxmlformats.org/presentationml/2006/main">
+  <p:cSld>
+    <p:spTree>
+      <p:nvGrpSpPr>
+        <p:cNvPr id="1" name=""/>
+        <p:cNvGrpSpPr/>
+        <p:nvPr/>
+      </p:nvGrpSpPr>
+      <p:grpSpPr>
+        <a:xfrm>
+          <a:off x="0" y="0"/>
+          <a:ext cx="0" cy="0"/>
+          <a:chOff x="0" y="0"/>
+          <a:chExt cx="0" cy="0"/>
+        </a:xfrm>
+      </p:grpSpPr>
+      <p:sp>
+        <p:nvSpPr>
+          <p:cNvPr id="2" name="Title 1">
+            <a:extLst>
+              <a:ext uri="{FF2B5EF4-FFF2-40B4-BE49-F238E27FC236}">
+                <a16:creationId xmlns:a16="http://schemas.microsoft.com/office/drawing/2014/main" id="{204749BF-0610-5307-2D7D-4D63AAAAFB20}"/>
+              </a:ext>
+            </a:extLst>
+          </p:cNvPr>
+          <p:cNvSpPr>
+            <a:spLocks noGrp="1"/>
+          </p:cNvSpPr>
+          <p:nvPr>
+            <p:ph type="title"/>
+          </p:nvPr>
+        </p:nvSpPr>
+        <p:spPr/>
+        <p:txBody>
+          <a:bodyPr/>
+          <a:lstStyle/>
+          <a:p>
+            <a:r>
+              <a:rPr lang="en-US" dirty="0"/>
+              <a:t>Implementation – Business Model</a:t>
+            </a:r>
+          </a:p>
+        </p:txBody>
+      </p:sp>
+      <p:sp>
+        <p:nvSpPr>
+          <p:cNvPr id="3" name="Text Placeholder 2">
+            <a:extLst>
+              <a:ext uri="{FF2B5EF4-FFF2-40B4-BE49-F238E27FC236}">
+                <a16:creationId xmlns:a16="http://schemas.microsoft.com/office/drawing/2014/main" id="{AA8218A9-E9CC-32B5-D297-CABB62CD1204}"/>
+              </a:ext>
+            </a:extLst>
+          </p:cNvPr>
+          <p:cNvSpPr>
+            <a:spLocks noGrp="1"/>
+          </p:cNvSpPr>
+          <p:nvPr>
+            <p:ph type="body" idx="1"/>
+          </p:nvPr>
+        </p:nvSpPr>
+        <p:spPr>
+          <a:xfrm>
+            <a:off x="360218" y="1825625"/>
+            <a:ext cx="11526982" cy="4351200"/>
+          </a:xfrm>
+        </p:spPr>
+        <p:txBody>
+          <a:bodyPr/>
+          <a:lstStyle/>
+          <a:p>
+            <a:pPr marL="609596" indent="-457200">
+              <a:lnSpc>
+                <a:spcPct val="150000"/>
+              </a:lnSpc>
+              <a:buFont typeface="+mj-lt"/>
+              <a:buAutoNum type="arabicPeriod"/>
+            </a:pPr>
+            <a:r>
+              <a:rPr lang="en-US" sz="2800" dirty="0"/>
+              <a:t>Collect previously unrealized revenue from ongoing service delivery</a:t>
+            </a:r>
+          </a:p>
+          <a:p>
+            <a:pPr marL="609596" indent="-457200">
+              <a:lnSpc>
+                <a:spcPct val="150000"/>
+              </a:lnSpc>
+              <a:buFont typeface="+mj-lt"/>
+              <a:buAutoNum type="arabicPeriod"/>
+            </a:pPr>
+            <a:r>
+              <a:rPr lang="en-US" sz="2800" dirty="0"/>
+              <a:t>Collect previously unrealized revenue from ongoing service delivery</a:t>
+            </a:r>
+          </a:p>
+          <a:p>
+            <a:pPr marL="609596" indent="-457200">
+              <a:lnSpc>
+                <a:spcPct val="150000"/>
+              </a:lnSpc>
+              <a:buFont typeface="+mj-lt"/>
+              <a:buAutoNum type="arabicPeriod"/>
+            </a:pPr>
+            <a:r>
+              <a:rPr lang="en-US" sz="2800" dirty="0"/>
+              <a:t>Collect previously unrealized revenue from ongoing service delivery</a:t>
+            </a:r>
+          </a:p>
+          <a:p>
+            <a:pPr marL="609596" indent="-457200">
+              <a:lnSpc>
+                <a:spcPct val="150000"/>
+              </a:lnSpc>
+              <a:buFont typeface="+mj-lt"/>
+              <a:buAutoNum type="arabicPeriod"/>
+            </a:pPr>
+            <a:r>
+              <a:rPr lang="en-US" sz="2800" dirty="0"/>
+              <a:t>Collect previously unrealized revenue from ongoing service delivery</a:t>
+            </a:r>
+          </a:p>
+          <a:p>
+            <a:pPr marL="609596" indent="-457200">
+              <a:lnSpc>
+                <a:spcPct val="150000"/>
+              </a:lnSpc>
+              <a:buFont typeface="+mj-lt"/>
+              <a:buAutoNum type="arabicPeriod"/>
+            </a:pPr>
+            <a:r>
+              <a:rPr lang="en-US" sz="2800" dirty="0"/>
+              <a:t>Collect previously unrealized revenue from ongoing service delivery</a:t>
+            </a:r>
+          </a:p>
+          <a:p>
+            <a:pPr marL="609596" indent="-457200">
+              <a:buFont typeface="+mj-lt"/>
+              <a:buAutoNum type="arabicPeriod"/>
+            </a:pPr>
+            <a:endParaRPr lang="en-US" sz="2800" dirty="0"/>
+          </a:p>
+          <a:p>
+            <a:pPr marL="609596" indent="-457200">
+              <a:buFont typeface="+mj-lt"/>
+              <a:buAutoNum type="arabicPeriod"/>
+            </a:pPr>
+            <a:endParaRPr lang="en-US" sz="2800" dirty="0"/>
+          </a:p>
+        </p:txBody>
+      </p:sp>
+    </p:spTree>
+    <p:extLst>
+      <p:ext uri="{BB962C8B-B14F-4D97-AF65-F5344CB8AC3E}">
+        <p14:creationId xmlns:p14="http://schemas.microsoft.com/office/powerpoint/2010/main" val="3163074255"/>
+      </p:ext>
+    </p:extLst>
+  </p:cSld>
+  <p:clrMapOvr>
+    <a:masterClrMapping/>
+  </p:clrMapOvr>
+  <mc:AlternateContent xmlns:mc="http://schemas.openxmlformats.org/markup-compatibility/2006" xmlns:p14="http://schemas.microsoft.com/office/powerpoint/2010/main">
+    <mc:Choice Requires="p14">
+      <p:transition spd="med" p14:dur="700">
+        <p:fade/>
+      </p:transition>
+    </mc:Choice>
+    <mc:Fallback xmlns="">
+      <p:transition spd="med">
+        <p:fade/>
+      </p:transition>
+    </mc:Fallback>
+  </mc:AlternateContent>
+  <p:timing>
+    <p:tnLst>
+      <p:par>
+        <p:cTn id="1" dur="indefinite" restart="never" nodeType="tmRoot">
+          <p:childTnLst>
+            <p:seq concurrent="1" nextAc="seek">
+              <p:cTn id="2" dur="indefinite" nodeType="mainSeq">
+                <p:childTnLst>
+                  <p:par>
+                    <p:cTn id="3" fill="hold">
+                      <p:stCondLst>
+                        <p:cond delay="indefinite"/>
+                      </p:stCondLst>
+                      <p:childTnLst>
+                        <p:par>
+                          <p:cTn id="4" fill="hold">
+                            <p:stCondLst>
+                              <p:cond delay="0"/>
+                            </p:stCondLst>
+                            <p:childTnLst>
+                              <p:par>
+                                <p:cTn id="5" presetID="1" presetClass="entr" presetSubtype="0" fill="hold" grpId="0" nodeType="clickEffect">
+                                  <p:stCondLst>
+                                    <p:cond delay="0"/>
+                                  </p:stCondLst>
+                                  <p:childTnLst>
+                                    <p:set>
+                                      <p:cBhvr>
+                                        <p:cTn id="6" dur="1" fill="hold">
+                                          <p:stCondLst>
+                                            <p:cond delay="0"/>
+                                          </p:stCondLst>
+                                        </p:cTn>
+                                        <p:tgtEl>
+                                          <p:spTgt spid="3">
+                                            <p:txEl>
+                                              <p:pRg st="0" end="0"/>
+                                            </p:txEl>
+                                          </p:spTgt>
+                                        </p:tgtEl>
+                                        <p:attrNameLst>
+                                          <p:attrName>style.visibility</p:attrName>
+                                        </p:attrNameLst>
+                                      </p:cBhvr>
+                                      <p:to>
+                                        <p:strVal val="visible"/>
+                                      </p:to>
+                                    </p:set>
+                                  </p:childTnLst>
+                                </p:cTn>
+                              </p:par>
+                            </p:childTnLst>
+                          </p:cTn>
+                        </p:par>
+                      </p:childTnLst>
+                    </p:cTn>
+                  </p:par>
+                  <p:par>
+                    <p:cTn id="7" fill="hold">
+                      <p:stCondLst>
+                        <p:cond delay="indefinite"/>
+                      </p:stCondLst>
+                      <p:childTnLst>
+                        <p:par>
+                          <p:cTn id="8" fill="hold">
+                            <p:stCondLst>
+                              <p:cond delay="0"/>
+                            </p:stCondLst>
+                            <p:childTnLst>
+                              <p:par>
+                                <p:cTn id="9" presetID="1" presetClass="entr" presetSubtype="0" fill="hold" grpId="0" nodeType="clickEffect">
+                                  <p:stCondLst>
+                                    <p:cond delay="0"/>
+                                  </p:stCondLst>
+                                  <p:childTnLst>
+                                    <p:set>
+                                      <p:cBhvr>
+                                        <p:cTn id="10" dur="1" fill="hold">
+                                          <p:stCondLst>
+                                            <p:cond delay="0"/>
+                                          </p:stCondLst>
+                                        </p:cTn>
+                                        <p:tgtEl>
+                                          <p:spTgt spid="3">
+                                            <p:txEl>
+                                              <p:pRg st="1" end="1"/>
+                                            </p:txEl>
+                                          </p:spTgt>
+                                        </p:tgtEl>
+                                        <p:attrNameLst>
+                                          <p:attrName>style.visibility</p:attrName>
+                                        </p:attrNameLst>
+                                      </p:cBhvr>
+                                      <p:to>
+                                        <p:strVal val="visible"/>
+                                      </p:to>
+                                    </p:set>
+                                  </p:childTnLst>
+                                </p:cTn>
+                              </p:par>
+                            </p:childTnLst>
+                          </p:cTn>
+                        </p:par>
+                      </p:childTnLst>
+                    </p:cTn>
+                  </p:par>
+                  <p:par>
+                    <p:cTn id="11" fill="hold">
+                      <p:stCondLst>
+                        <p:cond delay="indefinite"/>
+                      </p:stCondLst>
+                      <p:childTnLst>
+                        <p:par>
+                          <p:cTn id="12" fill="hold">
+                            <p:stCondLst>
+                              <p:cond delay="0"/>
+                            </p:stCondLst>
+                            <p:childTnLst>
+                              <p:par>
+                                <p:cTn id="13" presetID="1" presetClass="entr" presetSubtype="0" fill="hold" grpId="0" nodeType="clickEffect">
+                                  <p:stCondLst>
+                                    <p:cond delay="0"/>
+                                  </p:stCondLst>
+                                  <p:childTnLst>
+                                    <p:set>
+                                      <p:cBhvr>
+                                        <p:cTn id="14" dur="1" fill="hold">
+                                          <p:stCondLst>
+                                            <p:cond delay="0"/>
+                                          </p:stCondLst>
+                                        </p:cTn>
+                                        <p:tgtEl>
+                                          <p:spTgt spid="3">
+                                            <p:txEl>
+                                              <p:pRg st="2" end="2"/>
+                                            </p:txEl>
+                                          </p:spTgt>
+                                        </p:tgtEl>
+                                        <p:attrNameLst>
+                                          <p:attrName>style.visibility</p:attrName>
+                                        </p:attrNameLst>
+                                      </p:cBhvr>
+                                      <p:to>
+                                        <p:strVal val="visible"/>
+                                      </p:to>
+                                    </p:set>
+                                  </p:childTnLst>
+                                </p:cTn>
+                              </p:par>
+                            </p:childTnLst>
+                          </p:cTn>
+                        </p:par>
+                      </p:childTnLst>
+                    </p:cTn>
+                  </p:par>
+                  <p:par>
+                    <p:cTn id="15" fill="hold">
+                      <p:stCondLst>
+                        <p:cond delay="indefinite"/>
+                      </p:stCondLst>
+                      <p:childTnLst>
+                        <p:par>
+                          <p:cTn id="16" fill="hold">
+                            <p:stCondLst>
+                              <p:cond delay="0"/>
+                            </p:stCondLst>
+                            <p:childTnLst>
+                              <p:par>
+                                <p:cTn id="17" presetID="1" presetClass="entr" presetSubtype="0" fill="hold" grpId="0" nodeType="clickEffect">
+                                  <p:stCondLst>
+                                    <p:cond delay="0"/>
+                                  </p:stCondLst>
+                                  <p:childTnLst>
+                                    <p:set>
+                                      <p:cBhvr>
+                                        <p:cTn id="18" dur="1" fill="hold">
+                                          <p:stCondLst>
+                                            <p:cond delay="0"/>
+                                          </p:stCondLst>
+                                        </p:cTn>
+                                        <p:tgtEl>
+                                          <p:spTgt spid="3">
+                                            <p:txEl>
+                                              <p:pRg st="3" end="3"/>
+                                            </p:txEl>
+                                          </p:spTgt>
+                                        </p:tgtEl>
+                                        <p:attrNameLst>
+                                          <p:attrName>style.visibility</p:attrName>
+                                        </p:attrNameLst>
+                                      </p:cBhvr>
+                                      <p:to>
+                                        <p:strVal val="visible"/>
+                                      </p:to>
+                                    </p:set>
+                                  </p:childTnLst>
+                                </p:cTn>
+                              </p:par>
+                            </p:childTnLst>
+                          </p:cTn>
+                        </p:par>
+                      </p:childTnLst>
+                    </p:cTn>
+                  </p:par>
+                  <p:par>
+                    <p:cTn id="19" fill="hold">
+                      <p:stCondLst>
+                        <p:cond delay="indefinite"/>
+                      </p:stCondLst>
+                      <p:childTnLst>
+                        <p:par>
+                          <p:cTn id="20" fill="hold">
+                            <p:stCondLst>
+                              <p:cond delay="0"/>
+                            </p:stCondLst>
+                            <p:childTnLst>
+                              <p:par>
+                                <p:cTn id="21" presetID="1" presetClass="entr" presetSubtype="0" fill="hold" grpId="0" nodeType="clickEffect">
+                                  <p:stCondLst>
+                                    <p:cond delay="0"/>
+                                  </p:stCondLst>
+                                  <p:childTnLst>
+                                    <p:set>
+                                      <p:cBhvr>
+                                        <p:cTn id="22" dur="1" fill="hold">
+                                          <p:stCondLst>
+                                            <p:cond delay="0"/>
+                                          </p:stCondLst>
+                                        </p:cTn>
+                                        <p:tgtEl>
+                                          <p:spTgt spid="3">
+                                            <p:txEl>
+                                              <p:pRg st="4" end="4"/>
+                                            </p:txEl>
+                                          </p:spTgt>
+                                        </p:tgtEl>
+                                        <p:attrNameLst>
+                                          <p:attrName>style.visibility</p:attrName>
+                                        </p:attrNameLst>
+                                      </p:cBhvr>
+                                      <p:to>
+                                        <p:strVal val="visible"/>
+                                      </p:to>
+                                    </p:set>
+                                  </p:childTnLst>
+                                </p:cTn>
+                              </p:par>
+                            </p:childTnLst>
+                          </p:cTn>
+                        </p:par>
+                      </p:childTnLst>
+                    </p:cTn>
+                  </p:par>
+                </p:childTnLst>
+              </p:cTn>
+              <p:prevCondLst>
+                <p:cond evt="onPrev" delay="0">
+                  <p:tgtEl>
+                    <p:sldTgt/>
+                  </p:tgtEl>
+                </p:cond>
+              </p:prevCondLst>
+              <p:nextCondLst>
+                <p:cond evt="onNext" delay="0">
+                  <p:tgtEl>
+                    <p:sldTgt/>
+                  </p:tgtEl>
+                </p:cond>
+              </p:nextCondLst>
+            </p:seq>
+          </p:childTnLst>
+        </p:cTn>
+      </p:par>
+    </p:tnLst>
+    <p:bldLst>
+      <p:bldP spid="3" grpId="0" build="p"/>
+    </p:bldLst>
+  </p:timing>
+</p:sld>
+</file>
+
+<file path=ppt/slides/slide8.xml><?xml version="1.0" encoding="utf-8"?>
+<p:sld xmlns:a="http://schemas.openxmlformats.org/drawingml/2006/main" xmlns:r="http://schemas.openxmlformats.org/officeDocument/2006/relationships" xmlns:p="http://schemas.openxmlformats.org/presentationml/2006/main">
+  <p:cSld>
+    <p:spTree>
+      <p:nvGrpSpPr>
+        <p:cNvPr id="1" name=""/>
+        <p:cNvGrpSpPr/>
+        <p:nvPr/>
+      </p:nvGrpSpPr>
+      <p:grpSpPr>
+        <a:xfrm>
+          <a:off x="0" y="0"/>
+          <a:ext cx="0" cy="0"/>
+          <a:chOff x="0" y="0"/>
+          <a:chExt cx="0" cy="0"/>
+        </a:xfrm>
+      </p:grpSpPr>
+      <p:sp>
+        <p:nvSpPr>
           <p:cNvPr id="63490" name="Rectangle 2"/>
           <p:cNvSpPr>
             <a:spLocks noGrp="1" noChangeArrowheads="1"/>
@@ -31406,7 +33436,7 @@
 </p:sld>
 </file>
 
-<file path=ppt/slides/slide7.xml><?xml version="1.0" encoding="utf-8"?>
+<file path=ppt/slides/slide9.xml><?xml version="1.0" encoding="utf-8"?>
 <p:sld xmlns:a="http://schemas.openxmlformats.org/drawingml/2006/main" xmlns:r="http://schemas.openxmlformats.org/officeDocument/2006/relationships" xmlns:p="http://schemas.openxmlformats.org/presentationml/2006/main">
   <p:cSld>
     <p:spTree>
@@ -31557,1284 +33587,6 @@
       </p:transition>
     </mc:Fallback>
   </mc:AlternateContent>
-</p:sld>
-</file>
-
-<file path=ppt/slides/slide8.xml><?xml version="1.0" encoding="utf-8"?>
-<p:sld xmlns:a="http://schemas.openxmlformats.org/drawingml/2006/main" xmlns:r="http://schemas.openxmlformats.org/officeDocument/2006/relationships" xmlns:p="http://schemas.openxmlformats.org/presentationml/2006/main">
-  <p:cSld>
-    <p:spTree>
-      <p:nvGrpSpPr>
-        <p:cNvPr id="1" name=""/>
-        <p:cNvGrpSpPr/>
-        <p:nvPr/>
-      </p:nvGrpSpPr>
-      <p:grpSpPr>
-        <a:xfrm>
-          <a:off x="0" y="0"/>
-          <a:ext cx="0" cy="0"/>
-          <a:chOff x="0" y="0"/>
-          <a:chExt cx="0" cy="0"/>
-        </a:xfrm>
-      </p:grpSpPr>
-      <p:sp>
-        <p:nvSpPr>
-          <p:cNvPr id="63490" name="Rectangle 2"/>
-          <p:cNvSpPr>
-            <a:spLocks noGrp="1" noChangeArrowheads="1"/>
-          </p:cNvSpPr>
-          <p:nvPr>
-            <p:ph type="title"/>
-          </p:nvPr>
-        </p:nvSpPr>
-        <p:spPr>
-          <a:xfrm>
-            <a:off x="286745" y="1104559"/>
-            <a:ext cx="9808339" cy="565151"/>
-          </a:xfrm>
-          <a:noFill/>
-        </p:spPr>
-        <p:txBody>
-          <a:bodyPr>
-            <a:noAutofit/>
-          </a:bodyPr>
-          <a:lstStyle/>
-          <a:p>
-            <a:r>
-              <a:rPr lang="en-CA" sz="3733" dirty="0"/>
-              <a:t>Step 5.  Highlight Your Team Advantage</a:t>
-            </a:r>
-          </a:p>
-        </p:txBody>
-      </p:sp>
-      <p:sp>
-        <p:nvSpPr>
-          <p:cNvPr id="6" name="Rectangle 3"/>
-          <p:cNvSpPr txBox="1">
-            <a:spLocks noChangeArrowheads="1"/>
-          </p:cNvSpPr>
-          <p:nvPr/>
-        </p:nvSpPr>
-        <p:spPr>
-          <a:xfrm>
-            <a:off x="2042809" y="2207198"/>
-            <a:ext cx="9808339" cy="3287669"/>
-          </a:xfrm>
-          <a:prstGeom prst="rect">
-            <a:avLst/>
-          </a:prstGeom>
-        </p:spPr>
-        <p:txBody>
-          <a:bodyPr vert="horz" lIns="91440" tIns="45720" rIns="91440" bIns="45720" rtlCol="0">
-            <a:noAutofit/>
-          </a:bodyPr>
-          <a:lstStyle>
-            <a:lvl1pPr marL="342900" indent="-342900" algn="l" defTabSz="914400" rtl="0" eaLnBrk="1" latinLnBrk="0" hangingPunct="1">
-              <a:spcBef>
-                <a:spcPct val="20000"/>
-              </a:spcBef>
-              <a:buFont typeface="Arial" pitchFamily="34" charset="0"/>
-              <a:buChar char="•"/>
-              <a:defRPr sz="3200" kern="1200">
-                <a:solidFill>
-                  <a:schemeClr val="tx1"/>
-                </a:solidFill>
-                <a:latin typeface="Arial" pitchFamily="34" charset="0"/>
-                <a:ea typeface="+mn-ea"/>
-                <a:cs typeface="Arial" pitchFamily="34" charset="0"/>
-              </a:defRPr>
-            </a:lvl1pPr>
-            <a:lvl2pPr marL="742950" indent="-285750" algn="l" defTabSz="914400" rtl="0" eaLnBrk="1" latinLnBrk="0" hangingPunct="1">
-              <a:spcBef>
-                <a:spcPct val="20000"/>
-              </a:spcBef>
-              <a:buFont typeface="Arial" pitchFamily="34" charset="0"/>
-              <a:buChar char="–"/>
-              <a:defRPr sz="2000" kern="1200" baseline="0">
-                <a:solidFill>
-                  <a:schemeClr val="tx1"/>
-                </a:solidFill>
-                <a:latin typeface="Arial" pitchFamily="34" charset="0"/>
-                <a:ea typeface="+mn-ea"/>
-                <a:cs typeface="Arial" pitchFamily="34" charset="0"/>
-              </a:defRPr>
-            </a:lvl2pPr>
-            <a:lvl3pPr marL="1143000" indent="-228600" algn="l" defTabSz="914400" rtl="0" eaLnBrk="1" latinLnBrk="0" hangingPunct="1">
-              <a:spcBef>
-                <a:spcPct val="20000"/>
-              </a:spcBef>
-              <a:buFont typeface="Arial" pitchFamily="34" charset="0"/>
-              <a:buChar char="•"/>
-              <a:defRPr sz="1800" kern="1200" baseline="0">
-                <a:solidFill>
-                  <a:schemeClr val="tx1"/>
-                </a:solidFill>
-                <a:latin typeface="Arial" pitchFamily="34" charset="0"/>
-                <a:ea typeface="+mn-ea"/>
-                <a:cs typeface="Arial" pitchFamily="34" charset="0"/>
-              </a:defRPr>
-            </a:lvl3pPr>
-            <a:lvl4pPr marL="1600200" indent="-228600" algn="l" defTabSz="914400" rtl="0" eaLnBrk="1" latinLnBrk="0" hangingPunct="1">
-              <a:spcBef>
-                <a:spcPct val="20000"/>
-              </a:spcBef>
-              <a:buFont typeface="Arial" pitchFamily="34" charset="0"/>
-              <a:buChar char="–"/>
-              <a:defRPr sz="1600" kern="1200" baseline="0">
-                <a:solidFill>
-                  <a:schemeClr val="tx1"/>
-                </a:solidFill>
-                <a:latin typeface="Arial" pitchFamily="34" charset="0"/>
-                <a:ea typeface="+mn-ea"/>
-                <a:cs typeface="Arial" pitchFamily="34" charset="0"/>
-              </a:defRPr>
-            </a:lvl4pPr>
-            <a:lvl5pPr marL="2057400" indent="-228600" algn="l" defTabSz="914400" rtl="0" eaLnBrk="1" latinLnBrk="0" hangingPunct="1">
-              <a:spcBef>
-                <a:spcPct val="20000"/>
-              </a:spcBef>
-              <a:buFont typeface="Arial" pitchFamily="34" charset="0"/>
-              <a:buChar char="»"/>
-              <a:defRPr sz="1400" kern="1200" baseline="0">
-                <a:solidFill>
-                  <a:schemeClr val="tx1"/>
-                </a:solidFill>
-                <a:latin typeface="Arial" pitchFamily="34" charset="0"/>
-                <a:ea typeface="+mn-ea"/>
-                <a:cs typeface="Arial" pitchFamily="34" charset="0"/>
-              </a:defRPr>
-            </a:lvl5pPr>
-            <a:lvl6pPr marL="2514600" indent="-228600" algn="l" defTabSz="914400" rtl="0" eaLnBrk="1" latinLnBrk="0" hangingPunct="1">
-              <a:spcBef>
-                <a:spcPct val="20000"/>
-              </a:spcBef>
-              <a:buFont typeface="Arial" pitchFamily="34" charset="0"/>
-              <a:buChar char="•"/>
-              <a:defRPr sz="2000" kern="1200">
-                <a:solidFill>
-                  <a:schemeClr val="tx1"/>
-                </a:solidFill>
-                <a:latin typeface="+mn-lt"/>
-                <a:ea typeface="+mn-ea"/>
-                <a:cs typeface="+mn-cs"/>
-              </a:defRPr>
-            </a:lvl6pPr>
-            <a:lvl7pPr marL="2971800" indent="-228600" algn="l" defTabSz="914400" rtl="0" eaLnBrk="1" latinLnBrk="0" hangingPunct="1">
-              <a:spcBef>
-                <a:spcPct val="20000"/>
-              </a:spcBef>
-              <a:buFont typeface="Arial" pitchFamily="34" charset="0"/>
-              <a:buChar char="•"/>
-              <a:defRPr sz="2000" kern="1200">
-                <a:solidFill>
-                  <a:schemeClr val="tx1"/>
-                </a:solidFill>
-                <a:latin typeface="+mn-lt"/>
-                <a:ea typeface="+mn-ea"/>
-                <a:cs typeface="+mn-cs"/>
-              </a:defRPr>
-            </a:lvl7pPr>
-            <a:lvl8pPr marL="3429000" indent="-228600" algn="l" defTabSz="914400" rtl="0" eaLnBrk="1" latinLnBrk="0" hangingPunct="1">
-              <a:spcBef>
-                <a:spcPct val="20000"/>
-              </a:spcBef>
-              <a:buFont typeface="Arial" pitchFamily="34" charset="0"/>
-              <a:buChar char="•"/>
-              <a:defRPr sz="2000" kern="1200">
-                <a:solidFill>
-                  <a:schemeClr val="tx1"/>
-                </a:solidFill>
-                <a:latin typeface="+mn-lt"/>
-                <a:ea typeface="+mn-ea"/>
-                <a:cs typeface="+mn-cs"/>
-              </a:defRPr>
-            </a:lvl8pPr>
-            <a:lvl9pPr marL="3886200" indent="-228600" algn="l" defTabSz="914400" rtl="0" eaLnBrk="1" latinLnBrk="0" hangingPunct="1">
-              <a:spcBef>
-                <a:spcPct val="20000"/>
-              </a:spcBef>
-              <a:buFont typeface="Arial" pitchFamily="34" charset="0"/>
-              <a:buChar char="•"/>
-              <a:defRPr sz="2000" kern="1200">
-                <a:solidFill>
-                  <a:schemeClr val="tx1"/>
-                </a:solidFill>
-                <a:latin typeface="+mn-lt"/>
-                <a:ea typeface="+mn-ea"/>
-                <a:cs typeface="+mn-cs"/>
-              </a:defRPr>
-            </a:lvl9pPr>
-          </a:lstStyle>
-          <a:p>
-            <a:pPr marL="0" indent="0">
-              <a:spcBef>
-                <a:spcPts val="0"/>
-              </a:spcBef>
-              <a:buNone/>
-            </a:pPr>
-            <a:r>
-              <a:rPr lang="en-CA" sz="2400" b="1" dirty="0">
-                <a:solidFill>
-                  <a:srgbClr val="002060"/>
-                </a:solidFill>
-              </a:rPr>
-              <a:t>Project Lead – Andrew Kates</a:t>
-            </a:r>
-          </a:p>
-          <a:p>
-            <a:pPr>
-              <a:spcBef>
-                <a:spcPts val="0"/>
-              </a:spcBef>
-            </a:pPr>
-            <a:r>
-              <a:rPr lang="en-CA" sz="2400" dirty="0">
-                <a:solidFill>
-                  <a:srgbClr val="002060"/>
-                </a:solidFill>
-              </a:rPr>
-              <a:t>Experience in RTP leadership + applied sport/data science</a:t>
-            </a:r>
-          </a:p>
-          <a:p>
-            <a:pPr>
-              <a:spcBef>
-                <a:spcPts val="0"/>
-              </a:spcBef>
-            </a:pPr>
-            <a:r>
-              <a:rPr lang="en-CA" sz="2400" dirty="0">
-                <a:solidFill>
-                  <a:srgbClr val="002060"/>
-                </a:solidFill>
-              </a:rPr>
-              <a:t>History of delivering outcomes</a:t>
-            </a:r>
-          </a:p>
-          <a:p>
-            <a:pPr>
-              <a:spcBef>
-                <a:spcPts val="0"/>
-              </a:spcBef>
-            </a:pPr>
-            <a:r>
-              <a:rPr lang="en-CA" sz="2400" dirty="0">
-                <a:solidFill>
-                  <a:srgbClr val="002060"/>
-                </a:solidFill>
-              </a:rPr>
-              <a:t>Practical Approach + Research/Innovation</a:t>
-            </a:r>
-          </a:p>
-          <a:p>
-            <a:pPr>
-              <a:spcBef>
-                <a:spcPts val="0"/>
-              </a:spcBef>
-            </a:pPr>
-            <a:endParaRPr lang="en-CA" sz="2400" dirty="0">
-              <a:solidFill>
-                <a:srgbClr val="002060"/>
-              </a:solidFill>
-            </a:endParaRPr>
-          </a:p>
-          <a:p>
-            <a:pPr marL="0" indent="0">
-              <a:spcBef>
-                <a:spcPts val="0"/>
-              </a:spcBef>
-              <a:buNone/>
-            </a:pPr>
-            <a:r>
-              <a:rPr lang="en-CA" sz="2400" b="1" dirty="0">
-                <a:solidFill>
-                  <a:srgbClr val="002060"/>
-                </a:solidFill>
-              </a:rPr>
-              <a:t>Initial Support – Craig, Marc</a:t>
-            </a:r>
-          </a:p>
-          <a:p>
-            <a:pPr>
-              <a:spcBef>
-                <a:spcPts val="0"/>
-              </a:spcBef>
-            </a:pPr>
-            <a:r>
-              <a:rPr lang="en-CA" sz="2400" dirty="0">
-                <a:solidFill>
-                  <a:srgbClr val="002060"/>
-                </a:solidFill>
-              </a:rPr>
-              <a:t>Experience, Expertise, Network</a:t>
-            </a:r>
-          </a:p>
-          <a:p>
-            <a:pPr>
-              <a:spcBef>
-                <a:spcPts val="0"/>
-              </a:spcBef>
-            </a:pPr>
-            <a:endParaRPr lang="en-CA" sz="2400" dirty="0">
-              <a:solidFill>
-                <a:srgbClr val="002060"/>
-              </a:solidFill>
-            </a:endParaRPr>
-          </a:p>
-          <a:p>
-            <a:pPr marL="0" indent="0">
-              <a:spcBef>
-                <a:spcPts val="0"/>
-              </a:spcBef>
-              <a:buNone/>
-            </a:pPr>
-            <a:r>
-              <a:rPr lang="en-CA" sz="2400" b="1" dirty="0">
-                <a:solidFill>
-                  <a:srgbClr val="002060"/>
-                </a:solidFill>
-              </a:rPr>
-              <a:t>Expanded Support</a:t>
-            </a:r>
-          </a:p>
-          <a:p>
-            <a:pPr>
-              <a:spcBef>
-                <a:spcPts val="0"/>
-              </a:spcBef>
-            </a:pPr>
-            <a:r>
-              <a:rPr lang="en-CA" sz="2400" dirty="0">
-                <a:solidFill>
-                  <a:srgbClr val="002060"/>
-                </a:solidFill>
-              </a:rPr>
-              <a:t>Surgery, Physiotherapy, Physiology, Nutrition, Mental Performance, DS-BPA</a:t>
-            </a:r>
-          </a:p>
-          <a:p>
-            <a:pPr marL="0" indent="0">
-              <a:spcBef>
-                <a:spcPts val="0"/>
-              </a:spcBef>
-              <a:buNone/>
-            </a:pPr>
-            <a:endParaRPr lang="en-CA" sz="2400" b="1" i="1" dirty="0">
-              <a:solidFill>
-                <a:srgbClr val="002060"/>
-              </a:solidFill>
-            </a:endParaRPr>
-          </a:p>
-        </p:txBody>
-      </p:sp>
-      <p:pic>
-        <p:nvPicPr>
-          <p:cNvPr id="5" name="Picture 8"/>
-          <p:cNvPicPr>
-            <a:picLocks noChangeAspect="1"/>
-          </p:cNvPicPr>
-          <p:nvPr/>
-        </p:nvPicPr>
-        <p:blipFill rotWithShape="1">
-          <a:blip r:embed="rId3">
-            <a:extLst>
-              <a:ext uri="{28A0092B-C50C-407E-A947-70E740481C1C}">
-                <a14:useLocalDpi xmlns:a14="http://schemas.microsoft.com/office/drawing/2010/main" val="0"/>
-              </a:ext>
-            </a:extLst>
-          </a:blip>
-          <a:srcRect l="7777" t="45360" r="61009"/>
-          <a:stretch/>
-        </p:blipFill>
-        <p:spPr bwMode="auto">
-          <a:xfrm>
-            <a:off x="1" y="2792361"/>
-            <a:ext cx="2042809" cy="1955992"/>
-          </a:xfrm>
-          <a:prstGeom prst="rect">
-            <a:avLst/>
-          </a:prstGeom>
-          <a:noFill/>
-          <a:ln>
-            <a:noFill/>
-          </a:ln>
-          <a:extLst>
-            <a:ext uri="{909E8E84-426E-40DD-AFC4-6F175D3DCCD1}">
-              <a14:hiddenFill xmlns:a14="http://schemas.microsoft.com/office/drawing/2010/main">
-                <a:solidFill>
-                  <a:srgbClr val="FFFFFF"/>
-                </a:solidFill>
-              </a14:hiddenFill>
-            </a:ext>
-            <a:ext uri="{91240B29-F687-4F45-9708-019B960494DF}">
-              <a14:hiddenLine xmlns:a14="http://schemas.microsoft.com/office/drawing/2010/main" w="9525">
-                <a:solidFill>
-                  <a:srgbClr val="000000"/>
-                </a:solidFill>
-                <a:miter lim="800000"/>
-                <a:headEnd/>
-                <a:tailEnd/>
-              </a14:hiddenLine>
-            </a:ext>
-          </a:extLst>
-        </p:spPr>
-      </p:pic>
-    </p:spTree>
-    <p:extLst>
-      <p:ext uri="{BB962C8B-B14F-4D97-AF65-F5344CB8AC3E}">
-        <p14:creationId xmlns:p14="http://schemas.microsoft.com/office/powerpoint/2010/main" val="310404465"/>
-      </p:ext>
-    </p:extLst>
-  </p:cSld>
-  <p:clrMapOvr>
-    <a:masterClrMapping/>
-  </p:clrMapOvr>
-  <mc:AlternateContent xmlns:mc="http://schemas.openxmlformats.org/markup-compatibility/2006" xmlns:p14="http://schemas.microsoft.com/office/powerpoint/2010/main">
-    <mc:Choice Requires="p14">
-      <p:transition spd="med" p14:dur="700">
-        <p:fade/>
-      </p:transition>
-    </mc:Choice>
-    <mc:Fallback xmlns="">
-      <p:transition spd="med">
-        <p:fade/>
-      </p:transition>
-    </mc:Fallback>
-  </mc:AlternateContent>
-  <p:timing>
-    <p:tnLst>
-      <p:par>
-        <p:cTn id="1" dur="indefinite" restart="never" nodeType="tmRoot">
-          <p:childTnLst>
-            <p:seq concurrent="1" nextAc="seek">
-              <p:cTn id="2" dur="indefinite" nodeType="mainSeq">
-                <p:childTnLst>
-                  <p:par>
-                    <p:cTn id="3" fill="hold">
-                      <p:stCondLst>
-                        <p:cond delay="indefinite"/>
-                      </p:stCondLst>
-                      <p:childTnLst>
-                        <p:par>
-                          <p:cTn id="4" fill="hold">
-                            <p:stCondLst>
-                              <p:cond delay="0"/>
-                            </p:stCondLst>
-                            <p:childTnLst>
-                              <p:par>
-                                <p:cTn id="5" presetID="1" presetClass="entr" presetSubtype="0" fill="hold" nodeType="clickEffect">
-                                  <p:stCondLst>
-                                    <p:cond delay="0"/>
-                                  </p:stCondLst>
-                                  <p:childTnLst>
-                                    <p:set>
-                                      <p:cBhvr>
-                                        <p:cTn id="6" dur="1" fill="hold">
-                                          <p:stCondLst>
-                                            <p:cond delay="0"/>
-                                          </p:stCondLst>
-                                        </p:cTn>
-                                        <p:tgtEl>
-                                          <p:spTgt spid="6">
-                                            <p:txEl>
-                                              <p:pRg st="5" end="5"/>
-                                            </p:txEl>
-                                          </p:spTgt>
-                                        </p:tgtEl>
-                                        <p:attrNameLst>
-                                          <p:attrName>style.visibility</p:attrName>
-                                        </p:attrNameLst>
-                                      </p:cBhvr>
-                                      <p:to>
-                                        <p:strVal val="visible"/>
-                                      </p:to>
-                                    </p:set>
-                                  </p:childTnLst>
-                                </p:cTn>
-                              </p:par>
-                              <p:par>
-                                <p:cTn id="7" presetID="1" presetClass="entr" presetSubtype="0" fill="hold" nodeType="withEffect">
-                                  <p:stCondLst>
-                                    <p:cond delay="0"/>
-                                  </p:stCondLst>
-                                  <p:childTnLst>
-                                    <p:set>
-                                      <p:cBhvr>
-                                        <p:cTn id="8" dur="1" fill="hold">
-                                          <p:stCondLst>
-                                            <p:cond delay="0"/>
-                                          </p:stCondLst>
-                                        </p:cTn>
-                                        <p:tgtEl>
-                                          <p:spTgt spid="6">
-                                            <p:txEl>
-                                              <p:pRg st="6" end="6"/>
-                                            </p:txEl>
-                                          </p:spTgt>
-                                        </p:tgtEl>
-                                        <p:attrNameLst>
-                                          <p:attrName>style.visibility</p:attrName>
-                                        </p:attrNameLst>
-                                      </p:cBhvr>
-                                      <p:to>
-                                        <p:strVal val="visible"/>
-                                      </p:to>
-                                    </p:set>
-                                  </p:childTnLst>
-                                </p:cTn>
-                              </p:par>
-                              <p:par>
-                                <p:cTn id="9" presetID="1" presetClass="entr" presetSubtype="0" fill="hold" nodeType="withEffect">
-                                  <p:stCondLst>
-                                    <p:cond delay="0"/>
-                                  </p:stCondLst>
-                                  <p:childTnLst>
-                                    <p:set>
-                                      <p:cBhvr>
-                                        <p:cTn id="10" dur="1" fill="hold">
-                                          <p:stCondLst>
-                                            <p:cond delay="0"/>
-                                          </p:stCondLst>
-                                        </p:cTn>
-                                        <p:tgtEl>
-                                          <p:spTgt spid="6">
-                                            <p:txEl>
-                                              <p:pRg st="8" end="8"/>
-                                            </p:txEl>
-                                          </p:spTgt>
-                                        </p:tgtEl>
-                                        <p:attrNameLst>
-                                          <p:attrName>style.visibility</p:attrName>
-                                        </p:attrNameLst>
-                                      </p:cBhvr>
-                                      <p:to>
-                                        <p:strVal val="visible"/>
-                                      </p:to>
-                                    </p:set>
-                                  </p:childTnLst>
-                                </p:cTn>
-                              </p:par>
-                              <p:par>
-                                <p:cTn id="11" presetID="1" presetClass="entr" presetSubtype="0" fill="hold" nodeType="withEffect">
-                                  <p:stCondLst>
-                                    <p:cond delay="0"/>
-                                  </p:stCondLst>
-                                  <p:childTnLst>
-                                    <p:set>
-                                      <p:cBhvr>
-                                        <p:cTn id="12" dur="1" fill="hold">
-                                          <p:stCondLst>
-                                            <p:cond delay="0"/>
-                                          </p:stCondLst>
-                                        </p:cTn>
-                                        <p:tgtEl>
-                                          <p:spTgt spid="6">
-                                            <p:txEl>
-                                              <p:pRg st="9" end="9"/>
-                                            </p:txEl>
-                                          </p:spTgt>
-                                        </p:tgtEl>
-                                        <p:attrNameLst>
-                                          <p:attrName>style.visibility</p:attrName>
-                                        </p:attrNameLst>
-                                      </p:cBhvr>
-                                      <p:to>
-                                        <p:strVal val="visible"/>
-                                      </p:to>
-                                    </p:set>
-                                  </p:childTnLst>
-                                </p:cTn>
-                              </p:par>
-                            </p:childTnLst>
-                          </p:cTn>
-                        </p:par>
-                      </p:childTnLst>
-                    </p:cTn>
-                  </p:par>
-                </p:childTnLst>
-              </p:cTn>
-              <p:prevCondLst>
-                <p:cond evt="onPrev" delay="0">
-                  <p:tgtEl>
-                    <p:sldTgt/>
-                  </p:tgtEl>
-                </p:cond>
-              </p:prevCondLst>
-              <p:nextCondLst>
-                <p:cond evt="onNext" delay="0">
-                  <p:tgtEl>
-                    <p:sldTgt/>
-                  </p:tgtEl>
-                </p:cond>
-              </p:nextCondLst>
-            </p:seq>
-          </p:childTnLst>
-        </p:cTn>
-      </p:par>
-    </p:tnLst>
-  </p:timing>
-</p:sld>
-</file>
-
-<file path=ppt/slides/slide9.xml><?xml version="1.0" encoding="utf-8"?>
-<p:sld xmlns:a="http://schemas.openxmlformats.org/drawingml/2006/main" xmlns:r="http://schemas.openxmlformats.org/officeDocument/2006/relationships" xmlns:p="http://schemas.openxmlformats.org/presentationml/2006/main">
-  <p:cSld>
-    <p:spTree>
-      <p:nvGrpSpPr>
-        <p:cNvPr id="1" name=""/>
-        <p:cNvGrpSpPr/>
-        <p:nvPr/>
-      </p:nvGrpSpPr>
-      <p:grpSpPr>
-        <a:xfrm>
-          <a:off x="0" y="0"/>
-          <a:ext cx="0" cy="0"/>
-          <a:chOff x="0" y="0"/>
-          <a:chExt cx="0" cy="0"/>
-        </a:xfrm>
-      </p:grpSpPr>
-      <p:sp>
-        <p:nvSpPr>
-          <p:cNvPr id="63490" name="Rectangle 2"/>
-          <p:cNvSpPr>
-            <a:spLocks noGrp="1" noChangeArrowheads="1"/>
-          </p:cNvSpPr>
-          <p:nvPr>
-            <p:ph type="title"/>
-          </p:nvPr>
-        </p:nvSpPr>
-        <p:spPr>
-          <a:xfrm>
-            <a:off x="286747" y="1104559"/>
-            <a:ext cx="6660232" cy="565151"/>
-          </a:xfrm>
-          <a:noFill/>
-        </p:spPr>
-        <p:txBody>
-          <a:bodyPr>
-            <a:noAutofit/>
-          </a:bodyPr>
-          <a:lstStyle/>
-          <a:p>
-            <a:r>
-              <a:rPr lang="en-CA" sz="3733" dirty="0"/>
-              <a:t>Step 6.  Business Model </a:t>
-            </a:r>
-          </a:p>
-        </p:txBody>
-      </p:sp>
-      <p:sp>
-        <p:nvSpPr>
-          <p:cNvPr id="6" name="Rectangle 3"/>
-          <p:cNvSpPr txBox="1">
-            <a:spLocks noChangeArrowheads="1"/>
-          </p:cNvSpPr>
-          <p:nvPr/>
-        </p:nvSpPr>
-        <p:spPr>
-          <a:xfrm>
-            <a:off x="358979" y="1962879"/>
-            <a:ext cx="6453945" cy="4038676"/>
-          </a:xfrm>
-          <a:prstGeom prst="rect">
-            <a:avLst/>
-          </a:prstGeom>
-        </p:spPr>
-        <p:txBody>
-          <a:bodyPr vert="horz" lIns="91440" tIns="45720" rIns="91440" bIns="45720" rtlCol="0">
-            <a:noAutofit/>
-          </a:bodyPr>
-          <a:lstStyle>
-            <a:lvl1pPr marL="342900" indent="-342900" algn="l" defTabSz="914400" rtl="0" eaLnBrk="1" latinLnBrk="0" hangingPunct="1">
-              <a:spcBef>
-                <a:spcPct val="20000"/>
-              </a:spcBef>
-              <a:buFont typeface="Arial" pitchFamily="34" charset="0"/>
-              <a:buChar char="•"/>
-              <a:defRPr sz="3200" kern="1200">
-                <a:solidFill>
-                  <a:schemeClr val="tx1"/>
-                </a:solidFill>
-                <a:latin typeface="Arial" pitchFamily="34" charset="0"/>
-                <a:ea typeface="+mn-ea"/>
-                <a:cs typeface="Arial" pitchFamily="34" charset="0"/>
-              </a:defRPr>
-            </a:lvl1pPr>
-            <a:lvl2pPr marL="742950" indent="-285750" algn="l" defTabSz="914400" rtl="0" eaLnBrk="1" latinLnBrk="0" hangingPunct="1">
-              <a:spcBef>
-                <a:spcPct val="20000"/>
-              </a:spcBef>
-              <a:buFont typeface="Arial" pitchFamily="34" charset="0"/>
-              <a:buChar char="–"/>
-              <a:defRPr sz="2000" kern="1200" baseline="0">
-                <a:solidFill>
-                  <a:schemeClr val="tx1"/>
-                </a:solidFill>
-                <a:latin typeface="Arial" pitchFamily="34" charset="0"/>
-                <a:ea typeface="+mn-ea"/>
-                <a:cs typeface="Arial" pitchFamily="34" charset="0"/>
-              </a:defRPr>
-            </a:lvl2pPr>
-            <a:lvl3pPr marL="1143000" indent="-228600" algn="l" defTabSz="914400" rtl="0" eaLnBrk="1" latinLnBrk="0" hangingPunct="1">
-              <a:spcBef>
-                <a:spcPct val="20000"/>
-              </a:spcBef>
-              <a:buFont typeface="Arial" pitchFamily="34" charset="0"/>
-              <a:buChar char="•"/>
-              <a:defRPr sz="1800" kern="1200" baseline="0">
-                <a:solidFill>
-                  <a:schemeClr val="tx1"/>
-                </a:solidFill>
-                <a:latin typeface="Arial" pitchFamily="34" charset="0"/>
-                <a:ea typeface="+mn-ea"/>
-                <a:cs typeface="Arial" pitchFamily="34" charset="0"/>
-              </a:defRPr>
-            </a:lvl3pPr>
-            <a:lvl4pPr marL="1600200" indent="-228600" algn="l" defTabSz="914400" rtl="0" eaLnBrk="1" latinLnBrk="0" hangingPunct="1">
-              <a:spcBef>
-                <a:spcPct val="20000"/>
-              </a:spcBef>
-              <a:buFont typeface="Arial" pitchFamily="34" charset="0"/>
-              <a:buChar char="–"/>
-              <a:defRPr sz="1600" kern="1200" baseline="0">
-                <a:solidFill>
-                  <a:schemeClr val="tx1"/>
-                </a:solidFill>
-                <a:latin typeface="Arial" pitchFamily="34" charset="0"/>
-                <a:ea typeface="+mn-ea"/>
-                <a:cs typeface="Arial" pitchFamily="34" charset="0"/>
-              </a:defRPr>
-            </a:lvl4pPr>
-            <a:lvl5pPr marL="2057400" indent="-228600" algn="l" defTabSz="914400" rtl="0" eaLnBrk="1" latinLnBrk="0" hangingPunct="1">
-              <a:spcBef>
-                <a:spcPct val="20000"/>
-              </a:spcBef>
-              <a:buFont typeface="Arial" pitchFamily="34" charset="0"/>
-              <a:buChar char="»"/>
-              <a:defRPr sz="1400" kern="1200" baseline="0">
-                <a:solidFill>
-                  <a:schemeClr val="tx1"/>
-                </a:solidFill>
-                <a:latin typeface="Arial" pitchFamily="34" charset="0"/>
-                <a:ea typeface="+mn-ea"/>
-                <a:cs typeface="Arial" pitchFamily="34" charset="0"/>
-              </a:defRPr>
-            </a:lvl5pPr>
-            <a:lvl6pPr marL="2514600" indent="-228600" algn="l" defTabSz="914400" rtl="0" eaLnBrk="1" latinLnBrk="0" hangingPunct="1">
-              <a:spcBef>
-                <a:spcPct val="20000"/>
-              </a:spcBef>
-              <a:buFont typeface="Arial" pitchFamily="34" charset="0"/>
-              <a:buChar char="•"/>
-              <a:defRPr sz="2000" kern="1200">
-                <a:solidFill>
-                  <a:schemeClr val="tx1"/>
-                </a:solidFill>
-                <a:latin typeface="+mn-lt"/>
-                <a:ea typeface="+mn-ea"/>
-                <a:cs typeface="+mn-cs"/>
-              </a:defRPr>
-            </a:lvl6pPr>
-            <a:lvl7pPr marL="2971800" indent="-228600" algn="l" defTabSz="914400" rtl="0" eaLnBrk="1" latinLnBrk="0" hangingPunct="1">
-              <a:spcBef>
-                <a:spcPct val="20000"/>
-              </a:spcBef>
-              <a:buFont typeface="Arial" pitchFamily="34" charset="0"/>
-              <a:buChar char="•"/>
-              <a:defRPr sz="2000" kern="1200">
-                <a:solidFill>
-                  <a:schemeClr val="tx1"/>
-                </a:solidFill>
-                <a:latin typeface="+mn-lt"/>
-                <a:ea typeface="+mn-ea"/>
-                <a:cs typeface="+mn-cs"/>
-              </a:defRPr>
-            </a:lvl7pPr>
-            <a:lvl8pPr marL="3429000" indent="-228600" algn="l" defTabSz="914400" rtl="0" eaLnBrk="1" latinLnBrk="0" hangingPunct="1">
-              <a:spcBef>
-                <a:spcPct val="20000"/>
-              </a:spcBef>
-              <a:buFont typeface="Arial" pitchFamily="34" charset="0"/>
-              <a:buChar char="•"/>
-              <a:defRPr sz="2000" kern="1200">
-                <a:solidFill>
-                  <a:schemeClr val="tx1"/>
-                </a:solidFill>
-                <a:latin typeface="+mn-lt"/>
-                <a:ea typeface="+mn-ea"/>
-                <a:cs typeface="+mn-cs"/>
-              </a:defRPr>
-            </a:lvl8pPr>
-            <a:lvl9pPr marL="3886200" indent="-228600" algn="l" defTabSz="914400" rtl="0" eaLnBrk="1" latinLnBrk="0" hangingPunct="1">
-              <a:spcBef>
-                <a:spcPct val="20000"/>
-              </a:spcBef>
-              <a:buFont typeface="Arial" pitchFamily="34" charset="0"/>
-              <a:buChar char="•"/>
-              <a:defRPr sz="2000" kern="1200">
-                <a:solidFill>
-                  <a:schemeClr val="tx1"/>
-                </a:solidFill>
-                <a:latin typeface="+mn-lt"/>
-                <a:ea typeface="+mn-ea"/>
-                <a:cs typeface="+mn-cs"/>
-              </a:defRPr>
-            </a:lvl9pPr>
-          </a:lstStyle>
-          <a:p>
-            <a:pPr marL="0" indent="0">
-              <a:spcBef>
-                <a:spcPts val="0"/>
-              </a:spcBef>
-              <a:buNone/>
-            </a:pPr>
-            <a:r>
-              <a:rPr lang="en-CA" sz="2400" b="1" i="1" dirty="0">
-                <a:solidFill>
-                  <a:srgbClr val="002060"/>
-                </a:solidFill>
-              </a:rPr>
-              <a:t>Subscription business model:</a:t>
-            </a:r>
-          </a:p>
-          <a:p>
-            <a:pPr>
-              <a:spcBef>
-                <a:spcPts val="0"/>
-              </a:spcBef>
-            </a:pPr>
-            <a:r>
-              <a:rPr lang="en-CA" sz="2400" dirty="0">
-                <a:solidFill>
-                  <a:srgbClr val="002060"/>
-                </a:solidFill>
-              </a:rPr>
-              <a:t>Monthly cost per athlete</a:t>
-            </a:r>
-          </a:p>
-          <a:p>
-            <a:pPr>
-              <a:spcBef>
-                <a:spcPts val="0"/>
-              </a:spcBef>
-            </a:pPr>
-            <a:r>
-              <a:rPr lang="en-CA" sz="2400" dirty="0">
-                <a:solidFill>
-                  <a:srgbClr val="002060"/>
-                </a:solidFill>
-              </a:rPr>
-              <a:t>$$$ ~ time commitment, service integration</a:t>
-            </a:r>
-          </a:p>
-          <a:p>
-            <a:pPr marL="0" indent="0">
-              <a:spcBef>
-                <a:spcPts val="0"/>
-              </a:spcBef>
-              <a:buNone/>
-            </a:pPr>
-            <a:endParaRPr lang="en-CA" sz="2400" b="1" i="1" dirty="0">
-              <a:solidFill>
-                <a:srgbClr val="002060"/>
-              </a:solidFill>
-            </a:endParaRPr>
-          </a:p>
-          <a:p>
-            <a:pPr marL="0" indent="0">
-              <a:spcBef>
-                <a:spcPts val="0"/>
-              </a:spcBef>
-              <a:buNone/>
-            </a:pPr>
-            <a:endParaRPr lang="en-CA" sz="2400" b="1" i="1" dirty="0">
-              <a:solidFill>
-                <a:srgbClr val="002060"/>
-              </a:solidFill>
-            </a:endParaRPr>
-          </a:p>
-          <a:p>
-            <a:pPr marL="0" indent="0">
-              <a:spcBef>
-                <a:spcPts val="0"/>
-              </a:spcBef>
-              <a:buNone/>
-            </a:pPr>
-            <a:r>
-              <a:rPr lang="en-CA" sz="2400" b="1" i="1" dirty="0">
-                <a:solidFill>
-                  <a:srgbClr val="002060"/>
-                </a:solidFill>
-              </a:rPr>
-              <a:t>Upfront business model:</a:t>
-            </a:r>
-          </a:p>
-          <a:p>
-            <a:pPr>
-              <a:spcBef>
-                <a:spcPts val="0"/>
-              </a:spcBef>
-            </a:pPr>
-            <a:r>
-              <a:rPr lang="en-CA" sz="2400" dirty="0">
-                <a:solidFill>
-                  <a:srgbClr val="002060"/>
-                </a:solidFill>
-              </a:rPr>
-              <a:t>NSOs pay upfront for access to this program in full</a:t>
-            </a:r>
-          </a:p>
-          <a:p>
-            <a:pPr>
-              <a:spcBef>
-                <a:spcPts val="0"/>
-              </a:spcBef>
-            </a:pPr>
-            <a:r>
-              <a:rPr lang="en-CA" sz="2400" dirty="0">
-                <a:solidFill>
-                  <a:srgbClr val="002060"/>
-                </a:solidFill>
-              </a:rPr>
-              <a:t>Less expensive, cost certainty</a:t>
-            </a:r>
-          </a:p>
-        </p:txBody>
-      </p:sp>
-      <p:graphicFrame>
-        <p:nvGraphicFramePr>
-          <p:cNvPr id="3" name="Diagram 2">
-            <a:extLst>
-              <a:ext uri="{FF2B5EF4-FFF2-40B4-BE49-F238E27FC236}">
-                <a16:creationId xmlns:a16="http://schemas.microsoft.com/office/drawing/2014/main" id="{F4A1F89C-3934-2C7C-CDDF-016B44BD3395}"/>
-              </a:ext>
-            </a:extLst>
-          </p:cNvPr>
-          <p:cNvGraphicFramePr/>
-          <p:nvPr>
-            <p:extLst>
-              <p:ext uri="{D42A27DB-BD31-4B8C-83A1-F6EECF244321}">
-                <p14:modId xmlns:p14="http://schemas.microsoft.com/office/powerpoint/2010/main" val="3795215523"/>
-              </p:ext>
-            </p:extLst>
-          </p:nvPr>
-        </p:nvGraphicFramePr>
-        <p:xfrm>
-          <a:off x="6133165" y="1382751"/>
-          <a:ext cx="7394498" cy="4755582"/>
-        </p:xfrm>
-        <a:graphic>
-          <a:graphicData uri="http://schemas.openxmlformats.org/drawingml/2006/diagram">
-            <dgm:relIds xmlns:dgm="http://schemas.openxmlformats.org/drawingml/2006/diagram" xmlns:r="http://schemas.openxmlformats.org/officeDocument/2006/relationships" r:dm="rId3" r:lo="rId4" r:qs="rId5" r:cs="rId6"/>
-          </a:graphicData>
-        </a:graphic>
-      </p:graphicFrame>
-    </p:spTree>
-    <p:extLst>
-      <p:ext uri="{BB962C8B-B14F-4D97-AF65-F5344CB8AC3E}">
-        <p14:creationId xmlns:p14="http://schemas.microsoft.com/office/powerpoint/2010/main" val="21241760"/>
-      </p:ext>
-    </p:extLst>
-  </p:cSld>
-  <p:clrMapOvr>
-    <a:masterClrMapping/>
-  </p:clrMapOvr>
-  <mc:AlternateContent xmlns:mc="http://schemas.openxmlformats.org/markup-compatibility/2006" xmlns:p14="http://schemas.microsoft.com/office/powerpoint/2010/main">
-    <mc:Choice Requires="p14">
-      <p:transition spd="med" p14:dur="700">
-        <p:fade/>
-      </p:transition>
-    </mc:Choice>
-    <mc:Fallback xmlns="">
-      <p:transition spd="med">
-        <p:fade/>
-      </p:transition>
-    </mc:Fallback>
-  </mc:AlternateContent>
-  <p:timing>
-    <p:tnLst>
-      <p:par>
-        <p:cTn id="1" dur="indefinite" restart="never" nodeType="tmRoot">
-          <p:childTnLst>
-            <p:seq concurrent="1" nextAc="seek">
-              <p:cTn id="2" dur="indefinite" nodeType="mainSeq">
-                <p:childTnLst>
-                  <p:par>
-                    <p:cTn id="3" fill="hold">
-                      <p:stCondLst>
-                        <p:cond delay="indefinite"/>
-                      </p:stCondLst>
-                      <p:childTnLst>
-                        <p:par>
-                          <p:cTn id="4" fill="hold">
-                            <p:stCondLst>
-                              <p:cond delay="0"/>
-                            </p:stCondLst>
-                            <p:childTnLst>
-                              <p:par>
-                                <p:cTn id="5" presetID="1" presetClass="entr" presetSubtype="0" fill="hold" nodeType="clickEffect">
-                                  <p:stCondLst>
-                                    <p:cond delay="0"/>
-                                  </p:stCondLst>
-                                  <p:childTnLst>
-                                    <p:set>
-                                      <p:cBhvr>
-                                        <p:cTn id="6" dur="1" fill="hold">
-                                          <p:stCondLst>
-                                            <p:cond delay="0"/>
-                                          </p:stCondLst>
-                                        </p:cTn>
-                                        <p:tgtEl>
-                                          <p:spTgt spid="6">
-                                            <p:txEl>
-                                              <p:pRg st="0" end="0"/>
-                                            </p:txEl>
-                                          </p:spTgt>
-                                        </p:tgtEl>
-                                        <p:attrNameLst>
-                                          <p:attrName>style.visibility</p:attrName>
-                                        </p:attrNameLst>
-                                      </p:cBhvr>
-                                      <p:to>
-                                        <p:strVal val="visible"/>
-                                      </p:to>
-                                    </p:set>
-                                  </p:childTnLst>
-                                </p:cTn>
-                              </p:par>
-                              <p:par>
-                                <p:cTn id="7" presetID="1" presetClass="entr" presetSubtype="0" fill="hold" nodeType="withEffect">
-                                  <p:stCondLst>
-                                    <p:cond delay="0"/>
-                                  </p:stCondLst>
-                                  <p:childTnLst>
-                                    <p:set>
-                                      <p:cBhvr>
-                                        <p:cTn id="8" dur="1" fill="hold">
-                                          <p:stCondLst>
-                                            <p:cond delay="0"/>
-                                          </p:stCondLst>
-                                        </p:cTn>
-                                        <p:tgtEl>
-                                          <p:spTgt spid="6">
-                                            <p:txEl>
-                                              <p:pRg st="1" end="1"/>
-                                            </p:txEl>
-                                          </p:spTgt>
-                                        </p:tgtEl>
-                                        <p:attrNameLst>
-                                          <p:attrName>style.visibility</p:attrName>
-                                        </p:attrNameLst>
-                                      </p:cBhvr>
-                                      <p:to>
-                                        <p:strVal val="visible"/>
-                                      </p:to>
-                                    </p:set>
-                                  </p:childTnLst>
-                                </p:cTn>
-                              </p:par>
-                              <p:par>
-                                <p:cTn id="9" presetID="1" presetClass="entr" presetSubtype="0" fill="hold" nodeType="withEffect">
-                                  <p:stCondLst>
-                                    <p:cond delay="0"/>
-                                  </p:stCondLst>
-                                  <p:childTnLst>
-                                    <p:set>
-                                      <p:cBhvr>
-                                        <p:cTn id="10" dur="1" fill="hold">
-                                          <p:stCondLst>
-                                            <p:cond delay="0"/>
-                                          </p:stCondLst>
-                                        </p:cTn>
-                                        <p:tgtEl>
-                                          <p:spTgt spid="6">
-                                            <p:txEl>
-                                              <p:pRg st="2" end="2"/>
-                                            </p:txEl>
-                                          </p:spTgt>
-                                        </p:tgtEl>
-                                        <p:attrNameLst>
-                                          <p:attrName>style.visibility</p:attrName>
-                                        </p:attrNameLst>
-                                      </p:cBhvr>
-                                      <p:to>
-                                        <p:strVal val="visible"/>
-                                      </p:to>
-                                    </p:set>
-                                  </p:childTnLst>
-                                </p:cTn>
-                              </p:par>
-                              <p:par>
-                                <p:cTn id="11" presetID="1" presetClass="entr" presetSubtype="0" fill="hold" grpId="0" nodeType="withEffect">
-                                  <p:stCondLst>
-                                    <p:cond delay="0"/>
-                                  </p:stCondLst>
-                                  <p:childTnLst>
-                                    <p:set>
-                                      <p:cBhvr>
-                                        <p:cTn id="12" dur="1" fill="hold">
-                                          <p:stCondLst>
-                                            <p:cond delay="0"/>
-                                          </p:stCondLst>
-                                        </p:cTn>
-                                        <p:tgtEl>
-                                          <p:spTgt spid="3"/>
-                                        </p:tgtEl>
-                                        <p:attrNameLst>
-                                          <p:attrName>style.visibility</p:attrName>
-                                        </p:attrNameLst>
-                                      </p:cBhvr>
-                                      <p:to>
-                                        <p:strVal val="visible"/>
-                                      </p:to>
-                                    </p:set>
-                                  </p:childTnLst>
-                                </p:cTn>
-                              </p:par>
-                            </p:childTnLst>
-                          </p:cTn>
-                        </p:par>
-                      </p:childTnLst>
-                    </p:cTn>
-                  </p:par>
-                  <p:par>
-                    <p:cTn id="13" fill="hold">
-                      <p:stCondLst>
-                        <p:cond delay="indefinite"/>
-                      </p:stCondLst>
-                      <p:childTnLst>
-                        <p:par>
-                          <p:cTn id="14" fill="hold">
-                            <p:stCondLst>
-                              <p:cond delay="0"/>
-                            </p:stCondLst>
-                            <p:childTnLst>
-                              <p:par>
-                                <p:cTn id="15" presetID="1" presetClass="entr" presetSubtype="0" fill="hold" nodeType="clickEffect">
-                                  <p:stCondLst>
-                                    <p:cond delay="0"/>
-                                  </p:stCondLst>
-                                  <p:childTnLst>
-                                    <p:set>
-                                      <p:cBhvr>
-                                        <p:cTn id="16" dur="1" fill="hold">
-                                          <p:stCondLst>
-                                            <p:cond delay="0"/>
-                                          </p:stCondLst>
-                                        </p:cTn>
-                                        <p:tgtEl>
-                                          <p:spTgt spid="6">
-                                            <p:txEl>
-                                              <p:pRg st="5" end="5"/>
-                                            </p:txEl>
-                                          </p:spTgt>
-                                        </p:tgtEl>
-                                        <p:attrNameLst>
-                                          <p:attrName>style.visibility</p:attrName>
-                                        </p:attrNameLst>
-                                      </p:cBhvr>
-                                      <p:to>
-                                        <p:strVal val="visible"/>
-                                      </p:to>
-                                    </p:set>
-                                  </p:childTnLst>
-                                </p:cTn>
-                              </p:par>
-                              <p:par>
-                                <p:cTn id="17" presetID="1" presetClass="entr" presetSubtype="0" fill="hold" nodeType="withEffect">
-                                  <p:stCondLst>
-                                    <p:cond delay="0"/>
-                                  </p:stCondLst>
-                                  <p:childTnLst>
-                                    <p:set>
-                                      <p:cBhvr>
-                                        <p:cTn id="18" dur="1" fill="hold">
-                                          <p:stCondLst>
-                                            <p:cond delay="0"/>
-                                          </p:stCondLst>
-                                        </p:cTn>
-                                        <p:tgtEl>
-                                          <p:spTgt spid="6">
-                                            <p:txEl>
-                                              <p:pRg st="6" end="6"/>
-                                            </p:txEl>
-                                          </p:spTgt>
-                                        </p:tgtEl>
-                                        <p:attrNameLst>
-                                          <p:attrName>style.visibility</p:attrName>
-                                        </p:attrNameLst>
-                                      </p:cBhvr>
-                                      <p:to>
-                                        <p:strVal val="visible"/>
-                                      </p:to>
-                                    </p:set>
-                                  </p:childTnLst>
-                                </p:cTn>
-                              </p:par>
-                              <p:par>
-                                <p:cTn id="19" presetID="1" presetClass="entr" presetSubtype="0" fill="hold" nodeType="withEffect">
-                                  <p:stCondLst>
-                                    <p:cond delay="0"/>
-                                  </p:stCondLst>
-                                  <p:childTnLst>
-                                    <p:set>
-                                      <p:cBhvr>
-                                        <p:cTn id="20" dur="1" fill="hold">
-                                          <p:stCondLst>
-                                            <p:cond delay="0"/>
-                                          </p:stCondLst>
-                                        </p:cTn>
-                                        <p:tgtEl>
-                                          <p:spTgt spid="6">
-                                            <p:txEl>
-                                              <p:pRg st="7" end="7"/>
-                                            </p:txEl>
-                                          </p:spTgt>
-                                        </p:tgtEl>
-                                        <p:attrNameLst>
-                                          <p:attrName>style.visibility</p:attrName>
-                                        </p:attrNameLst>
-                                      </p:cBhvr>
-                                      <p:to>
-                                        <p:strVal val="visible"/>
-                                      </p:to>
-                                    </p:set>
-                                  </p:childTnLst>
-                                </p:cTn>
-                              </p:par>
-                            </p:childTnLst>
-                          </p:cTn>
-                        </p:par>
-                      </p:childTnLst>
-                    </p:cTn>
-                  </p:par>
-                </p:childTnLst>
-              </p:cTn>
-              <p:prevCondLst>
-                <p:cond evt="onPrev" delay="0">
-                  <p:tgtEl>
-                    <p:sldTgt/>
-                  </p:tgtEl>
-                </p:cond>
-              </p:prevCondLst>
-              <p:nextCondLst>
-                <p:cond evt="onNext" delay="0">
-                  <p:tgtEl>
-                    <p:sldTgt/>
-                  </p:tgtEl>
-                </p:cond>
-              </p:nextCondLst>
-            </p:seq>
-          </p:childTnLst>
-        </p:cTn>
-      </p:par>
-    </p:tnLst>
-    <p:bldLst>
-      <p:bldGraphic spid="3" grpId="0">
-        <p:bldAsOne/>
-      </p:bldGraphic>
-    </p:bldLst>
-  </p:timing>
 </p:sld>
 </file>
 

--- a/RTP Resources/RTP_L&L_2026.pptx
+++ b/RTP Resources/RTP_L&L_2026.pptx
@@ -5,7 +5,7 @@
     <p:sldMasterId id="2147483672" r:id="rId1"/>
   </p:sldMasterIdLst>
   <p:notesMasterIdLst>
-    <p:notesMasterId r:id="rId17"/>
+    <p:notesMasterId r:id="rId18"/>
   </p:notesMasterIdLst>
   <p:sldIdLst>
     <p:sldId id="258" r:id="rId2"/>
@@ -13,16 +13,17 @@
     <p:sldId id="272" r:id="rId4"/>
     <p:sldId id="276" r:id="rId5"/>
     <p:sldId id="277" r:id="rId6"/>
-    <p:sldId id="278" r:id="rId7"/>
-    <p:sldId id="279" r:id="rId8"/>
-    <p:sldId id="266" r:id="rId9"/>
-    <p:sldId id="265" r:id="rId10"/>
-    <p:sldId id="267" r:id="rId11"/>
-    <p:sldId id="268" r:id="rId12"/>
-    <p:sldId id="275" r:id="rId13"/>
-    <p:sldId id="269" r:id="rId14"/>
-    <p:sldId id="274" r:id="rId15"/>
-    <p:sldId id="270" r:id="rId16"/>
+    <p:sldId id="280" r:id="rId7"/>
+    <p:sldId id="278" r:id="rId8"/>
+    <p:sldId id="279" r:id="rId9"/>
+    <p:sldId id="266" r:id="rId10"/>
+    <p:sldId id="265" r:id="rId11"/>
+    <p:sldId id="267" r:id="rId12"/>
+    <p:sldId id="268" r:id="rId13"/>
+    <p:sldId id="275" r:id="rId14"/>
+    <p:sldId id="269" r:id="rId15"/>
+    <p:sldId id="274" r:id="rId16"/>
+    <p:sldId id="270" r:id="rId17"/>
   </p:sldIdLst>
   <p:sldSz cx="12192000" cy="6858000"/>
   <p:notesSz cx="6858000" cy="9144000"/>
@@ -142,12 +143,19 @@
   <pc:docChgLst>
     <pc:chgData name="Andrew Kates" userId="8fd5ec3e-c8da-46f6-bbad-ce7a7878ba0f" providerId="ADAL" clId="{F3C475C8-A694-5247-A1B1-BD486B98B493}"/>
     <pc:docChg chg="undo redo custSel addSld modSld sldOrd">
-      <pc:chgData name="Andrew Kates" userId="8fd5ec3e-c8da-46f6-bbad-ce7a7878ba0f" providerId="ADAL" clId="{F3C475C8-A694-5247-A1B1-BD486B98B493}" dt="2026-05-09T19:32:24.868" v="12884" actId="20577"/>
+      <pc:chgData name="Andrew Kates" userId="8fd5ec3e-c8da-46f6-bbad-ce7a7878ba0f" providerId="ADAL" clId="{F3C475C8-A694-5247-A1B1-BD486B98B493}" dt="2026-05-11T17:19:10.059" v="13064" actId="20577"/>
       <pc:docMkLst>
         <pc:docMk/>
       </pc:docMkLst>
+      <pc:sldChg chg="modNotesTx">
+        <pc:chgData name="Andrew Kates" userId="8fd5ec3e-c8da-46f6-bbad-ce7a7878ba0f" providerId="ADAL" clId="{F3C475C8-A694-5247-A1B1-BD486B98B493}" dt="2026-05-11T17:19:10.059" v="13064" actId="20577"/>
+        <pc:sldMkLst>
+          <pc:docMk/>
+          <pc:sldMk cId="1988230745" sldId="272"/>
+        </pc:sldMkLst>
+      </pc:sldChg>
       <pc:sldChg chg="modSp new mod modNotesTx">
-        <pc:chgData name="Andrew Kates" userId="8fd5ec3e-c8da-46f6-bbad-ce7a7878ba0f" providerId="ADAL" clId="{F3C475C8-A694-5247-A1B1-BD486B98B493}" dt="2026-04-14T22:04:54.614" v="10314" actId="20577"/>
+        <pc:chgData name="Andrew Kates" userId="8fd5ec3e-c8da-46f6-bbad-ce7a7878ba0f" providerId="ADAL" clId="{F3C475C8-A694-5247-A1B1-BD486B98B493}" dt="2026-05-11T17:18:43.476" v="13015" actId="20577"/>
         <pc:sldMkLst>
           <pc:docMk/>
           <pc:sldMk cId="1510800784" sldId="276"/>
@@ -161,7 +169,7 @@
           </ac:spMkLst>
         </pc:spChg>
         <pc:spChg chg="mod">
-          <ac:chgData name="Andrew Kates" userId="8fd5ec3e-c8da-46f6-bbad-ce7a7878ba0f" providerId="ADAL" clId="{F3C475C8-A694-5247-A1B1-BD486B98B493}" dt="2026-04-14T22:02:19.552" v="9922" actId="20577"/>
+          <ac:chgData name="Andrew Kates" userId="8fd5ec3e-c8da-46f6-bbad-ce7a7878ba0f" providerId="ADAL" clId="{F3C475C8-A694-5247-A1B1-BD486B98B493}" dt="2026-05-11T17:18:43.476" v="13015" actId="20577"/>
           <ac:spMkLst>
             <pc:docMk/>
             <pc:sldMk cId="1510800784" sldId="276"/>
@@ -227,6 +235,29 @@
             <pc:docMk/>
             <pc:sldMk cId="3163074255" sldId="279"/>
             <ac:spMk id="3" creationId="{AA8218A9-E9CC-32B5-D297-CABB62CD1204}"/>
+          </ac:spMkLst>
+        </pc:spChg>
+      </pc:sldChg>
+      <pc:sldChg chg="modSp new mod">
+        <pc:chgData name="Andrew Kates" userId="8fd5ec3e-c8da-46f6-bbad-ce7a7878ba0f" providerId="ADAL" clId="{F3C475C8-A694-5247-A1B1-BD486B98B493}" dt="2026-05-11T17:17:48.647" v="12948" actId="20577"/>
+        <pc:sldMkLst>
+          <pc:docMk/>
+          <pc:sldMk cId="2913460077" sldId="280"/>
+        </pc:sldMkLst>
+        <pc:spChg chg="mod">
+          <ac:chgData name="Andrew Kates" userId="8fd5ec3e-c8da-46f6-bbad-ce7a7878ba0f" providerId="ADAL" clId="{F3C475C8-A694-5247-A1B1-BD486B98B493}" dt="2026-05-11T17:16:55.838" v="12901" actId="20577"/>
+          <ac:spMkLst>
+            <pc:docMk/>
+            <pc:sldMk cId="2913460077" sldId="280"/>
+            <ac:spMk id="2" creationId="{2714E5C6-4F65-A868-4B6E-75990055CC99}"/>
+          </ac:spMkLst>
+        </pc:spChg>
+        <pc:spChg chg="mod">
+          <ac:chgData name="Andrew Kates" userId="8fd5ec3e-c8da-46f6-bbad-ce7a7878ba0f" providerId="ADAL" clId="{F3C475C8-A694-5247-A1B1-BD486B98B493}" dt="2026-05-11T17:17:48.647" v="12948" actId="20577"/>
+          <ac:spMkLst>
+            <pc:docMk/>
+            <pc:sldMk cId="2913460077" sldId="280"/>
+            <ac:spMk id="3" creationId="{B5F32B5F-1F0E-D479-ECFB-BBA2812A72AD}"/>
           </ac:spMkLst>
         </pc:spChg>
       </pc:sldChg>
@@ -21160,7 +21191,7 @@
           <a:p>
             <a:fld id="{0D194C35-0AA9-41CB-84F6-AF1A2EF42389}" type="datetimeFigureOut">
               <a:rPr lang="en-CA" smtClean="0"/>
-              <a:t>2026-05-09</a:t>
+              <a:t>2026-05-11</a:t>
             </a:fld>
             <a:endParaRPr lang="en-CA"/>
           </a:p>
@@ -22259,7 +22290,7 @@
           <a:p>
             <a:fld id="{EAF9EB4E-D50A-4CF1-9B06-457599E410FB}" type="slidenum">
               <a:rPr lang="en-CA" smtClean="0"/>
-              <a:t>11</a:t>
+              <a:t>12</a:t>
             </a:fld>
             <a:endParaRPr lang="en-CA"/>
           </a:p>
@@ -23025,7 +23056,7 @@
           <a:p>
             <a:fld id="{EAF9EB4E-D50A-4CF1-9B06-457599E410FB}" type="slidenum">
               <a:rPr lang="en-CA" smtClean="0"/>
-              <a:t>12</a:t>
+              <a:t>13</a:t>
             </a:fld>
             <a:endParaRPr lang="en-CA"/>
           </a:p>
@@ -23969,7 +24000,7 @@
           <a:p>
             <a:fld id="{EAF9EB4E-D50A-4CF1-9B06-457599E410FB}" type="slidenum">
               <a:rPr lang="en-CA" smtClean="0"/>
-              <a:t>13</a:t>
+              <a:t>14</a:t>
             </a:fld>
             <a:endParaRPr lang="en-CA"/>
           </a:p>
@@ -24062,7 +24093,7 @@
           <a:p>
             <a:fld id="{EAF9EB4E-D50A-4CF1-9B06-457599E410FB}" type="slidenum">
               <a:rPr lang="en-CA" smtClean="0"/>
-              <a:t>15</a:t>
+              <a:t>16</a:t>
             </a:fld>
             <a:endParaRPr lang="en-CA"/>
           </a:p>
@@ -24630,6 +24661,19 @@
               <a:rPr lang="en-US" dirty="0"/>
               <a:t>Build something good… </a:t>
             </a:r>
+          </a:p>
+          <a:p>
+            <a:endParaRPr lang="en-US" b="0" dirty="0"/>
+          </a:p>
+          <a:p>
+            <a:r>
+              <a:rPr lang="en-US" b="0" dirty="0"/>
+              <a:t>How do you climb a mountain, </a:t>
+            </a:r>
+            <a:r>
+              <a:rPr lang="en-US" b="0"/>
+              <a:t>you start walking.</a:t>
+            </a:r>
             <a:endParaRPr lang="en-US" b="0" dirty="0"/>
           </a:p>
           <a:p>
@@ -25162,7 +25206,7 @@
           <a:p>
             <a:fld id="{EAF9EB4E-D50A-4CF1-9B06-457599E410FB}" type="slidenum">
               <a:rPr lang="en-CA" smtClean="0"/>
-              <a:t>7</a:t>
+              <a:t>8</a:t>
             </a:fld>
             <a:endParaRPr lang="en-CA"/>
           </a:p>
@@ -25630,7 +25674,7 @@
           <a:p>
             <a:fld id="{EAF9EB4E-D50A-4CF1-9B06-457599E410FB}" type="slidenum">
               <a:rPr lang="en-CA" smtClean="0"/>
-              <a:t>8</a:t>
+              <a:t>9</a:t>
             </a:fld>
             <a:endParaRPr lang="en-CA"/>
           </a:p>
@@ -26332,7 +26376,7 @@
           <a:p>
             <a:fld id="{EAF9EB4E-D50A-4CF1-9B06-457599E410FB}" type="slidenum">
               <a:rPr lang="en-CA" smtClean="0"/>
-              <a:t>10</a:t>
+              <a:t>11</a:t>
             </a:fld>
             <a:endParaRPr lang="en-CA"/>
           </a:p>
@@ -28092,6 +28136,160 @@
         </p:nvSpPr>
         <p:spPr>
           <a:xfrm>
+            <a:off x="286747" y="1104559"/>
+            <a:ext cx="6660232" cy="565151"/>
+          </a:xfrm>
+          <a:noFill/>
+        </p:spPr>
+        <p:txBody>
+          <a:bodyPr>
+            <a:noAutofit/>
+          </a:bodyPr>
+          <a:lstStyle/>
+          <a:p>
+            <a:r>
+              <a:rPr lang="en-CA" sz="3733" dirty="0"/>
+              <a:t>Step 4.  Target Market</a:t>
+            </a:r>
+          </a:p>
+        </p:txBody>
+      </p:sp>
+      <p:pic>
+        <p:nvPicPr>
+          <p:cNvPr id="5" name="Picture 5"/>
+          <p:cNvPicPr>
+            <a:picLocks noChangeAspect="1"/>
+          </p:cNvPicPr>
+          <p:nvPr/>
+        </p:nvPicPr>
+        <p:blipFill rotWithShape="1">
+          <a:blip r:embed="rId3">
+            <a:extLst>
+              <a:ext uri="{28A0092B-C50C-407E-A947-70E740481C1C}">
+                <a14:useLocalDpi xmlns:a14="http://schemas.microsoft.com/office/drawing/2010/main" val="0"/>
+              </a:ext>
+            </a:extLst>
+          </a:blip>
+          <a:srcRect l="17219" t="50876" r="59719"/>
+          <a:stretch/>
+        </p:blipFill>
+        <p:spPr bwMode="auto">
+          <a:xfrm>
+            <a:off x="271338" y="2399073"/>
+            <a:ext cx="1691148" cy="1759487"/>
+          </a:xfrm>
+          <a:prstGeom prst="rect">
+            <a:avLst/>
+          </a:prstGeom>
+          <a:noFill/>
+          <a:ln>
+            <a:noFill/>
+          </a:ln>
+          <a:extLst>
+            <a:ext uri="{909E8E84-426E-40DD-AFC4-6F175D3DCCD1}">
+              <a14:hiddenFill xmlns:a14="http://schemas.microsoft.com/office/drawing/2010/main">
+                <a:solidFill>
+                  <a:srgbClr val="FFFFFF"/>
+                </a:solidFill>
+              </a14:hiddenFill>
+            </a:ext>
+            <a:ext uri="{91240B29-F687-4F45-9708-019B960494DF}">
+              <a14:hiddenLine xmlns:a14="http://schemas.microsoft.com/office/drawing/2010/main" w="9525">
+                <a:solidFill>
+                  <a:srgbClr val="000000"/>
+                </a:solidFill>
+                <a:miter lim="800000"/>
+                <a:headEnd/>
+                <a:tailEnd/>
+              </a14:hiddenLine>
+            </a:ext>
+          </a:extLst>
+        </p:spPr>
+      </p:pic>
+      <p:graphicFrame>
+        <p:nvGraphicFramePr>
+          <p:cNvPr id="2" name="Diagram 1">
+            <a:extLst>
+              <a:ext uri="{FF2B5EF4-FFF2-40B4-BE49-F238E27FC236}">
+                <a16:creationId xmlns:a16="http://schemas.microsoft.com/office/drawing/2014/main" id="{D0A8F765-861F-91C7-36C3-3555BF0BF1D9}"/>
+              </a:ext>
+            </a:extLst>
+          </p:cNvPr>
+          <p:cNvGraphicFramePr>
+            <a:graphicFrameLocks noChangeAspect="1"/>
+          </p:cNvGraphicFramePr>
+          <p:nvPr>
+            <p:extLst>
+              <p:ext uri="{D42A27DB-BD31-4B8C-83A1-F6EECF244321}">
+                <p14:modId xmlns:p14="http://schemas.microsoft.com/office/powerpoint/2010/main" val="2401085282"/>
+              </p:ext>
+            </p:extLst>
+          </p:nvPr>
+        </p:nvGraphicFramePr>
+        <p:xfrm>
+          <a:off x="588000" y="794513"/>
+          <a:ext cx="11016000" cy="6728093"/>
+        </p:xfrm>
+        <a:graphic>
+          <a:graphicData uri="http://schemas.openxmlformats.org/drawingml/2006/diagram">
+            <dgm:relIds xmlns:dgm="http://schemas.openxmlformats.org/drawingml/2006/diagram" xmlns:r="http://schemas.openxmlformats.org/officeDocument/2006/relationships" r:dm="rId4" r:lo="rId5" r:qs="rId6" r:cs="rId7"/>
+          </a:graphicData>
+        </a:graphic>
+      </p:graphicFrame>
+    </p:spTree>
+    <p:extLst>
+      <p:ext uri="{BB962C8B-B14F-4D97-AF65-F5344CB8AC3E}">
+        <p14:creationId xmlns:p14="http://schemas.microsoft.com/office/powerpoint/2010/main" val="568366746"/>
+      </p:ext>
+    </p:extLst>
+  </p:cSld>
+  <p:clrMapOvr>
+    <a:masterClrMapping/>
+  </p:clrMapOvr>
+  <mc:AlternateContent xmlns:mc="http://schemas.openxmlformats.org/markup-compatibility/2006" xmlns:p14="http://schemas.microsoft.com/office/powerpoint/2010/main">
+    <mc:Choice Requires="p14">
+      <p:transition spd="med" p14:dur="700">
+        <p:fade/>
+      </p:transition>
+    </mc:Choice>
+    <mc:Fallback xmlns="">
+      <p:transition spd="med">
+        <p:fade/>
+      </p:transition>
+    </mc:Fallback>
+  </mc:AlternateContent>
+</p:sld>
+</file>
+
+<file path=ppt/slides/slide11.xml><?xml version="1.0" encoding="utf-8"?>
+<p:sld xmlns:a="http://schemas.openxmlformats.org/drawingml/2006/main" xmlns:r="http://schemas.openxmlformats.org/officeDocument/2006/relationships" xmlns:p="http://schemas.openxmlformats.org/presentationml/2006/main">
+  <p:cSld>
+    <p:spTree>
+      <p:nvGrpSpPr>
+        <p:cNvPr id="1" name=""/>
+        <p:cNvGrpSpPr/>
+        <p:nvPr/>
+      </p:nvGrpSpPr>
+      <p:grpSpPr>
+        <a:xfrm>
+          <a:off x="0" y="0"/>
+          <a:ext cx="0" cy="0"/>
+          <a:chOff x="0" y="0"/>
+          <a:chExt cx="0" cy="0"/>
+        </a:xfrm>
+      </p:grpSpPr>
+      <p:sp>
+        <p:nvSpPr>
+          <p:cNvPr id="63490" name="Rectangle 2"/>
+          <p:cNvSpPr>
+            <a:spLocks noGrp="1" noChangeArrowheads="1"/>
+          </p:cNvSpPr>
+          <p:nvPr>
+            <p:ph type="title"/>
+          </p:nvPr>
+        </p:nvSpPr>
+        <p:spPr>
+          <a:xfrm>
             <a:off x="286745" y="1104559"/>
             <a:ext cx="9808339" cy="565151"/>
           </a:xfrm>
@@ -28679,7 +28877,7 @@
 </p:sld>
 </file>
 
-<file path=ppt/slides/slide11.xml><?xml version="1.0" encoding="utf-8"?>
+<file path=ppt/slides/slide12.xml><?xml version="1.0" encoding="utf-8"?>
 <p:sld xmlns:a="http://schemas.openxmlformats.org/drawingml/2006/main" xmlns:r="http://schemas.openxmlformats.org/officeDocument/2006/relationships" xmlns:p="http://schemas.openxmlformats.org/presentationml/2006/main">
   <p:cSld>
     <p:spTree>
@@ -29341,7 +29539,7 @@
 </p:sld>
 </file>
 
-<file path=ppt/slides/slide12.xml><?xml version="1.0" encoding="utf-8"?>
+<file path=ppt/slides/slide13.xml><?xml version="1.0" encoding="utf-8"?>
 <p:sld xmlns:a="http://schemas.openxmlformats.org/drawingml/2006/main" xmlns:r="http://schemas.openxmlformats.org/officeDocument/2006/relationships" xmlns:p="http://schemas.openxmlformats.org/presentationml/2006/main" show="0">
   <p:cSld>
     <p:spTree>
@@ -30328,7 +30526,7 @@
 </p:sld>
 </file>
 
-<file path=ppt/slides/slide13.xml><?xml version="1.0" encoding="utf-8"?>
+<file path=ppt/slides/slide14.xml><?xml version="1.0" encoding="utf-8"?>
 <p:sld xmlns:a="http://schemas.openxmlformats.org/drawingml/2006/main" xmlns:r="http://schemas.openxmlformats.org/officeDocument/2006/relationships" xmlns:p="http://schemas.openxmlformats.org/presentationml/2006/main">
   <p:cSld>
     <p:spTree>
@@ -30480,7 +30678,7 @@
 </p:sld>
 </file>
 
-<file path=ppt/slides/slide14.xml><?xml version="1.0" encoding="utf-8"?>
+<file path=ppt/slides/slide15.xml><?xml version="1.0" encoding="utf-8"?>
 <p:sld xmlns:a="http://schemas.openxmlformats.org/drawingml/2006/main" xmlns:r="http://schemas.openxmlformats.org/officeDocument/2006/relationships" xmlns:p="http://schemas.openxmlformats.org/presentationml/2006/main" show="0">
   <p:cSld>
     <p:spTree>
@@ -30619,7 +30817,7 @@
 </p:sld>
 </file>
 
-<file path=ppt/slides/slide15.xml><?xml version="1.0" encoding="utf-8"?>
+<file path=ppt/slides/slide16.xml><?xml version="1.0" encoding="utf-8"?>
 <p:sld xmlns:a="http://schemas.openxmlformats.org/drawingml/2006/main" xmlns:r="http://schemas.openxmlformats.org/officeDocument/2006/relationships" xmlns:p="http://schemas.openxmlformats.org/presentationml/2006/main" show="0">
   <p:cSld>
     <p:spTree>
@@ -32107,7 +32305,7 @@
             <a:pPr lvl="1"/>
             <a:r>
               <a:rPr lang="en-US" dirty="0"/>
-              <a:t>Dashboards</a:t>
+              <a:t>Data Communication (Dashboards)</a:t>
             </a:r>
           </a:p>
           <a:p>
@@ -32306,6 +32504,131 @@
           <p:cNvPr id="2" name="Title 1">
             <a:extLst>
               <a:ext uri="{FF2B5EF4-FFF2-40B4-BE49-F238E27FC236}">
+                <a16:creationId xmlns:a16="http://schemas.microsoft.com/office/drawing/2014/main" id="{2714E5C6-4F65-A868-4B6E-75990055CC99}"/>
+              </a:ext>
+            </a:extLst>
+          </p:cNvPr>
+          <p:cNvSpPr>
+            <a:spLocks noGrp="1"/>
+          </p:cNvSpPr>
+          <p:nvPr>
+            <p:ph type="title"/>
+          </p:nvPr>
+        </p:nvSpPr>
+        <p:spPr/>
+        <p:txBody>
+          <a:bodyPr/>
+          <a:lstStyle/>
+          <a:p>
+            <a:r>
+              <a:rPr lang="en-US" dirty="0"/>
+              <a:t>Choose your lens</a:t>
+            </a:r>
+          </a:p>
+        </p:txBody>
+      </p:sp>
+      <p:sp>
+        <p:nvSpPr>
+          <p:cNvPr id="3" name="Text Placeholder 2">
+            <a:extLst>
+              <a:ext uri="{FF2B5EF4-FFF2-40B4-BE49-F238E27FC236}">
+                <a16:creationId xmlns:a16="http://schemas.microsoft.com/office/drawing/2014/main" id="{B5F32B5F-1F0E-D479-ECFB-BBA2812A72AD}"/>
+              </a:ext>
+            </a:extLst>
+          </p:cNvPr>
+          <p:cNvSpPr>
+            <a:spLocks noGrp="1"/>
+          </p:cNvSpPr>
+          <p:nvPr>
+            <p:ph type="body" idx="1"/>
+          </p:nvPr>
+        </p:nvSpPr>
+        <p:spPr/>
+        <p:txBody>
+          <a:bodyPr/>
+          <a:lstStyle/>
+          <a:p>
+            <a:r>
+              <a:rPr lang="en-US" dirty="0"/>
+              <a:t>Athlete</a:t>
+            </a:r>
+          </a:p>
+          <a:p>
+            <a:endParaRPr lang="en-US" dirty="0"/>
+          </a:p>
+          <a:p>
+            <a:r>
+              <a:rPr lang="en-US" dirty="0"/>
+              <a:t>Practitioner</a:t>
+            </a:r>
+          </a:p>
+          <a:p>
+            <a:endParaRPr lang="en-US" dirty="0"/>
+          </a:p>
+          <a:p>
+            <a:r>
+              <a:rPr lang="en-US" dirty="0"/>
+              <a:t>Coach</a:t>
+            </a:r>
+          </a:p>
+          <a:p>
+            <a:endParaRPr lang="en-US" dirty="0"/>
+          </a:p>
+          <a:p>
+            <a:r>
+              <a:rPr lang="en-US" dirty="0"/>
+              <a:t>Administrator</a:t>
+            </a:r>
+          </a:p>
+        </p:txBody>
+      </p:sp>
+    </p:spTree>
+    <p:extLst>
+      <p:ext uri="{BB962C8B-B14F-4D97-AF65-F5344CB8AC3E}">
+        <p14:creationId xmlns:p14="http://schemas.microsoft.com/office/powerpoint/2010/main" val="2913460077"/>
+      </p:ext>
+    </p:extLst>
+  </p:cSld>
+  <p:clrMapOvr>
+    <a:masterClrMapping/>
+  </p:clrMapOvr>
+  <mc:AlternateContent xmlns:mc="http://schemas.openxmlformats.org/markup-compatibility/2006" xmlns:p14="http://schemas.microsoft.com/office/powerpoint/2010/main">
+    <mc:Choice Requires="p14">
+      <p:transition spd="med" p14:dur="700">
+        <p:fade/>
+      </p:transition>
+    </mc:Choice>
+    <mc:Fallback xmlns="">
+      <p:transition spd="med">
+        <p:fade/>
+      </p:transition>
+    </mc:Fallback>
+  </mc:AlternateContent>
+</p:sld>
+</file>
+
+<file path=ppt/slides/slide7.xml><?xml version="1.0" encoding="utf-8"?>
+<p:sld xmlns:a="http://schemas.openxmlformats.org/drawingml/2006/main" xmlns:r="http://schemas.openxmlformats.org/officeDocument/2006/relationships" xmlns:p="http://schemas.openxmlformats.org/presentationml/2006/main">
+  <p:cSld>
+    <p:spTree>
+      <p:nvGrpSpPr>
+        <p:cNvPr id="1" name=""/>
+        <p:cNvGrpSpPr/>
+        <p:nvPr/>
+      </p:nvGrpSpPr>
+      <p:grpSpPr>
+        <a:xfrm>
+          <a:off x="0" y="0"/>
+          <a:ext cx="0" cy="0"/>
+          <a:chOff x="0" y="0"/>
+          <a:chExt cx="0" cy="0"/>
+        </a:xfrm>
+      </p:grpSpPr>
+      <p:sp>
+        <p:nvSpPr>
+          <p:cNvPr id="2" name="Title 1">
+            <a:extLst>
+              <a:ext uri="{FF2B5EF4-FFF2-40B4-BE49-F238E27FC236}">
                 <a16:creationId xmlns:a16="http://schemas.microsoft.com/office/drawing/2014/main" id="{7AD3A37E-B017-9684-8292-92306C831849}"/>
               </a:ext>
             </a:extLst>
@@ -32379,7 +32702,7 @@
 </p:sld>
 </file>
 
-<file path=ppt/slides/slide7.xml><?xml version="1.0" encoding="utf-8"?>
+<file path=ppt/slides/slide8.xml><?xml version="1.0" encoding="utf-8"?>
 <p:sld xmlns:a="http://schemas.openxmlformats.org/drawingml/2006/main" xmlns:r="http://schemas.openxmlformats.org/officeDocument/2006/relationships" xmlns:p="http://schemas.openxmlformats.org/presentationml/2006/main">
   <p:cSld>
     <p:spTree>
@@ -32833,7 +33156,7 @@
 </p:sld>
 </file>
 
-<file path=ppt/slides/slide8.xml><?xml version="1.0" encoding="utf-8"?>
+<file path=ppt/slides/slide9.xml><?xml version="1.0" encoding="utf-8"?>
 <p:sld xmlns:a="http://schemas.openxmlformats.org/drawingml/2006/main" xmlns:r="http://schemas.openxmlformats.org/officeDocument/2006/relationships" xmlns:p="http://schemas.openxmlformats.org/presentationml/2006/main">
   <p:cSld>
     <p:spTree>
@@ -33415,160 +33738,6 @@
     <p:extLst>
       <p:ext uri="{BB962C8B-B14F-4D97-AF65-F5344CB8AC3E}">
         <p14:creationId xmlns:p14="http://schemas.microsoft.com/office/powerpoint/2010/main" val="3918262711"/>
-      </p:ext>
-    </p:extLst>
-  </p:cSld>
-  <p:clrMapOvr>
-    <a:masterClrMapping/>
-  </p:clrMapOvr>
-  <mc:AlternateContent xmlns:mc="http://schemas.openxmlformats.org/markup-compatibility/2006" xmlns:p14="http://schemas.microsoft.com/office/powerpoint/2010/main">
-    <mc:Choice Requires="p14">
-      <p:transition spd="med" p14:dur="700">
-        <p:fade/>
-      </p:transition>
-    </mc:Choice>
-    <mc:Fallback xmlns="">
-      <p:transition spd="med">
-        <p:fade/>
-      </p:transition>
-    </mc:Fallback>
-  </mc:AlternateContent>
-</p:sld>
-</file>
-
-<file path=ppt/slides/slide9.xml><?xml version="1.0" encoding="utf-8"?>
-<p:sld xmlns:a="http://schemas.openxmlformats.org/drawingml/2006/main" xmlns:r="http://schemas.openxmlformats.org/officeDocument/2006/relationships" xmlns:p="http://schemas.openxmlformats.org/presentationml/2006/main">
-  <p:cSld>
-    <p:spTree>
-      <p:nvGrpSpPr>
-        <p:cNvPr id="1" name=""/>
-        <p:cNvGrpSpPr/>
-        <p:nvPr/>
-      </p:nvGrpSpPr>
-      <p:grpSpPr>
-        <a:xfrm>
-          <a:off x="0" y="0"/>
-          <a:ext cx="0" cy="0"/>
-          <a:chOff x="0" y="0"/>
-          <a:chExt cx="0" cy="0"/>
-        </a:xfrm>
-      </p:grpSpPr>
-      <p:sp>
-        <p:nvSpPr>
-          <p:cNvPr id="63490" name="Rectangle 2"/>
-          <p:cNvSpPr>
-            <a:spLocks noGrp="1" noChangeArrowheads="1"/>
-          </p:cNvSpPr>
-          <p:nvPr>
-            <p:ph type="title"/>
-          </p:nvPr>
-        </p:nvSpPr>
-        <p:spPr>
-          <a:xfrm>
-            <a:off x="286747" y="1104559"/>
-            <a:ext cx="6660232" cy="565151"/>
-          </a:xfrm>
-          <a:noFill/>
-        </p:spPr>
-        <p:txBody>
-          <a:bodyPr>
-            <a:noAutofit/>
-          </a:bodyPr>
-          <a:lstStyle/>
-          <a:p>
-            <a:r>
-              <a:rPr lang="en-CA" sz="3733" dirty="0"/>
-              <a:t>Step 4.  Target Market</a:t>
-            </a:r>
-          </a:p>
-        </p:txBody>
-      </p:sp>
-      <p:pic>
-        <p:nvPicPr>
-          <p:cNvPr id="5" name="Picture 5"/>
-          <p:cNvPicPr>
-            <a:picLocks noChangeAspect="1"/>
-          </p:cNvPicPr>
-          <p:nvPr/>
-        </p:nvPicPr>
-        <p:blipFill rotWithShape="1">
-          <a:blip r:embed="rId3">
-            <a:extLst>
-              <a:ext uri="{28A0092B-C50C-407E-A947-70E740481C1C}">
-                <a14:useLocalDpi xmlns:a14="http://schemas.microsoft.com/office/drawing/2010/main" val="0"/>
-              </a:ext>
-            </a:extLst>
-          </a:blip>
-          <a:srcRect l="17219" t="50876" r="59719"/>
-          <a:stretch/>
-        </p:blipFill>
-        <p:spPr bwMode="auto">
-          <a:xfrm>
-            <a:off x="271338" y="2399073"/>
-            <a:ext cx="1691148" cy="1759487"/>
-          </a:xfrm>
-          <a:prstGeom prst="rect">
-            <a:avLst/>
-          </a:prstGeom>
-          <a:noFill/>
-          <a:ln>
-            <a:noFill/>
-          </a:ln>
-          <a:extLst>
-            <a:ext uri="{909E8E84-426E-40DD-AFC4-6F175D3DCCD1}">
-              <a14:hiddenFill xmlns:a14="http://schemas.microsoft.com/office/drawing/2010/main">
-                <a:solidFill>
-                  <a:srgbClr val="FFFFFF"/>
-                </a:solidFill>
-              </a14:hiddenFill>
-            </a:ext>
-            <a:ext uri="{91240B29-F687-4F45-9708-019B960494DF}">
-              <a14:hiddenLine xmlns:a14="http://schemas.microsoft.com/office/drawing/2010/main" w="9525">
-                <a:solidFill>
-                  <a:srgbClr val="000000"/>
-                </a:solidFill>
-                <a:miter lim="800000"/>
-                <a:headEnd/>
-                <a:tailEnd/>
-              </a14:hiddenLine>
-            </a:ext>
-          </a:extLst>
-        </p:spPr>
-      </p:pic>
-      <p:graphicFrame>
-        <p:nvGraphicFramePr>
-          <p:cNvPr id="2" name="Diagram 1">
-            <a:extLst>
-              <a:ext uri="{FF2B5EF4-FFF2-40B4-BE49-F238E27FC236}">
-                <a16:creationId xmlns:a16="http://schemas.microsoft.com/office/drawing/2014/main" id="{D0A8F765-861F-91C7-36C3-3555BF0BF1D9}"/>
-              </a:ext>
-            </a:extLst>
-          </p:cNvPr>
-          <p:cNvGraphicFramePr>
-            <a:graphicFrameLocks noChangeAspect="1"/>
-          </p:cNvGraphicFramePr>
-          <p:nvPr>
-            <p:extLst>
-              <p:ext uri="{D42A27DB-BD31-4B8C-83A1-F6EECF244321}">
-                <p14:modId xmlns:p14="http://schemas.microsoft.com/office/powerpoint/2010/main" val="2401085282"/>
-              </p:ext>
-            </p:extLst>
-          </p:nvPr>
-        </p:nvGraphicFramePr>
-        <p:xfrm>
-          <a:off x="588000" y="794513"/>
-          <a:ext cx="11016000" cy="6728093"/>
-        </p:xfrm>
-        <a:graphic>
-          <a:graphicData uri="http://schemas.openxmlformats.org/drawingml/2006/diagram">
-            <dgm:relIds xmlns:dgm="http://schemas.openxmlformats.org/drawingml/2006/diagram" xmlns:r="http://schemas.openxmlformats.org/officeDocument/2006/relationships" r:dm="rId4" r:lo="rId5" r:qs="rId6" r:cs="rId7"/>
-          </a:graphicData>
-        </a:graphic>
-      </p:graphicFrame>
-    </p:spTree>
-    <p:extLst>
-      <p:ext uri="{BB962C8B-B14F-4D97-AF65-F5344CB8AC3E}">
-        <p14:creationId xmlns:p14="http://schemas.microsoft.com/office/powerpoint/2010/main" val="568366746"/>
       </p:ext>
     </p:extLst>
   </p:cSld>

--- a/RTP Resources/RTP_L&L_2026.pptx
+++ b/RTP Resources/RTP_L&L_2026.pptx
@@ -146,7 +146,7 @@
   <pc:docChgLst>
     <pc:chgData name="Andrew Kates" userId="8fd5ec3e-c8da-46f6-bbad-ce7a7878ba0f" providerId="ADAL" clId="{F3C475C8-A694-5247-A1B1-BD486B98B493}"/>
     <pc:docChg chg="undo redo custSel addSld delSld modSld sldOrd">
-      <pc:chgData name="Andrew Kates" userId="8fd5ec3e-c8da-46f6-bbad-ce7a7878ba0f" providerId="ADAL" clId="{F3C475C8-A694-5247-A1B1-BD486B98B493}" dt="2026-05-16T02:04:26.462" v="23273" actId="20577"/>
+      <pc:chgData name="Andrew Kates" userId="8fd5ec3e-c8da-46f6-bbad-ce7a7878ba0f" providerId="ADAL" clId="{F3C475C8-A694-5247-A1B1-BD486B98B493}" dt="2026-05-18T16:35:43.363" v="24898" actId="20577"/>
       <pc:docMkLst>
         <pc:docMk/>
       </pc:docMkLst>
@@ -262,7 +262,7 @@
         </pc:spChg>
       </pc:sldChg>
       <pc:sldChg chg="modSp new mod modAnim modNotesTx">
-        <pc:chgData name="Andrew Kates" userId="8fd5ec3e-c8da-46f6-bbad-ce7a7878ba0f" providerId="ADAL" clId="{F3C475C8-A694-5247-A1B1-BD486B98B493}" dt="2026-05-16T02:04:26.462" v="23273" actId="20577"/>
+        <pc:chgData name="Andrew Kates" userId="8fd5ec3e-c8da-46f6-bbad-ce7a7878ba0f" providerId="ADAL" clId="{F3C475C8-A694-5247-A1B1-BD486B98B493}" dt="2026-05-16T20:52:41.231" v="24412" actId="20577"/>
         <pc:sldMkLst>
           <pc:docMk/>
           <pc:sldMk cId="3163074255" sldId="279"/>
@@ -285,7 +285,7 @@
         </pc:spChg>
       </pc:sldChg>
       <pc:sldChg chg="modSp new mod modNotesTx">
-        <pc:chgData name="Andrew Kates" userId="8fd5ec3e-c8da-46f6-bbad-ce7a7878ba0f" providerId="ADAL" clId="{F3C475C8-A694-5247-A1B1-BD486B98B493}" dt="2026-05-15T16:49:40.259" v="22421" actId="20577"/>
+        <pc:chgData name="Andrew Kates" userId="8fd5ec3e-c8da-46f6-bbad-ce7a7878ba0f" providerId="ADAL" clId="{F3C475C8-A694-5247-A1B1-BD486B98B493}" dt="2026-05-18T16:35:43.363" v="24898" actId="20577"/>
         <pc:sldMkLst>
           <pc:docMk/>
           <pc:sldMk cId="2913460077" sldId="280"/>
@@ -24664,7 +24664,7 @@
           <a:p>
             <a:fld id="{0D194C35-0AA9-41CB-84F6-AF1A2EF42389}" type="datetimeFigureOut">
               <a:rPr lang="en-CA" smtClean="0"/>
-              <a:t>2026-05-14</a:t>
+              <a:t>2026-05-18</a:t>
             </a:fld>
             <a:endParaRPr lang="en-CA"/>
           </a:p>
@@ -25065,7 +25065,7 @@
           <a:p>
             <a:r>
               <a:rPr lang="en-US" dirty="0"/>
-              <a:t>I anticipate there might be some questions about this.  I have many many ideas of how I think this should be incorporated into our business.  I'm very aware that there is an expectation that this project will be able to bring in revenue.  Ultimately this is beyond the scope of my role, but I did want to take the opportunity to highlight what I think should be the starting point.</a:t>
+              <a:t>I anticipate there might be some questions about this.  I have many many ideas of how I think this should be incorporated into our business.  I'm very aware that there is an expectation that this project will be able to bring in revenue.  Ultimately this is beyond the scope of my role, currently, but I did want to take the opportunity to highlight what I think should be the starting point.</a:t>
             </a:r>
           </a:p>
           <a:p>
@@ -25108,7 +25108,15 @@
           <a:p>
             <a:r>
               <a:rPr lang="en-US" dirty="0"/>
-              <a:t>We are already doing this work, and in a lot of cases we are not recouping any value from the sports that we are servicing.</a:t>
+              <a:t>We are already doing this work, and in a lot of cases we are not recouping any value from the sports and </a:t>
+            </a:r>
+            <a:r>
+              <a:rPr lang="en-US" dirty="0" err="1"/>
+              <a:t>athletesthat</a:t>
+            </a:r>
+            <a:r>
+              <a:rPr lang="en-US" dirty="0"/>
+              <a:t> we are servicing.</a:t>
             </a:r>
           </a:p>
           <a:p>
@@ -25128,6 +25136,58 @@
               <a:rPr lang="en-US" dirty="0"/>
               <a:t>Now that we have a formalized system in place, we have something tangible to bring to those discussions.  We can clearly show our partners how we will deliver an extremely high level of service and we can structure agreements to create fair and sustainable value for everyone involved.</a:t>
             </a:r>
+          </a:p>
+          <a:p>
+            <a:endParaRPr lang="en-US" dirty="0"/>
+          </a:p>
+          <a:p>
+            <a:r>
+              <a:rPr lang="en-US" dirty="0"/>
+              <a:t>So I just think that this would be a great place to start because we’re already doing that work, and then in the future I think that this project can open up a lot of </a:t>
+            </a:r>
+            <a:r>
+              <a:rPr lang="en-US"/>
+              <a:t>new opportunities </a:t>
+            </a:r>
+            <a:r>
+              <a:rPr lang="en-US" dirty="0"/>
+              <a:t>as well.</a:t>
+            </a:r>
+          </a:p>
+          <a:p>
+            <a:endParaRPr lang="en-US" dirty="0"/>
+          </a:p>
+          <a:p>
+            <a:endParaRPr lang="en-US" dirty="0"/>
+          </a:p>
+          <a:p>
+            <a:endParaRPr lang="en-US" dirty="0"/>
+          </a:p>
+          <a:p>
+            <a:r>
+              <a:rPr lang="en-US" dirty="0"/>
+              <a:t>It's just been a tough couple years of seeing FTE commitments from sports go down and down and down, but the expectations of what gets delivered doesn't always follow with that.  It always made sense to me when I was full time with a sport that if things pop up like injuries, you just deal with it, you make it work because that's your job.  But if I'm part time and I have all kinds of other </a:t>
+            </a:r>
+            <a:r>
+              <a:rPr lang="en-US" dirty="0" err="1"/>
+              <a:t>responsiblities</a:t>
+            </a:r>
+            <a:r>
+              <a:rPr lang="en-US" dirty="0"/>
+              <a:t>, </a:t>
+            </a:r>
+          </a:p>
+          <a:p>
+            <a:endParaRPr lang="en-US" dirty="0"/>
+          </a:p>
+          <a:p>
+            <a:r>
+              <a:rPr lang="en-US" dirty="0"/>
+              <a:t>Maybe we can use this to get sports to pay upfront.  Or we can include this service when they invest to a certain level..</a:t>
+            </a:r>
+          </a:p>
+          <a:p>
+            <a:endParaRPr lang="en-US" dirty="0"/>
           </a:p>
           <a:p>
             <a:endParaRPr lang="en-US" dirty="0"/>
@@ -30540,7 +30600,7 @@
           <a:p>
             <a:r>
               <a:rPr lang="en-US" dirty="0"/>
-              <a:t>Lastly before I start, I would like everyone watching to choose your lens through which to see how this can be implemented effectively.  </a:t>
+              <a:t>Lastly, choose your lens</a:t>
             </a:r>
           </a:p>
           <a:p>
@@ -30550,6 +30610,19 @@
             <a:r>
               <a:rPr lang="en-US" dirty="0"/>
               <a:t>When I’m building it, I’m trying to envision how this will work for all stakeholders, but most people who are engaging with this tool will be wearing only one or 2 hats.</a:t>
+            </a:r>
+          </a:p>
+          <a:p>
+            <a:endParaRPr lang="en-US" dirty="0"/>
+          </a:p>
+          <a:p>
+            <a:r>
+              <a:rPr lang="en-US"/>
+              <a:t>And </a:t>
+            </a:r>
+            <a:r>
+              <a:rPr lang="en-US" dirty="0"/>
+              <a:t>maybe this obvious, but whichever role you fall in to here, I just want people as your watching to really think critically about how this can be useful for you and the work that you can do.  And that can be within the context of RTP, or you can think more generally about how some of these tools can elevate other areas of performance services.</a:t>
             </a:r>
           </a:p>
           <a:p>

--- a/RTP Resources/RTP_L&L_2026.pptx
+++ b/RTP Resources/RTP_L&L_2026.pptx
@@ -136,7 +136,7 @@
 <file path=ppt/revisionInfo.xml><?xml version="1.0" encoding="utf-8"?>
 <p1510:revInfo xmlns:a="http://schemas.openxmlformats.org/drawingml/2006/main" xmlns:r="http://schemas.openxmlformats.org/officeDocument/2006/relationships" xmlns:p1510="http://schemas.microsoft.com/office/powerpoint/2015/10/main">
   <p1510:revLst>
-    <p1510:client id="{F82490E7-A7CD-694C-84E8-41E5CB8A531B}" v="115" dt="2026-05-16T01:06:13.727"/>
+    <p1510:client id="{F82490E7-A7CD-694C-84E8-41E5CB8A531B}" v="116" dt="2026-05-19T17:18:57.026"/>
   </p1510:revLst>
 </p1510:revInfo>
 </file>
@@ -146,7 +146,7 @@
   <pc:docChgLst>
     <pc:chgData name="Andrew Kates" userId="8fd5ec3e-c8da-46f6-bbad-ce7a7878ba0f" providerId="ADAL" clId="{F3C475C8-A694-5247-A1B1-BD486B98B493}"/>
     <pc:docChg chg="undo redo custSel addSld delSld modSld sldOrd">
-      <pc:chgData name="Andrew Kates" userId="8fd5ec3e-c8da-46f6-bbad-ce7a7878ba0f" providerId="ADAL" clId="{F3C475C8-A694-5247-A1B1-BD486B98B493}" dt="2026-05-18T16:35:43.363" v="24898" actId="20577"/>
+      <pc:chgData name="Andrew Kates" userId="8fd5ec3e-c8da-46f6-bbad-ce7a7878ba0f" providerId="ADAL" clId="{F3C475C8-A694-5247-A1B1-BD486B98B493}" dt="2026-05-19T17:22:01.870" v="25588" actId="20577"/>
       <pc:docMkLst>
         <pc:docMk/>
       </pc:docMkLst>
@@ -209,7 +209,7 @@
         </pc:graphicFrameChg>
       </pc:sldChg>
       <pc:sldChg chg="modSp new mod modNotesTx">
-        <pc:chgData name="Andrew Kates" userId="8fd5ec3e-c8da-46f6-bbad-ce7a7878ba0f" providerId="ADAL" clId="{F3C475C8-A694-5247-A1B1-BD486B98B493}" dt="2026-05-15T16:47:41.940" v="22369" actId="20577"/>
+        <pc:chgData name="Andrew Kates" userId="8fd5ec3e-c8da-46f6-bbad-ce7a7878ba0f" providerId="ADAL" clId="{F3C475C8-A694-5247-A1B1-BD486B98B493}" dt="2026-05-19T17:19:59.330" v="25446" actId="20577"/>
         <pc:sldMkLst>
           <pc:docMk/>
           <pc:sldMk cId="1510800784" sldId="276"/>
@@ -232,7 +232,7 @@
         </pc:spChg>
       </pc:sldChg>
       <pc:sldChg chg="modSp new mod modNotesTx">
-        <pc:chgData name="Andrew Kates" userId="8fd5ec3e-c8da-46f6-bbad-ce7a7878ba0f" providerId="ADAL" clId="{F3C475C8-A694-5247-A1B1-BD486B98B493}" dt="2026-05-15T16:48:38.105" v="22412" actId="20577"/>
+        <pc:chgData name="Andrew Kates" userId="8fd5ec3e-c8da-46f6-bbad-ce7a7878ba0f" providerId="ADAL" clId="{F3C475C8-A694-5247-A1B1-BD486B98B493}" dt="2026-05-19T17:22:01.870" v="25588" actId="20577"/>
         <pc:sldMkLst>
           <pc:docMk/>
           <pc:sldMk cId="2486907702" sldId="277"/>
@@ -308,7 +308,7 @@
         </pc:spChg>
       </pc:sldChg>
       <pc:sldChg chg="modSp new mod ord modNotesTx">
-        <pc:chgData name="Andrew Kates" userId="8fd5ec3e-c8da-46f6-bbad-ce7a7878ba0f" providerId="ADAL" clId="{F3C475C8-A694-5247-A1B1-BD486B98B493}" dt="2026-05-14T18:50:06.943" v="20106" actId="20577"/>
+        <pc:chgData name="Andrew Kates" userId="8fd5ec3e-c8da-46f6-bbad-ce7a7878ba0f" providerId="ADAL" clId="{F3C475C8-A694-5247-A1B1-BD486B98B493}" dt="2026-05-19T17:16:32.208" v="24978" actId="20577"/>
         <pc:sldMkLst>
           <pc:docMk/>
           <pc:sldMk cId="2793768868" sldId="281"/>
@@ -322,7 +322,7 @@
           </ac:spMkLst>
         </pc:spChg>
         <pc:spChg chg="mod">
-          <ac:chgData name="Andrew Kates" userId="8fd5ec3e-c8da-46f6-bbad-ce7a7878ba0f" providerId="ADAL" clId="{F3C475C8-A694-5247-A1B1-BD486B98B493}" dt="2026-05-13T18:47:05.874" v="15749" actId="20577"/>
+          <ac:chgData name="Andrew Kates" userId="8fd5ec3e-c8da-46f6-bbad-ce7a7878ba0f" providerId="ADAL" clId="{F3C475C8-A694-5247-A1B1-BD486B98B493}" dt="2026-05-19T17:16:32.208" v="24978" actId="20577"/>
           <ac:spMkLst>
             <pc:docMk/>
             <pc:sldMk cId="2793768868" sldId="281"/>
@@ -354,7 +354,7 @@
         </pc:graphicFrameChg>
       </pc:sldChg>
       <pc:sldChg chg="addSp delSp modSp new mod ord modAnim modNotesTx">
-        <pc:chgData name="Andrew Kates" userId="8fd5ec3e-c8da-46f6-bbad-ce7a7878ba0f" providerId="ADAL" clId="{F3C475C8-A694-5247-A1B1-BD486B98B493}" dt="2026-05-14T18:52:18.613" v="20133" actId="20577"/>
+        <pc:chgData name="Andrew Kates" userId="8fd5ec3e-c8da-46f6-bbad-ce7a7878ba0f" providerId="ADAL" clId="{F3C475C8-A694-5247-A1B1-BD486B98B493}" dt="2026-05-19T17:17:33.983" v="25081" actId="20577"/>
         <pc:sldMkLst>
           <pc:docMk/>
           <pc:sldMk cId="4116205107" sldId="310"/>
@@ -24664,7 +24664,7 @@
           <a:p>
             <a:fld id="{0D194C35-0AA9-41CB-84F6-AF1A2EF42389}" type="datetimeFigureOut">
               <a:rPr lang="en-CA" smtClean="0"/>
-              <a:t>2026-05-18</a:t>
+              <a:t>2026-05-19</a:t>
             </a:fld>
             <a:endParaRPr lang="en-CA"/>
           </a:p>
@@ -29315,8 +29315,28 @@
           <a:p>
             <a:r>
               <a:rPr lang="en-US" dirty="0"/>
-              <a:t>And the other day I was rehearsing this presentation for my boy, my one year old.. And.. Yeah He fell asleep on the floor, on his face…</a:t>
-            </a:r>
+              <a:t>And over the weekend I was rehearsing this presentation for my boy, my one year old.. And. I managed to bore him to sleep, so not the best results so far with my test audience but I'm </a:t>
+            </a:r>
+            <a:r>
+              <a:rPr lang="en-US" dirty="0" err="1"/>
+              <a:t>gonna</a:t>
+            </a:r>
+            <a:r>
+              <a:rPr lang="en-US" dirty="0"/>
+              <a:t> try to be better today</a:t>
+            </a:r>
+          </a:p>
+          <a:p>
+            <a:endParaRPr lang="en-US" dirty="0"/>
+          </a:p>
+          <a:p>
+            <a:endParaRPr lang="en-US" dirty="0"/>
+          </a:p>
+          <a:p>
+            <a:endParaRPr lang="en-US" dirty="0"/>
+          </a:p>
+          <a:p>
+            <a:endParaRPr lang="en-US" dirty="0"/>
           </a:p>
           <a:p>
             <a:endParaRPr lang="en-US" dirty="0"/>
@@ -30246,7 +30266,7 @@
           <a:p>
             <a:r>
               <a:rPr lang="en-US" dirty="0"/>
-              <a:t>Most of what I’ll be showing you is going to be delivered via a website.  </a:t>
+              <a:t>Most of what I’ll be showing you is going to be delivered via a website that I’ve built</a:t>
             </a:r>
           </a:p>
           <a:p>
@@ -30257,6 +30277,36 @@
               <a:rPr lang="en-US" dirty="0"/>
               <a:t>The website is the home for the actual protocol, and primarily makes use of dashboards to communicate information and to facilitate collaboration and decision making.</a:t>
             </a:r>
+          </a:p>
+          <a:p>
+            <a:endParaRPr lang="en-US" dirty="0"/>
+          </a:p>
+          <a:p>
+            <a:r>
+              <a:rPr lang="en-US" dirty="0"/>
+              <a:t>I’ll also walk through some data collection tools, I’ll try to make it clear how data goes through collection, management, analysis, reporting. I’ll share an exercise program template, making this work more efficient and more accessible for all practitioners, and I’ll talk about how I’m using a shared research library</a:t>
+            </a:r>
+          </a:p>
+          <a:p>
+            <a:endParaRPr lang="en-US" dirty="0"/>
+          </a:p>
+          <a:p>
+            <a:endParaRPr lang="en-US" dirty="0"/>
+          </a:p>
+          <a:p>
+            <a:endParaRPr lang="en-US" dirty="0"/>
+          </a:p>
+          <a:p>
+            <a:endParaRPr lang="en-US" dirty="0"/>
+          </a:p>
+          <a:p>
+            <a:endParaRPr lang="en-US" dirty="0"/>
+          </a:p>
+          <a:p>
+            <a:endParaRPr lang="en-US" dirty="0"/>
+          </a:p>
+          <a:p>
+            <a:endParaRPr lang="en-US" dirty="0"/>
           </a:p>
           <a:p>
             <a:endParaRPr lang="en-US" dirty="0"/>
@@ -30437,7 +30487,50 @@
             </a:pPr>
             <a:r>
               <a:rPr lang="en-US" dirty="0"/>
-              <a:t>This is not a set it and forget it protocol.  I don’t envision just handing the template off to an athlete and saying here you go good luck.  I see this more as a platform and a tool to deliver a world class rehabilitation to athletes we work with.  Yes, maybe we will be able to offer this tool as a service on it's own, but the real magic comes from our skilled practitioners delivering this.  </a:t>
+              <a:t>I think equally important, what isn’t this thing?</a:t>
+            </a:r>
+          </a:p>
+          <a:p>
+            <a:pPr marL="0" marR="0" lvl="0" indent="0" algn="l" defTabSz="914400" rtl="0" eaLnBrk="1" fontAlgn="auto" latinLnBrk="0" hangingPunct="1">
+              <a:lnSpc>
+                <a:spcPct val="100000"/>
+              </a:lnSpc>
+              <a:spcBef>
+                <a:spcPts val="0"/>
+              </a:spcBef>
+              <a:spcAft>
+                <a:spcPts val="0"/>
+              </a:spcAft>
+              <a:buClrTx/>
+              <a:buSzTx/>
+              <a:buFontTx/>
+              <a:buNone/>
+              <a:tabLst/>
+              <a:defRPr/>
+            </a:pPr>
+            <a:endParaRPr lang="en-US" dirty="0"/>
+          </a:p>
+          <a:p>
+            <a:pPr marL="0" marR="0" lvl="0" indent="0" algn="l" defTabSz="914400" rtl="0" eaLnBrk="1" fontAlgn="auto" latinLnBrk="0" hangingPunct="1">
+              <a:lnSpc>
+                <a:spcPct val="100000"/>
+              </a:lnSpc>
+              <a:spcBef>
+                <a:spcPts val="0"/>
+              </a:spcBef>
+              <a:spcAft>
+                <a:spcPts val="0"/>
+              </a:spcAft>
+              <a:buClrTx/>
+              <a:buSzTx/>
+              <a:buFontTx/>
+              <a:buNone/>
+              <a:tabLst/>
+              <a:defRPr/>
+            </a:pPr>
+            <a:r>
+              <a:rPr lang="en-US" dirty="0"/>
+              <a:t>This is not a set it and forget it protocol.  I don’t envision just handing the template off to an athlete and saying here you go good luck.  I see this more as a platform and a tool for us to get closer to delivering a world class rehabilitation to athletes we work with.  Hopefully the tool is good, but the real magic comes from our skilled practitioners delivering it.  </a:t>
             </a:r>
           </a:p>
           <a:p>
@@ -36641,7 +36734,7 @@
           <a:p>
             <a:r>
               <a:rPr lang="en-US" dirty="0"/>
-              <a:t>RTP Protocol Tour						~20 mins</a:t>
+              <a:t>RTP Protocol Tour						~25 mins</a:t>
             </a:r>
           </a:p>
           <a:p>
